--- a/output/slides/2026-07-09_80-80-companion-deck.pptx
+++ b/output/slides/2026-07-09_80-80-companion-deck.pptx
@@ -4,6 +4,9 @@
   <p:sldMasterIdLst>
     <p:sldMasterId id="2147483648" r:id="rId1"/>
   </p:sldMasterIdLst>
+  <p:notesMasterIdLst>
+    <p:notesMasterId r:id="rId34"/>
+  </p:notesMasterIdLst>
   <p:sldIdLst>
     <p:sldId id="256" r:id="rId2"/>
     <p:sldId id="257" r:id="rId3"/>
@@ -38,10 +41,7 @@
     <p:sldId id="286" r:id="rId32"/>
     <p:sldId id="287" r:id="rId33"/>
   </p:sldIdLst>
-  <p:notesMasterIdLst>
-    <p:notesMasterId r:id="rId34"/>
-  </p:notesMasterIdLst>
-  <p:sldSz cx="9144000" cy="5143500"/>
+  <p:sldSz cx="9144000" cy="5143500" type="screen16x9"/>
   <p:notesSz cx="5143500" cy="9144000"/>
   <p:defaultTextStyle>
     <a:lvl1pPr marL="0" algn="l" defTabSz="914400" rtl="0" eaLnBrk="1" latinLnBrk="0" hangingPunct="1">
@@ -135,6 +135,11 @@
       </a:defRPr>
     </a:lvl9pPr>
   </p:defaultTextStyle>
+  <p:extLst>
+    <p:ext uri="{EFAFB233-063F-42B5-8137-9DF3F51BA10A}">
+      <p15:sldGuideLst xmlns:p15="http://schemas.microsoft.com/office/powerpoint/2012/main"/>
+    </p:ext>
+  </p:extLst>
 </p:presentation>
 </file>
 
@@ -160,234 +165,10 @@
           <a:chExt cx="0" cy="0"/>
         </a:xfrm>
       </p:grpSpPr>
-      <p:sp>
-        <p:nvSpPr>
-          <p:cNvPr id="2" name="Header Placeholder 1"/>
-          <p:cNvSpPr>
-            <a:spLocks noGrp="1"/>
-          </p:cNvSpPr>
-          <p:nvPr>
-            <p:ph type="hdr" sz="quarter"/>
-          </p:nvPr>
-        </p:nvSpPr>
-        <p:spPr>
-          <a:xfrm>
-            <a:off x="0" y="0"/>
-            <a:ext cx="2971800" cy="458788"/>
-          </a:xfrm>
-          <a:prstGeom prst="rect">
-            <a:avLst/>
-          </a:prstGeom>
-        </p:spPr>
-        <p:txBody>
-          <a:bodyPr vert="horz" lIns="91440" tIns="45720" rIns="91440" bIns="45720" rtlCol="0"/>
-          <a:lstStyle>
-            <a:lvl1pPr algn="l">
-              <a:defRPr sz="1200"/>
-            </a:lvl1pPr>
-          </a:lstStyle>
-          <a:p>
-            <a:endParaRPr lang="en-US"/>
-          </a:p>
-        </p:txBody>
-      </p:sp>
-      <p:sp>
-        <p:nvSpPr>
-          <p:cNvPr id="3" name="Date Placeholder 2"/>
-          <p:cNvSpPr>
-            <a:spLocks noGrp="1"/>
-          </p:cNvSpPr>
-          <p:nvPr>
-            <p:ph type="dt" idx="1"/>
-          </p:nvPr>
-        </p:nvSpPr>
-        <p:spPr>
-          <a:xfrm>
-            <a:off x="3884613" y="0"/>
-            <a:ext cx="2971800" cy="458788"/>
-          </a:xfrm>
-          <a:prstGeom prst="rect">
-            <a:avLst/>
-          </a:prstGeom>
-        </p:spPr>
-        <p:txBody>
-          <a:bodyPr vert="horz" lIns="91440" tIns="45720" rIns="91440" bIns="45720" rtlCol="0"/>
-          <a:lstStyle>
-            <a:lvl1pPr algn="r">
-              <a:defRPr sz="1200"/>
-            </a:lvl1pPr>
-          </a:lstStyle>
-          <a:p>
-            <a:fld id="{5282F153-3F37-0F45-9E97-73ACFA13230C}" type="datetimeFigureOut">
-              <a:rPr lang="en-US"/>
-              <a:t>7/23/19</a:t>
-            </a:fld>
-            <a:endParaRPr lang="en-US"/>
-          </a:p>
-        </p:txBody>
-      </p:sp>
-      <p:sp>
-        <p:nvSpPr>
-          <p:cNvPr id="4" name="Slide Image Placeholder 3"/>
-          <p:cNvSpPr>
-            <a:spLocks noGrp="1" noRot="1" noChangeAspect="1"/>
-          </p:cNvSpPr>
-          <p:nvPr>
-            <p:ph type="sldImg" idx="2"/>
-          </p:nvPr>
-        </p:nvSpPr>
-        <p:spPr>
-          <a:xfrm>
-            <a:off x="685800" y="1143000"/>
-            <a:ext cx="5486400" cy="3086100"/>
-          </a:xfrm>
-          <a:prstGeom prst="rect">
-            <a:avLst/>
-          </a:prstGeom>
-          <a:noFill/>
-          <a:ln w="12700">
-            <a:solidFill>
-              <a:prstClr val="black"/>
-            </a:solidFill>
-          </a:ln>
-        </p:spPr>
-        <p:txBody>
-          <a:bodyPr vert="horz" lIns="91440" tIns="45720" rIns="91440" bIns="45720" rtlCol="0" anchor="ctr"/>
-          <a:lstStyle/>
-          <a:p>
-            <a:endParaRPr lang="en-US"/>
-          </a:p>
-        </p:txBody>
-      </p:sp>
-      <p:sp>
-        <p:nvSpPr>
-          <p:cNvPr id="5" name="Notes Placeholder 4"/>
-          <p:cNvSpPr>
-            <a:spLocks noGrp="1"/>
-          </p:cNvSpPr>
-          <p:nvPr>
-            <p:ph type="body" sz="quarter" idx="3"/>
-          </p:nvPr>
-        </p:nvSpPr>
-        <p:spPr>
-          <a:xfrm>
-            <a:off x="685800" y="4400550"/>
-            <a:ext cx="5486400" cy="3600450"/>
-          </a:xfrm>
-          <a:prstGeom prst="rect">
-            <a:avLst/>
-          </a:prstGeom>
-        </p:spPr>
-        <p:txBody>
-          <a:bodyPr vert="horz" lIns="91440" tIns="45720" rIns="91440" bIns="45720" rtlCol="0"/>
-          <a:lstStyle/>
-          <a:p>
-            <a:pPr lvl="0"/>
-            <a:r>
-              <a:rPr lang="en-US"/>
-              <a:t>Click to edit Master text styles</a:t>
-            </a:r>
-          </a:p>
-          <a:p>
-            <a:pPr lvl="1"/>
-            <a:r>
-              <a:rPr lang="en-US"/>
-              <a:t>Second level</a:t>
-            </a:r>
-          </a:p>
-          <a:p>
-            <a:pPr lvl="2"/>
-            <a:r>
-              <a:rPr lang="en-US"/>
-              <a:t>Third level</a:t>
-            </a:r>
-          </a:p>
-          <a:p>
-            <a:pPr lvl="3"/>
-            <a:r>
-              <a:rPr lang="en-US"/>
-              <a:t>Fourth level</a:t>
-            </a:r>
-          </a:p>
-          <a:p>
-            <a:pPr lvl="4"/>
-            <a:r>
-              <a:rPr lang="en-US"/>
-              <a:t>Fifth level</a:t>
-            </a:r>
-          </a:p>
-        </p:txBody>
-      </p:sp>
-      <p:sp>
-        <p:nvSpPr>
-          <p:cNvPr id="6" name="Footer Placeholder 5"/>
-          <p:cNvSpPr>
-            <a:spLocks noGrp="1"/>
-          </p:cNvSpPr>
-          <p:nvPr>
-            <p:ph type="ftr" sz="quarter" idx="4"/>
-          </p:nvPr>
-        </p:nvSpPr>
-        <p:spPr>
-          <a:xfrm>
-            <a:off x="0" y="8685213"/>
-            <a:ext cx="2971800" cy="458787"/>
-          </a:xfrm>
-          <a:prstGeom prst="rect">
-            <a:avLst/>
-          </a:prstGeom>
-        </p:spPr>
-        <p:txBody>
-          <a:bodyPr vert="horz" lIns="91440" tIns="45720" rIns="91440" bIns="45720" rtlCol="0" anchor="b"/>
-          <a:lstStyle>
-            <a:lvl1pPr algn="l">
-              <a:defRPr sz="1200"/>
-            </a:lvl1pPr>
-          </a:lstStyle>
-          <a:p>
-            <a:endParaRPr lang="en-US"/>
-          </a:p>
-        </p:txBody>
-      </p:sp>
-      <p:sp>
-        <p:nvSpPr>
-          <p:cNvPr id="7" name="Slide Number Placeholder 6"/>
-          <p:cNvSpPr>
-            <a:spLocks noGrp="1"/>
-          </p:cNvSpPr>
-          <p:nvPr>
-            <p:ph type="sldNum" sz="quarter" idx="5"/>
-          </p:nvPr>
-        </p:nvSpPr>
-        <p:spPr>
-          <a:xfrm>
-            <a:off x="3884613" y="8685213"/>
-            <a:ext cx="2971800" cy="458787"/>
-          </a:xfrm>
-          <a:prstGeom prst="rect">
-            <a:avLst/>
-          </a:prstGeom>
-        </p:spPr>
-        <p:txBody>
-          <a:bodyPr vert="horz" lIns="91440" tIns="45720" rIns="91440" bIns="45720" rtlCol="0" anchor="b"/>
-          <a:lstStyle>
-            <a:lvl1pPr algn="r">
-              <a:defRPr sz="1200"/>
-            </a:lvl1pPr>
-          </a:lstStyle>
-          <a:p>
-            <a:fld id="{CE5E9CC1-C706-0F49-92D6-E571CC5EEA8F}" type="slidenum">
-              <a:rPr lang="en-US"/>
-              <a:t>‹#›</a:t>
-            </a:fld>
-            <a:endParaRPr lang="en-US"/>
-          </a:p>
-        </p:txBody>
-      </p:sp>
     </p:spTree>
     <p:extLst>
       <p:ext uri="{BB962C8B-B14F-4D97-AF65-F5344CB8AC3E}">
-        <p14:creationId xmlns:p14="http://schemas.microsoft.com/office/powerpoint/2010/main" val="1024086991"/>
+        <p14:creationId xmlns:p14="http://schemas.microsoft.com/office/powerpoint/2010/main" val="3974380218"/>
       </p:ext>
     </p:extLst>
   </p:cSld>
@@ -535,7 +316,6 @@
               <a:rPr lang="en-US" dirty="0"/>
               <a:t>Companion deck to the 2026-07-09 combined brief and appendix. All figures and numbers are from the EIG 80-80 wage subsidy simulation, 2026 (CPS ORG May 2025–May 2026; PolicyEngine-US 2026).</a:t>
             </a:r>
-            <a:endParaRPr lang="en-US" dirty="0"/>
           </a:p>
         </p:txBody>
       </p:sp>
@@ -623,7 +403,6 @@
               <a:rPr lang="en-US" dirty="0"/>
               <a:t>Average annual subsidy by wage band: $7.25–9 → $10,281; $9–11 → $7,867; $11–13 → $5,793; $13–16.80 → $2,206. Steeply progressive within the eligible range.</a:t>
             </a:r>
-            <a:endParaRPr lang="en-US" dirty="0"/>
           </a:p>
         </p:txBody>
       </p:sp>
@@ -711,7 +490,6 @@
               <a:rPr lang="en-US" dirty="0"/>
               <a:t>Average subsidy: Louisiana $4,981, Mississippi $4,990, vs. California $2,392. No commission picks winners — the formula finds distressed places on its own.</a:t>
             </a:r>
-            <a:endParaRPr lang="en-US" dirty="0"/>
           </a:p>
         </p:txBody>
       </p:sp>
@@ -795,10 +573,6 @@
           <a:bodyPr/>
           <a:lstStyle/>
           <a:p>
-            <a:r>
-              <a:rPr lang="en-US" dirty="0"/>
-              <a:t/>
-            </a:r>
             <a:endParaRPr lang="en-US" dirty="0"/>
           </a:p>
         </p:txBody>
@@ -887,7 +661,6 @@
               <a:rPr lang="en-US" dirty="0"/>
               <a:t>Reframe the denominator: 59M non-employed adults overstates who a wage can reach — ~7M unemployed searching, ~34M out for other reasons (half ages 16–24, in school), ~10M unable to work, ~9M retired. A realistic wage-responsive pool is closer to 10–15M.</a:t>
             </a:r>
-            <a:endParaRPr lang="en-US" dirty="0"/>
           </a:p>
         </p:txBody>
       </p:sp>
@@ -975,7 +748,6 @@
               <a:rPr lang="en-US" dirty="0"/>
               <a:t>Floor applies NO wage penalty (a conservative choice, not neutral — offer-decay evidence rules out zero). Evidence-central adds a modest ~10% status-differentiated penalty. High corner stacks all three uncertain axes upward.</a:t>
             </a:r>
-            <a:endParaRPr lang="en-US" dirty="0"/>
           </a:p>
         </p:txBody>
       </p:sp>
@@ -1063,7 +835,6 @@
               <a:rPr lang="en-US" dirty="0"/>
               <a:t>Reference marks scale the nearest precedents to our pool: 1990s EITC (~0.9M scaled, below our floor), Paycheck Plus NYC/Atlanta, the Canadian Self-Sufficiency Project. Our 1.49M sits between the Paycheck Plus demonstrations and SSP's exceptional response.</a:t>
             </a:r>
-            <a:endParaRPr lang="en-US" dirty="0"/>
           </a:p>
         </p:txBody>
       </p:sp>
@@ -1151,7 +922,6 @@
               <a:rPr lang="en-US" dirty="0"/>
               <a:t>About a third of entrants are unemployed job-seekers (monthly job-finding rates 5–6x other non-participants). The disabled and retired — a third of the non-employed — are ~3% of entrants. Male entry is real but modest: ~180K central (~120K floor), up to ~800K high; the broader prime-age male non-employment crisis is rooted in health and disability a wage cannot fix.</a:t>
             </a:r>
-            <a:endParaRPr lang="en-US" dirty="0"/>
           </a:p>
         </p:txBody>
       </p:sp>
@@ -1239,7 +1009,6 @@
               <a:rPr lang="en-US" dirty="0"/>
               <a:t>47.8% of the non-employed pool draws imputed offers below $16.80, vs. 21.7% of paid-hourly workers. Negative selection, as expected — but most of the pool is beyond the subsidy's reach. Offers are modeled as distributions, not points.</a:t>
             </a:r>
-            <a:endParaRPr lang="en-US" dirty="0"/>
           </a:p>
         </p:txBody>
       </p:sp>
@@ -1327,7 +1096,6 @@
               <a:rPr lang="en-US" dirty="0"/>
               <a:t>Male non-employment motivated the first post. Male entry is real but modest — ~180K central, ~120K floor, up to ~800K high. Reach the men a wage can reach; the broader crisis needs complementary tools. Report it straight.</a:t>
             </a:r>
-            <a:endParaRPr lang="en-US" dirty="0"/>
           </a:p>
         </p:txBody>
       </p:sp>
@@ -1411,10 +1179,6 @@
           <a:bodyPr/>
           <a:lstStyle/>
           <a:p>
-            <a:r>
-              <a:rPr lang="en-US" dirty="0"/>
-              <a:t/>
-            </a:r>
             <a:endParaRPr lang="en-US" dirty="0"/>
           </a:p>
         </p:txBody>
@@ -1503,7 +1267,6 @@
               <a:rPr lang="en-US" dirty="0"/>
               <a:t>Headline. 15.9M reached; $45–48B net; 1.49M new entrants (conservative floor ~1.0M, joint upper corner 3.81M) plus ~0.19–0.28M FTE from part-timers extending hours. Cost is the firm result; entry is the wider band.</a:t>
             </a:r>
-            <a:endParaRPr lang="en-US" dirty="0"/>
           </a:p>
         </p:txBody>
       </p:sp>
@@ -1591,7 +1354,6 @@
               <a:rPr lang="en-US" dirty="0"/>
               <a:t>With sticky incumbent wages, firms capture ~3% at the central bargaining split, ≤4% across the range. The $7.25 floor caps how far firms can push cash wages down. Disclosed worst case (all wages renegotiate): gross up to $109B, firm capture ~58% — a bound, not a forecast.</a:t>
             </a:r>
-            <a:endParaRPr lang="en-US" dirty="0"/>
           </a:p>
         </p:txBody>
       </p:sp>
@@ -1679,7 +1441,6 @@
               <a:rPr lang="en-US" dirty="0"/>
               <a:t>Marginal cost per entrant: ~$5,300 gross / ~$3,900 net (entrants work part-time/part-year). Even charging the entire net cost to entrants yields ~$32,000 per job — below state/local incentives ($106K–$196K), far below Buy American ($154K+) and steel tariffs (~$900K). And the 'overhead' here is a raise for a fifth of hourly workers, not deadweight.</a:t>
             </a:r>
-            <a:endParaRPr lang="en-US" dirty="0"/>
           </a:p>
         </p:txBody>
       </p:sp>
@@ -1763,10 +1524,6 @@
           <a:bodyPr/>
           <a:lstStyle/>
           <a:p>
-            <a:r>
-              <a:rPr lang="en-US" dirty="0"/>
-              <a:t/>
-            </a:r>
             <a:endParaRPr lang="en-US" dirty="0"/>
           </a:p>
         </p:txBody>
@@ -1855,7 +1612,6 @@
               <a:rPr lang="en-US" dirty="0"/>
               <a:t>For a representative single-parent household, net income climbs with earnings then drops where Medicaid and other benefits phase out. Roughly one in eight modeled entrants clear their threshold only across a benefit cliff.</a:t>
             </a:r>
-            <a:endParaRPr lang="en-US" dirty="0"/>
           </a:p>
         </p:txBody>
       </p:sp>
@@ -1943,7 +1699,6 @@
               <a:rPr lang="en-US" dirty="0"/>
               <a:t>Same Pennsylvania single parent, wage fixed at $10/hr, hours 0–3,000. Subsidy adds ~$7,800 net at 20 hrs/wk and ~$5,600 at 40. But it stops growing past its 2,080-hour cap, and added earnings eventually cross the Medicaid and childcare cliffs — beyond ~53 hrs/wk the subsidized household is worse off on net.</a:t>
             </a:r>
-            <a:endParaRPr lang="en-US" dirty="0"/>
           </a:p>
         </p:txBody>
       </p:sp>
@@ -2031,7 +1786,6 @@
               <a:rPr lang="en-US" dirty="0"/>
               <a:t>Median net return to working rises ~18% for single mothers vs. ~27% for other women and ~23% for men. Whether the subsidy counts against SNAP/Medicaid/TANF eligibility is a first-order design choice for Congress — not a detail to delegate.</a:t>
             </a:r>
-            <a:endParaRPr lang="en-US" dirty="0"/>
           </a:p>
         </p:txBody>
       </p:sp>
@@ -2115,10 +1869,6 @@
           <a:bodyPr/>
           <a:lstStyle/>
           <a:p>
-            <a:r>
-              <a:rPr lang="en-US" dirty="0"/>
-              <a:t/>
-            </a:r>
             <a:endParaRPr lang="en-US" dirty="0"/>
           </a:p>
         </p:txBody>
@@ -2207,7 +1957,6 @@
               <a:rPr lang="en-US" dirty="0"/>
               <a:t>The full 27-cell grid (penalty × dispersion × elasticity) spans 0.23–3.81M. Effects build over years — these are steady-state levels, not first-year effects.</a:t>
             </a:r>
-            <a:endParaRPr lang="en-US" dirty="0"/>
           </a:p>
         </p:txBody>
       </p:sp>
@@ -2295,7 +2044,6 @@
               <a:rPr lang="en-US" dirty="0"/>
               <a:t>The 80-80 pays in full on every added hour up to 40/wk — no phase-out, unlike the EITC. Under consensus elasticities (0.2–0.33), part-time incumbents add 0.19–0.28M FTE, alongside ~0.7M FTE from the entry margin. The hours margin matters nearly as much as entry.</a:t>
             </a:r>
-            <a:endParaRPr lang="en-US" dirty="0"/>
           </a:p>
         </p:txBody>
       </p:sp>
@@ -2383,7 +2131,6 @@
               <a:rPr lang="en-US" dirty="0"/>
               <a:t>We just answered the expensive questions. Cost is firm; entry is a disciplined band; the safety-net treatment is the first-order remaining design choice.</a:t>
             </a:r>
-            <a:endParaRPr lang="en-US" dirty="0"/>
           </a:p>
         </p:txBody>
       </p:sp>
@@ -2471,7 +2218,6 @@
               <a:rPr lang="en-US" dirty="0"/>
               <a:t>Target = 80% of the $21.00 paid-hourly median = $16.80. $7.25 is the lowest creditable base wage (anti-fraud). Every dollar of employer raise still lifts take-home pay. Updated data: CPS May 2025–May 2026 ($21.00 median vs. the posts' $20).</a:t>
             </a:r>
-            <a:endParaRPr lang="en-US" dirty="0"/>
           </a:p>
         </p:txBody>
       </p:sp>
@@ -2555,10 +2301,6 @@
           <a:bodyPr/>
           <a:lstStyle/>
           <a:p>
-            <a:r>
-              <a:rPr lang="en-US" dirty="0"/>
-              <a:t/>
-            </a:r>
             <a:endParaRPr lang="en-US" dirty="0"/>
           </a:p>
         </p:txBody>
@@ -2647,7 +2389,6 @@
               <a:rPr lang="en-US" dirty="0"/>
               <a:t>Reading note: every result is accounting, transported evidence, or disclosed judgment. No program with the 80-80's exact design has been evaluated, so behavioral parameters are imported from similar programs.</a:t>
             </a:r>
-            <a:endParaRPr lang="en-US" dirty="0"/>
           </a:p>
         </p:txBody>
       </p:sp>
@@ -2735,7 +2476,6 @@
               <a:rPr lang="en-US" dirty="0"/>
               <a:t>Reported hourly wages heap on round-dollar values, and the $16.80 target sits on a dense stretch — so the eligible count is sensitive to exactly where the target lands.</a:t>
             </a:r>
-            <a:endParaRPr lang="en-US" dirty="0"/>
           </a:p>
         </p:txBody>
       </p:sp>
@@ -2819,10 +2559,6 @@
           <a:bodyPr/>
           <a:lstStyle/>
           <a:p>
-            <a:r>
-              <a:rPr lang="en-US" dirty="0"/>
-              <a:t/>
-            </a:r>
             <a:endParaRPr lang="en-US" dirty="0"/>
           </a:p>
         </p:txBody>
@@ -2911,7 +2647,6 @@
               <a:rPr lang="en-US" dirty="0"/>
               <a:t>Gross $55.9B → net $45.1B (static). Government recaptures payroll and income taxes and banks SNAP/Medicaid/TANF savings; partly offset by higher ACA premium tax credits (+24.9% of gross). The ACA interaction is real and any serious estimate must carry it.</a:t>
             </a:r>
-            <a:endParaRPr lang="en-US" dirty="0"/>
           </a:p>
         </p:txBody>
       </p:sp>
@@ -2999,7 +2734,6 @@
               <a:rPr lang="en-US" dirty="0"/>
               <a:t>Central estimate: ~$57–$64B gross, $45–$48B net, plus up to ~$2B if part-timers extend hours. Getting outside that range requires the implausible all-wages-renegotiate scenario.</a:t>
             </a:r>
-            <a:endParaRPr lang="en-US" dirty="0"/>
           </a:p>
         </p:txBody>
       </p:sp>
@@ -3087,7 +2821,6 @@
               <a:rPr lang="en-US" dirty="0"/>
               <a:t>Static, reduced-form, and structural models all cluster in $45–48B net. Only the all-wages-renegotiate bound escapes it — and that contradicts the wage-rigidity evidence.</a:t>
             </a:r>
-            <a:endParaRPr lang="en-US" dirty="0"/>
           </a:p>
         </p:txBody>
       </p:sp>
@@ -3171,10 +2904,6 @@
           <a:bodyPr/>
           <a:lstStyle/>
           <a:p>
-            <a:r>
-              <a:rPr lang="en-US" dirty="0"/>
-              <a:t/>
-            </a:r>
             <a:endParaRPr lang="en-US" dirty="0"/>
           </a:p>
         </p:txBody>
@@ -3263,7 +2992,6 @@
               <a:rPr lang="en-US" dirty="0"/>
               <a:t>Third column of Table 2 (share of each group's paid-hourly workers) reframes the story: where the money pools vs. how deeply it reaches. Overall take-up is 21.7% of the paid-hourly workforce.</a:t>
             </a:r>
-            <a:endParaRPr lang="en-US" dirty="0"/>
           </a:p>
         </p:txBody>
       </p:sp>
@@ -3336,6 +3064,11 @@
 <file path=ppt/slideMasters/slideMaster1.xml><?xml version="1.0" encoding="utf-8"?>
 <p:sldMaster xmlns:a="http://schemas.openxmlformats.org/drawingml/2006/main" xmlns:r="http://schemas.openxmlformats.org/officeDocument/2006/relationships" xmlns:p="http://schemas.openxmlformats.org/presentationml/2006/main">
   <p:cSld>
+    <p:bg>
+      <p:bgRef idx="1001">
+        <a:schemeClr val="bg1"/>
+      </p:bgRef>
+    </p:bg>
     <p:spTree>
       <p:nvGrpSpPr>
         <p:cNvPr id="1" name=""/>
@@ -3618,6 +3351,7 @@
         <a:solidFill>
           <a:srgbClr val="024140"/>
         </a:solidFill>
+        <a:effectLst/>
       </p:bgPr>
     </p:bg>
     <p:spTree>
@@ -3655,17 +3389,17 @@
           <a:bodyPr wrap="square" lIns="0" tIns="0" rIns="0" bIns="0" rtlCol="0" anchor="ctr"/>
           <a:lstStyle/>
           <a:p>
-            <a:pPr indent="0" marL="0">
+            <a:pPr marL="0" indent="0">
               <a:buNone/>
             </a:pPr>
             <a:r>
-              <a:rPr lang="en-US" sz="1200" b="1" spc="300" kern="0" dirty="0">
+              <a:rPr lang="en-US" sz="1200" b="1" kern="0" spc="300" dirty="0">
                 <a:solidFill>
                   <a:srgbClr val="E1AD28"/>
                 </a:solidFill>
-                <a:latin typeface="Open Sans" pitchFamily="34" charset="0"/>
-                <a:ea typeface="Open Sans" pitchFamily="34" charset="-122"/>
-                <a:cs typeface="Open Sans" pitchFamily="34" charset="-120"/>
+                <a:latin typeface="Open Sans ExtraBold" pitchFamily="34" charset="0"/>
+                <a:ea typeface="Open Sans ExtraBold" pitchFamily="34" charset="-122"/>
+                <a:cs typeface="Open Sans ExtraBold" pitchFamily="34" charset="-120"/>
               </a:rPr>
               <a:t>ECONOMIC INNOVATION GROUP</a:t>
             </a:r>
@@ -3694,7 +3428,7 @@
           <a:bodyPr wrap="square" lIns="0" tIns="0" rIns="0" bIns="0" rtlCol="0" anchor="ctr"/>
           <a:lstStyle/>
           <a:p>
-            <a:pPr indent="0" marL="0">
+            <a:pPr marL="0" indent="0">
               <a:buNone/>
             </a:pPr>
             <a:r>
@@ -3733,7 +3467,7 @@
           <a:bodyPr wrap="square" lIns="0" tIns="0" rIns="0" bIns="0" rtlCol="0" anchor="ctr"/>
           <a:lstStyle/>
           <a:p>
-            <a:pPr indent="0" marL="0">
+            <a:pPr marL="0" indent="0">
               <a:lnSpc>
                 <a:spcPct val="103000"/>
               </a:lnSpc>
@@ -3748,7 +3482,7 @@
                 <a:ea typeface="Source Serif Pro" pitchFamily="34" charset="-122"/>
                 <a:cs typeface="Source Serif Pro" pitchFamily="34" charset="-120"/>
               </a:rPr>
-              <a:t>What a wage subsidy would cost — and how many Americans it would put back to work</a:t>
+              <a:t>What a wage subsidy would cost — and how many Americans it could pull back into the workforce</a:t>
             </a:r>
             <a:endParaRPr lang="en-US" sz="2300" dirty="0"/>
           </a:p>
@@ -3775,7 +3509,7 @@
           <a:bodyPr wrap="square" lIns="0" tIns="0" rIns="0" bIns="0" rtlCol="0" anchor="ctr"/>
           <a:lstStyle/>
           <a:p>
-            <a:pPr indent="0" marL="0">
+            <a:pPr marL="0" indent="0">
               <a:buNone/>
             </a:pPr>
             <a:r>
@@ -3783,16 +3517,16 @@
                 <a:solidFill>
                   <a:srgbClr val="FFFFFF"/>
                 </a:solidFill>
-                <a:latin typeface="Open Sans" pitchFamily="34" charset="0"/>
-                <a:ea typeface="Open Sans" pitchFamily="34" charset="-122"/>
-                <a:cs typeface="Open Sans" pitchFamily="34" charset="-120"/>
-              </a:rPr>
-              <a:t>Benjamin Glasner and Adam Ozimek</a:t>
+                <a:latin typeface="Open Sans ExtraBold" pitchFamily="34" charset="0"/>
+                <a:ea typeface="Open Sans ExtraBold" pitchFamily="34" charset="-122"/>
+                <a:cs typeface="Open Sans ExtraBold" pitchFamily="34" charset="-120"/>
+              </a:rPr>
+              <a:t>Benjamin Glasner</a:t>
             </a:r>
             <a:endParaRPr lang="en-US" sz="1400" dirty="0"/>
           </a:p>
           <a:p>
-            <a:pPr indent="0" marL="0">
+            <a:pPr marL="0" indent="0">
               <a:buNone/>
             </a:pPr>
             <a:r>
@@ -3800,28 +3534,22 @@
                 <a:solidFill>
                   <a:srgbClr val="B9CCC9"/>
                 </a:solidFill>
-                <a:latin typeface="Open Sans" pitchFamily="34" charset="0"/>
-                <a:ea typeface="Open Sans" pitchFamily="34" charset="-122"/>
-                <a:cs typeface="Open Sans" pitchFamily="34" charset="-120"/>
-              </a:rPr>
-              <a:t>Companion deck to the combined policy brief and technical appendix · July 2026</a:t>
-            </a:r>
-            <a:endParaRPr lang="en-US" sz="1400" dirty="0"/>
-          </a:p>
-          <a:p>
-            <a:pPr indent="0" marL="0">
-              <a:buNone/>
-            </a:pPr>
-            <a:r>
-              <a:rPr lang="en-US" sz="1200" i="1" dirty="0">
+                <a:latin typeface="Open Sans Light" pitchFamily="34" charset="0"/>
+                <a:ea typeface="Open Sans Light" pitchFamily="34" charset="-122"/>
+                <a:cs typeface="Open Sans Light" pitchFamily="34" charset="-120"/>
+              </a:rPr>
+              <a:t>Companion deck to the combined policy brief and technical appendix · July </a:t>
+            </a:r>
+            <a:r>
+              <a:rPr lang="en-US" sz="1200" dirty="0">
                 <a:solidFill>
                   <a:srgbClr val="B9CCC9"/>
                 </a:solidFill>
-                <a:latin typeface="Open Sans" pitchFamily="34" charset="0"/>
-                <a:ea typeface="Open Sans" pitchFamily="34" charset="-122"/>
-                <a:cs typeface="Open Sans" pitchFamily="34" charset="-120"/>
-              </a:rPr>
-              <a:t>Agglomerations, installment three</a:t>
+                <a:latin typeface="Open Sans Light" pitchFamily="34" charset="0"/>
+                <a:ea typeface="Open Sans Light" pitchFamily="34" charset="-122"/>
+                <a:cs typeface="Open Sans Light" pitchFamily="34" charset="-120"/>
+              </a:rPr>
+              <a:t>2026</a:t>
             </a:r>
             <a:endParaRPr lang="en-US" sz="1400" dirty="0"/>
           </a:p>
@@ -3843,6 +3571,7 @@
         <a:solidFill>
           <a:srgbClr val="FFFFFF"/>
         </a:solidFill>
+        <a:effectLst/>
       </p:bgPr>
     </p:bg>
     <p:spTree>
@@ -3880,17 +3609,17 @@
           <a:bodyPr wrap="square" lIns="0" tIns="0" rIns="0" bIns="0" rtlCol="0" anchor="ctr"/>
           <a:lstStyle/>
           <a:p>
-            <a:pPr algn="l" indent="0" marL="0">
+            <a:pPr marL="0" indent="0" algn="l">
               <a:buNone/>
             </a:pPr>
             <a:r>
-              <a:rPr lang="en-US" sz="1100" b="1" spc="200" kern="0" dirty="0">
+              <a:rPr lang="en-US" sz="1100" b="1" kern="0" spc="200" dirty="0">
                 <a:solidFill>
                   <a:srgbClr val="19644D"/>
                 </a:solidFill>
-                <a:latin typeface="Open Sans" pitchFamily="34" charset="0"/>
-                <a:ea typeface="Open Sans" pitchFamily="34" charset="-122"/>
-                <a:cs typeface="Open Sans" pitchFamily="34" charset="-120"/>
+                <a:latin typeface="Open Sans ExtraBold" pitchFamily="34" charset="0"/>
+                <a:ea typeface="Open Sans ExtraBold" pitchFamily="34" charset="-122"/>
+                <a:cs typeface="Open Sans ExtraBold" pitchFamily="34" charset="-120"/>
               </a:rPr>
               <a:t>WHO GETS THE MONEY?</a:t>
             </a:r>
@@ -3919,7 +3648,7 @@
           <a:bodyPr wrap="square" lIns="0" tIns="0" rIns="0" bIns="0" rtlCol="0" anchor="t"/>
           <a:lstStyle/>
           <a:p>
-            <a:pPr algn="l" indent="0" marL="0">
+            <a:pPr marL="0" indent="0" algn="l">
               <a:lnSpc>
                 <a:spcPct val="98000"/>
               </a:lnSpc>
@@ -3961,7 +3690,7 @@
           <a:bodyPr wrap="square" lIns="0" tIns="0" rIns="0" bIns="0" rtlCol="0" anchor="t"/>
           <a:lstStyle/>
           <a:p>
-            <a:pPr indent="0" marL="0">
+            <a:pPr marL="0" indent="0">
               <a:lnSpc>
                 <a:spcPct val="100000"/>
               </a:lnSpc>
@@ -3972,9 +3701,9 @@
                 <a:solidFill>
                   <a:srgbClr val="3A3A3A"/>
                 </a:solidFill>
-                <a:latin typeface="Open Sans" pitchFamily="34" charset="0"/>
-                <a:ea typeface="Open Sans" pitchFamily="34" charset="-122"/>
-                <a:cs typeface="Open Sans" pitchFamily="34" charset="-120"/>
+                <a:latin typeface="Open Sans ExtraBold" pitchFamily="34" charset="0"/>
+                <a:ea typeface="Open Sans ExtraBold" pitchFamily="34" charset="-122"/>
+                <a:cs typeface="Open Sans ExtraBold" pitchFamily="34" charset="-120"/>
               </a:rPr>
               <a:t>Average annual subsidy runs from $10,281 at $7.25–9 down to $2,206 at $13–16.80.</a:t>
             </a:r>
@@ -3984,14 +3713,14 @@
       </p:sp>
       <p:pic>
         <p:nvPicPr>
-          <p:cNvPr id="5" name="Image 0" descr="/Users/benjamin/Documents/GitHub/eig-wagesubsidy-policy-sim/output/figures/slides/fig04_subsidy_by_wage.png">    </p:cNvPr>
+          <p:cNvPr id="5" name="Image 0" descr="/Users/benjamin/Documents/GitHub/eig-wagesubsidy-policy-sim/output/figures/slides/fig04_subsidy_by_wage.png"/>
           <p:cNvPicPr>
             <a:picLocks noChangeAspect="1"/>
           </p:cNvPicPr>
           <p:nvPr/>
         </p:nvPicPr>
         <p:blipFill>
-          <a:blip r:embed="rId1"/>
+          <a:blip r:embed="rId3"/>
           <a:stretch>
             <a:fillRect/>
           </a:stretch>
@@ -4027,7 +3756,7 @@
           <a:bodyPr wrap="square" lIns="0" tIns="0" rIns="0" bIns="0" rtlCol="0" anchor="ctr"/>
           <a:lstStyle/>
           <a:p>
-            <a:pPr indent="0" marL="0">
+            <a:pPr marL="0" indent="0">
               <a:buNone/>
             </a:pPr>
             <a:r>
@@ -4035,9 +3764,9 @@
                 <a:solidFill>
                   <a:srgbClr val="8A8A8A"/>
                 </a:solidFill>
-                <a:latin typeface="Open Sans" pitchFamily="34" charset="0"/>
-                <a:ea typeface="Open Sans" pitchFamily="34" charset="-122"/>
-                <a:cs typeface="Open Sans" pitchFamily="34" charset="-120"/>
+                <a:latin typeface="Open Sans Light" pitchFamily="34" charset="0"/>
+                <a:ea typeface="Open Sans Light" pitchFamily="34" charset="-122"/>
+                <a:cs typeface="Open Sans Light" pitchFamily="34" charset="-120"/>
               </a:rPr>
               <a:t>Source: Economic Innovation Group 80-80 wage subsidy simulation, 2026.</a:t>
             </a:r>
@@ -4061,6 +3790,7 @@
         <a:solidFill>
           <a:srgbClr val="FFFFFF"/>
         </a:solidFill>
+        <a:effectLst/>
       </p:bgPr>
     </p:bg>
     <p:spTree>
@@ -4098,17 +3828,17 @@
           <a:bodyPr wrap="square" lIns="0" tIns="0" rIns="0" bIns="0" rtlCol="0" anchor="ctr"/>
           <a:lstStyle/>
           <a:p>
-            <a:pPr algn="l" indent="0" marL="0">
+            <a:pPr marL="0" indent="0" algn="l">
               <a:buNone/>
             </a:pPr>
             <a:r>
-              <a:rPr lang="en-US" sz="1100" b="1" spc="200" kern="0" dirty="0">
+              <a:rPr lang="en-US" sz="1100" b="1" kern="0" spc="200" dirty="0">
                 <a:solidFill>
                   <a:srgbClr val="19644D"/>
                 </a:solidFill>
-                <a:latin typeface="Open Sans" pitchFamily="34" charset="0"/>
-                <a:ea typeface="Open Sans" pitchFamily="34" charset="-122"/>
-                <a:cs typeface="Open Sans" pitchFamily="34" charset="-120"/>
+                <a:latin typeface="Open Sans ExtraBold" pitchFamily="34" charset="0"/>
+                <a:ea typeface="Open Sans ExtraBold" pitchFamily="34" charset="-122"/>
+                <a:cs typeface="Open Sans ExtraBold" pitchFamily="34" charset="-120"/>
               </a:rPr>
               <a:t>WHO GETS THE MONEY?</a:t>
             </a:r>
@@ -4137,7 +3867,7 @@
           <a:bodyPr wrap="square" lIns="0" tIns="0" rIns="0" bIns="0" rtlCol="0" anchor="t"/>
           <a:lstStyle/>
           <a:p>
-            <a:pPr algn="l" indent="0" marL="0">
+            <a:pPr marL="0" indent="0" algn="l">
               <a:lnSpc>
                 <a:spcPct val="98000"/>
               </a:lnSpc>
@@ -4179,7 +3909,7 @@
           <a:bodyPr wrap="square" lIns="0" tIns="0" rIns="0" bIns="0" rtlCol="0" anchor="t"/>
           <a:lstStyle/>
           <a:p>
-            <a:pPr indent="0" marL="0">
+            <a:pPr marL="0" indent="0">
               <a:lnSpc>
                 <a:spcPct val="100000"/>
               </a:lnSpc>
@@ -4190,9 +3920,9 @@
                 <a:solidFill>
                   <a:srgbClr val="3A3A3A"/>
                 </a:solidFill>
-                <a:latin typeface="Open Sans" pitchFamily="34" charset="0"/>
-                <a:ea typeface="Open Sans" pitchFamily="34" charset="-122"/>
-                <a:cs typeface="Open Sans" pitchFamily="34" charset="-120"/>
+                <a:latin typeface="Open Sans ExtraBold" pitchFamily="34" charset="0"/>
+                <a:ea typeface="Open Sans ExtraBold" pitchFamily="34" charset="-122"/>
+                <a:cs typeface="Open Sans ExtraBold" pitchFamily="34" charset="-120"/>
               </a:rPr>
               <a:t>Average annual subsidy per eligible worker, by state.</a:t>
             </a:r>
@@ -4202,14 +3932,14 @@
       </p:sp>
       <p:pic>
         <p:nvPicPr>
-          <p:cNvPr id="5" name="Image 0" descr="/Users/benjamin/Documents/GitHub/eig-wagesubsidy-policy-sim/output/figures/slides/fig05_avg_subsidy_by_state.png">    </p:cNvPr>
+          <p:cNvPr id="5" name="Image 0" descr="/Users/benjamin/Documents/GitHub/eig-wagesubsidy-policy-sim/output/figures/slides/fig05_avg_subsidy_by_state.png"/>
           <p:cNvPicPr>
             <a:picLocks noChangeAspect="1"/>
           </p:cNvPicPr>
           <p:nvPr/>
         </p:nvPicPr>
         <p:blipFill>
-          <a:blip r:embed="rId1"/>
+          <a:blip r:embed="rId3"/>
           <a:stretch>
             <a:fillRect/>
           </a:stretch>
@@ -4257,9 +3987,9 @@
                 <a:solidFill>
                   <a:srgbClr val="3A3A3A"/>
                 </a:solidFill>
-                <a:latin typeface="Open Sans" pitchFamily="34" charset="0"/>
-                <a:ea typeface="Open Sans" pitchFamily="34" charset="-122"/>
-                <a:cs typeface="Open Sans" pitchFamily="34" charset="-120"/>
+                <a:latin typeface="Open Sans Light" pitchFamily="34" charset="0"/>
+                <a:ea typeface="Open Sans Light" pitchFamily="34" charset="-122"/>
+                <a:cs typeface="Open Sans Light" pitchFamily="34" charset="-120"/>
               </a:rPr>
               <a:t>Louisiana $4,981 and Mississippi $4,990 per eligible worker.</a:t>
             </a:r>
@@ -4278,9 +4008,9 @@
                 <a:solidFill>
                   <a:srgbClr val="3A3A3A"/>
                 </a:solidFill>
-                <a:latin typeface="Open Sans" pitchFamily="34" charset="0"/>
-                <a:ea typeface="Open Sans" pitchFamily="34" charset="-122"/>
-                <a:cs typeface="Open Sans" pitchFamily="34" charset="-120"/>
+                <a:latin typeface="Open Sans Light" pitchFamily="34" charset="0"/>
+                <a:ea typeface="Open Sans Light" pitchFamily="34" charset="-122"/>
+                <a:cs typeface="Open Sans Light" pitchFamily="34" charset="-120"/>
               </a:rPr>
               <a:t>California $2,392 — less than half.</a:t>
             </a:r>
@@ -4299,9 +4029,9 @@
                 <a:solidFill>
                   <a:srgbClr val="3A3A3A"/>
                 </a:solidFill>
-                <a:latin typeface="Open Sans" pitchFamily="34" charset="0"/>
-                <a:ea typeface="Open Sans" pitchFamily="34" charset="-122"/>
-                <a:cs typeface="Open Sans" pitchFamily="34" charset="-120"/>
+                <a:latin typeface="Open Sans Light" pitchFamily="34" charset="0"/>
+                <a:ea typeface="Open Sans Light" pitchFamily="34" charset="-122"/>
+                <a:cs typeface="Open Sans Light" pitchFamily="34" charset="-120"/>
               </a:rPr>
               <a:t>Louisiana: 317K eligible; West Virginia 105K averaging $4,229.</a:t>
             </a:r>
@@ -4320,9 +4050,9 @@
                 <a:solidFill>
                   <a:srgbClr val="3A3A3A"/>
                 </a:solidFill>
-                <a:latin typeface="Open Sans" pitchFamily="34" charset="0"/>
-                <a:ea typeface="Open Sans" pitchFamily="34" charset="-122"/>
-                <a:cs typeface="Open Sans" pitchFamily="34" charset="-120"/>
+                <a:latin typeface="Open Sans Light" pitchFamily="34" charset="0"/>
+                <a:ea typeface="Open Sans Light" pitchFamily="34" charset="-122"/>
+                <a:cs typeface="Open Sans Light" pitchFamily="34" charset="-120"/>
               </a:rPr>
               <a:t>No commission picks winners — the formula finds distressed places.</a:t>
             </a:r>
@@ -4351,7 +4081,7 @@
           <a:bodyPr wrap="square" lIns="0" tIns="0" rIns="0" bIns="0" rtlCol="0" anchor="ctr"/>
           <a:lstStyle/>
           <a:p>
-            <a:pPr indent="0" marL="0">
+            <a:pPr marL="0" indent="0">
               <a:buNone/>
             </a:pPr>
             <a:r>
@@ -4359,9 +4089,9 @@
                 <a:solidFill>
                   <a:srgbClr val="8A8A8A"/>
                 </a:solidFill>
-                <a:latin typeface="Open Sans" pitchFamily="34" charset="0"/>
-                <a:ea typeface="Open Sans" pitchFamily="34" charset="-122"/>
-                <a:cs typeface="Open Sans" pitchFamily="34" charset="-120"/>
+                <a:latin typeface="Open Sans Light" pitchFamily="34" charset="0"/>
+                <a:ea typeface="Open Sans Light" pitchFamily="34" charset="-122"/>
+                <a:cs typeface="Open Sans Light" pitchFamily="34" charset="-120"/>
               </a:rPr>
               <a:t>Source: Economic Innovation Group 80-80 wage subsidy simulation, 2026.</a:t>
             </a:r>
@@ -4385,6 +4115,7 @@
         <a:solidFill>
           <a:srgbClr val="024140"/>
         </a:solidFill>
+        <a:effectLst/>
       </p:bgPr>
     </p:bg>
     <p:spTree>
@@ -4422,7 +4153,7 @@
           <a:bodyPr wrap="square" lIns="0" tIns="0" rIns="0" bIns="0" rtlCol="0" anchor="t"/>
           <a:lstStyle/>
           <a:p>
-            <a:pPr algn="l" indent="0" marL="0">
+            <a:pPr marL="0" indent="0" algn="l">
               <a:buNone/>
             </a:pPr>
             <a:r>
@@ -4461,7 +4192,7 @@
           <a:bodyPr wrap="square" lIns="0" tIns="0" rIns="0" bIns="0" rtlCol="0" anchor="t"/>
           <a:lstStyle/>
           <a:p>
-            <a:pPr algn="l" indent="0" marL="0">
+            <a:pPr marL="0" indent="0" algn="l">
               <a:lnSpc>
                 <a:spcPct val="100000"/>
               </a:lnSpc>
@@ -4503,7 +4234,7 @@
           <a:bodyPr wrap="square" lIns="0" tIns="0" rIns="0" bIns="0" rtlCol="0" anchor="t"/>
           <a:lstStyle/>
           <a:p>
-            <a:pPr algn="l" indent="0" marL="0">
+            <a:pPr marL="0" indent="0" algn="l">
               <a:buNone/>
             </a:pPr>
             <a:r>
@@ -4511,9 +4242,9 @@
                 <a:solidFill>
                   <a:srgbClr val="B3D6DD"/>
                 </a:solidFill>
-                <a:latin typeface="Open Sans" pitchFamily="34" charset="0"/>
-                <a:ea typeface="Open Sans" pitchFamily="34" charset="-122"/>
-                <a:cs typeface="Open Sans" pitchFamily="34" charset="-120"/>
+                <a:latin typeface="Open Sans Light" pitchFamily="34" charset="0"/>
+                <a:ea typeface="Open Sans Light" pitchFamily="34" charset="-122"/>
+                <a:cs typeface="Open Sans Light" pitchFamily="34" charset="-120"/>
               </a:rPr>
               <a:t>The simulation's genuinely new contribution: the first structural estimates of labor-force entry.</a:t>
             </a:r>
@@ -4537,6 +4268,7 @@
         <a:solidFill>
           <a:srgbClr val="FFFFFF"/>
         </a:solidFill>
+        <a:effectLst/>
       </p:bgPr>
     </p:bg>
     <p:spTree>
@@ -4574,17 +4306,17 @@
           <a:bodyPr wrap="square" lIns="0" tIns="0" rIns="0" bIns="0" rtlCol="0" anchor="ctr"/>
           <a:lstStyle/>
           <a:p>
-            <a:pPr algn="l" indent="0" marL="0">
+            <a:pPr marL="0" indent="0" algn="l">
               <a:buNone/>
             </a:pPr>
             <a:r>
-              <a:rPr lang="en-US" sz="1100" b="1" spc="200" kern="0" dirty="0">
+              <a:rPr lang="en-US" sz="1100" b="1" kern="0" spc="200" dirty="0">
                 <a:solidFill>
                   <a:srgbClr val="19644D"/>
                 </a:solidFill>
-                <a:latin typeface="Open Sans" pitchFamily="34" charset="0"/>
-                <a:ea typeface="Open Sans" pitchFamily="34" charset="-122"/>
-                <a:cs typeface="Open Sans" pitchFamily="34" charset="-120"/>
+                <a:latin typeface="Open Sans ExtraBold" pitchFamily="34" charset="0"/>
+                <a:ea typeface="Open Sans ExtraBold" pitchFamily="34" charset="-122"/>
+                <a:cs typeface="Open Sans ExtraBold" pitchFamily="34" charset="-120"/>
               </a:rPr>
               <a:t>DOES IT PULL PEOPLE INTO WORK?</a:t>
             </a:r>
@@ -4613,7 +4345,7 @@
           <a:bodyPr wrap="square" lIns="0" tIns="0" rIns="0" bIns="0" rtlCol="0" anchor="t"/>
           <a:lstStyle/>
           <a:p>
-            <a:pPr algn="l" indent="0" marL="0">
+            <a:pPr marL="0" indent="0" algn="l">
               <a:lnSpc>
                 <a:spcPct val="98000"/>
               </a:lnSpc>
@@ -4655,7 +4387,7 @@
           <a:bodyPr wrap="square" lIns="0" tIns="0" rIns="0" bIns="0" rtlCol="0" anchor="t"/>
           <a:lstStyle/>
           <a:p>
-            <a:pPr indent="0" marL="0">
+            <a:pPr marL="0" indent="0">
               <a:lnSpc>
                 <a:spcPct val="100000"/>
               </a:lnSpc>
@@ -4666,9 +4398,9 @@
                 <a:solidFill>
                   <a:srgbClr val="3A3A3A"/>
                 </a:solidFill>
-                <a:latin typeface="Open Sans" pitchFamily="34" charset="0"/>
-                <a:ea typeface="Open Sans" pitchFamily="34" charset="-122"/>
-                <a:cs typeface="Open Sans" pitchFamily="34" charset="-120"/>
+                <a:latin typeface="Open Sans ExtraBold" pitchFamily="34" charset="0"/>
+                <a:ea typeface="Open Sans ExtraBold" pitchFamily="34" charset="-122"/>
+                <a:cs typeface="Open Sans ExtraBold" pitchFamily="34" charset="-120"/>
               </a:rPr>
               <a:t>The employer's offer alone falls short; the subsidy lifts total pay over the worker's reservation wage.</a:t>
             </a:r>
@@ -4678,14 +4410,14 @@
       </p:sp>
       <p:pic>
         <p:nvPicPr>
-          <p:cNvPr id="5" name="Image 0" descr="/Users/benjamin/Documents/GitHub/eig-wagesubsidy-policy-sim/output/figures/slides/fig06_reservation_wage.png">    </p:cNvPr>
+          <p:cNvPr id="5" name="Image 0" descr="/Users/benjamin/Documents/GitHub/eig-wagesubsidy-policy-sim/output/figures/slides/fig06_reservation_wage.png"/>
           <p:cNvPicPr>
             <a:picLocks noChangeAspect="1"/>
           </p:cNvPicPr>
           <p:nvPr/>
         </p:nvPicPr>
         <p:blipFill>
-          <a:blip r:embed="rId1"/>
+          <a:blip r:embed="rId3"/>
           <a:stretch>
             <a:fillRect/>
           </a:stretch>
@@ -4721,7 +4453,7 @@
           <a:bodyPr wrap="square" lIns="0" tIns="0" rIns="0" bIns="0" rtlCol="0" anchor="ctr"/>
           <a:lstStyle/>
           <a:p>
-            <a:pPr indent="0" marL="0">
+            <a:pPr marL="0" indent="0">
               <a:buNone/>
             </a:pPr>
             <a:r>
@@ -4729,9 +4461,9 @@
                 <a:solidFill>
                   <a:srgbClr val="8A8A8A"/>
                 </a:solidFill>
-                <a:latin typeface="Open Sans" pitchFamily="34" charset="0"/>
-                <a:ea typeface="Open Sans" pitchFamily="34" charset="-122"/>
-                <a:cs typeface="Open Sans" pitchFamily="34" charset="-120"/>
+                <a:latin typeface="Open Sans Light" pitchFamily="34" charset="0"/>
+                <a:ea typeface="Open Sans Light" pitchFamily="34" charset="-122"/>
+                <a:cs typeface="Open Sans Light" pitchFamily="34" charset="-120"/>
               </a:rPr>
               <a:t>Source: Economic Innovation Group 80-80 wage subsidy simulation, 2026.</a:t>
             </a:r>
@@ -4755,6 +4487,7 @@
         <a:solidFill>
           <a:srgbClr val="FFFFFF"/>
         </a:solidFill>
+        <a:effectLst/>
       </p:bgPr>
     </p:bg>
     <p:spTree>
@@ -4792,17 +4525,17 @@
           <a:bodyPr wrap="square" lIns="0" tIns="0" rIns="0" bIns="0" rtlCol="0" anchor="ctr"/>
           <a:lstStyle/>
           <a:p>
-            <a:pPr algn="l" indent="0" marL="0">
+            <a:pPr marL="0" indent="0" algn="l">
               <a:buNone/>
             </a:pPr>
             <a:r>
-              <a:rPr lang="en-US" sz="1100" b="1" spc="200" kern="0" dirty="0">
+              <a:rPr lang="en-US" sz="1100" b="1" kern="0" spc="200" dirty="0">
                 <a:solidFill>
                   <a:srgbClr val="19644D"/>
                 </a:solidFill>
-                <a:latin typeface="Open Sans" pitchFamily="34" charset="0"/>
-                <a:ea typeface="Open Sans" pitchFamily="34" charset="-122"/>
-                <a:cs typeface="Open Sans" pitchFamily="34" charset="-120"/>
+                <a:latin typeface="Open Sans ExtraBold" pitchFamily="34" charset="0"/>
+                <a:ea typeface="Open Sans ExtraBold" pitchFamily="34" charset="-122"/>
+                <a:cs typeface="Open Sans ExtraBold" pitchFamily="34" charset="-120"/>
               </a:rPr>
               <a:t>DOES IT PULL PEOPLE INTO WORK?</a:t>
             </a:r>
@@ -4831,7 +4564,7 @@
           <a:bodyPr wrap="square" lIns="0" tIns="0" rIns="0" bIns="0" rtlCol="0" anchor="t"/>
           <a:lstStyle/>
           <a:p>
-            <a:pPr algn="l" indent="0" marL="0">
+            <a:pPr marL="0" indent="0" algn="l">
               <a:lnSpc>
                 <a:spcPct val="98000"/>
               </a:lnSpc>
@@ -4868,15 +4601,27 @@
         </p:nvGraphicFramePr>
         <p:xfrm>
           <a:off x="1280160" y="1417320"/>
-          <a:ext cx="6583680" cy="914400"/>
+          <a:ext cx="6583680" cy="2633472"/>
         </p:xfrm>
         <a:graphic>
           <a:graphicData uri="http://schemas.openxmlformats.org/drawingml/2006/table">
             <a:tbl>
               <a:tblPr/>
               <a:tblGrid>
-                <a:gridCol w="4206240"/>
-                <a:gridCol w="2377440"/>
+                <a:gridCol w="4206240">
+                  <a:extLst>
+                    <a:ext uri="{9D8B030D-6E8A-4147-A177-3AD203B41FA5}">
+                      <a16:colId xmlns:a16="http://schemas.microsoft.com/office/drawing/2014/main" val="20000"/>
+                    </a:ext>
+                  </a:extLst>
+                </a:gridCol>
+                <a:gridCol w="2377440">
+                  <a:extLst>
+                    <a:ext uri="{9D8B030D-6E8A-4147-A177-3AD203B41FA5}">
+                      <a16:colId xmlns:a16="http://schemas.microsoft.com/office/drawing/2014/main" val="20001"/>
+                    </a:ext>
+                  </a:extLst>
+                </a:gridCol>
               </a:tblGrid>
               <a:tr h="329184">
                 <a:tc>
@@ -4884,7 +4629,7 @@
                     <a:bodyPr/>
                     <a:lstStyle/>
                     <a:p>
-                      <a:pPr algn="l" indent="0" marL="0">
+                      <a:pPr marL="0" indent="0" algn="l">
                         <a:buNone/>
                       </a:pPr>
                       <a:r>
@@ -4892,16 +4637,16 @@
                           <a:solidFill>
                             <a:srgbClr val="FFFFFF"/>
                           </a:solidFill>
-                          <a:latin typeface="Open Sans" pitchFamily="34" charset="0"/>
-                          <a:ea typeface="Open Sans" pitchFamily="34" charset="-122"/>
-                          <a:cs typeface="Open Sans" pitchFamily="34" charset="-120"/>
+                          <a:latin typeface="Open Sans ExtraBold" pitchFamily="34" charset="0"/>
+                          <a:ea typeface="Open Sans ExtraBold" pitchFamily="34" charset="-122"/>
+                          <a:cs typeface="Open Sans ExtraBold" pitchFamily="34" charset="-120"/>
                         </a:rPr>
                         <a:t>Scenario</a:t>
                       </a:r>
                       <a:endParaRPr lang="en-US" sz="1250" dirty="0">
-                        <a:latin typeface="Open Sans" charset="0"/>
-                        <a:ea typeface="Open Sans" charset="0"/>
-                        <a:cs typeface="Open Sans" charset="0"/>
+                        <a:latin typeface="Open Sans Light" charset="0"/>
+                        <a:ea typeface="Open Sans Light" charset="0"/>
+                        <a:cs typeface="Open Sans Light" charset="0"/>
                       </a:endParaRPr>
                     </a:p>
                   </a:txBody>
@@ -4934,7 +4679,7 @@
                     <a:bodyPr/>
                     <a:lstStyle/>
                     <a:p>
-                      <a:pPr algn="r" indent="0" marL="0">
+                      <a:pPr marL="0" indent="0" algn="r">
                         <a:buNone/>
                       </a:pPr>
                       <a:r>
@@ -4942,16 +4687,16 @@
                           <a:solidFill>
                             <a:srgbClr val="FFFFFF"/>
                           </a:solidFill>
-                          <a:latin typeface="Open Sans" pitchFamily="34" charset="0"/>
-                          <a:ea typeface="Open Sans" pitchFamily="34" charset="-122"/>
-                          <a:cs typeface="Open Sans" pitchFamily="34" charset="-120"/>
+                          <a:latin typeface="Open Sans ExtraBold" pitchFamily="34" charset="0"/>
+                          <a:ea typeface="Open Sans ExtraBold" pitchFamily="34" charset="-122"/>
+                          <a:cs typeface="Open Sans ExtraBold" pitchFamily="34" charset="-120"/>
                         </a:rPr>
                         <a:t>New entrants (millions)</a:t>
                       </a:r>
                       <a:endParaRPr lang="en-US" sz="1250" dirty="0">
-                        <a:latin typeface="Open Sans" charset="0"/>
-                        <a:ea typeface="Open Sans" charset="0"/>
-                        <a:cs typeface="Open Sans" charset="0"/>
+                        <a:latin typeface="Open Sans Light" charset="0"/>
+                        <a:ea typeface="Open Sans Light" charset="0"/>
+                        <a:cs typeface="Open Sans Light" charset="0"/>
                       </a:endParaRPr>
                     </a:p>
                   </a:txBody>
@@ -4979,6 +4724,11 @@
                     </a:solidFill>
                   </a:tcPr>
                 </a:tc>
+                <a:extLst>
+                  <a:ext uri="{0D108BD9-81ED-4DB2-BD59-A6C34878D82A}">
+                    <a16:rowId xmlns:a16="http://schemas.microsoft.com/office/drawing/2014/main" val="10000"/>
+                  </a:ext>
+                </a:extLst>
               </a:tr>
               <a:tr h="329184">
                 <a:tc>
@@ -4986,7 +4736,7 @@
                     <a:bodyPr/>
                     <a:lstStyle/>
                     <a:p>
-                      <a:pPr algn="l" indent="0" marL="0">
+                      <a:pPr marL="0" indent="0" algn="l">
                         <a:buNone/>
                       </a:pPr>
                       <a:r>
@@ -4994,16 +4744,16 @@
                           <a:solidFill>
                             <a:srgbClr val="3A3A3A"/>
                           </a:solidFill>
-                          <a:latin typeface="Open Sans" pitchFamily="34" charset="0"/>
-                          <a:ea typeface="Open Sans" pitchFamily="34" charset="-122"/>
-                          <a:cs typeface="Open Sans" pitchFamily="34" charset="-120"/>
+                          <a:latin typeface="Open Sans Light" pitchFamily="34" charset="0"/>
+                          <a:ea typeface="Open Sans Light" pitchFamily="34" charset="-122"/>
+                          <a:cs typeface="Open Sans Light" pitchFamily="34" charset="-120"/>
                         </a:rPr>
                         <a:t>Conservative floor (no wage penalty)</a:t>
                       </a:r>
                       <a:endParaRPr lang="en-US" sz="1250" dirty="0">
-                        <a:latin typeface="Open Sans" charset="0"/>
-                        <a:ea typeface="Open Sans" charset="0"/>
-                        <a:cs typeface="Open Sans" charset="0"/>
+                        <a:latin typeface="Open Sans Light" charset="0"/>
+                        <a:ea typeface="Open Sans Light" charset="0"/>
+                        <a:cs typeface="Open Sans Light" charset="0"/>
                       </a:endParaRPr>
                     </a:p>
                   </a:txBody>
@@ -5015,7 +4765,13 @@
                       <a:noFill/>
                     </a:lnR>
                     <a:lnT w="0" cap="flat" cmpd="sng" algn="ctr">
-                      <a:noFill/>
+                      <a:solidFill>
+                        <a:srgbClr val="D9D9D9"/>
+                      </a:solidFill>
+                      <a:prstDash val="solid"/>
+                      <a:round/>
+                      <a:headEnd type="none" w="med" len="med"/>
+                      <a:tailEnd type="none" w="med" len="med"/>
                     </a:lnT>
                     <a:lnB w="9525" cap="flat" cmpd="sng" algn="ctr">
                       <a:solidFill>
@@ -5036,7 +4792,7 @@
                     <a:bodyPr/>
                     <a:lstStyle/>
                     <a:p>
-                      <a:pPr algn="r" indent="0" marL="0">
+                      <a:pPr marL="0" indent="0" algn="r">
                         <a:buNone/>
                       </a:pPr>
                       <a:r>
@@ -5044,16 +4800,16 @@
                           <a:solidFill>
                             <a:srgbClr val="3A3A3A"/>
                           </a:solidFill>
-                          <a:latin typeface="Open Sans" pitchFamily="34" charset="0"/>
-                          <a:ea typeface="Open Sans" pitchFamily="34" charset="-122"/>
-                          <a:cs typeface="Open Sans" pitchFamily="34" charset="-120"/>
+                          <a:latin typeface="Open Sans Light" pitchFamily="34" charset="0"/>
+                          <a:ea typeface="Open Sans Light" pitchFamily="34" charset="-122"/>
+                          <a:cs typeface="Open Sans Light" pitchFamily="34" charset="-120"/>
                         </a:rPr>
                         <a:t>1.02</a:t>
                       </a:r>
                       <a:endParaRPr lang="en-US" sz="1250" dirty="0">
-                        <a:latin typeface="Open Sans" charset="0"/>
-                        <a:ea typeface="Open Sans" charset="0"/>
-                        <a:cs typeface="Open Sans" charset="0"/>
+                        <a:latin typeface="Open Sans Light" charset="0"/>
+                        <a:ea typeface="Open Sans Light" charset="0"/>
+                        <a:cs typeface="Open Sans Light" charset="0"/>
                       </a:endParaRPr>
                     </a:p>
                   </a:txBody>
@@ -5065,7 +4821,13 @@
                       <a:noFill/>
                     </a:lnR>
                     <a:lnT w="0" cap="flat" cmpd="sng" algn="ctr">
-                      <a:noFill/>
+                      <a:solidFill>
+                        <a:srgbClr val="D9D9D9"/>
+                      </a:solidFill>
+                      <a:prstDash val="solid"/>
+                      <a:round/>
+                      <a:headEnd type="none" w="med" len="med"/>
+                      <a:tailEnd type="none" w="med" len="med"/>
                     </a:lnT>
                     <a:lnB w="9525" cap="flat" cmpd="sng" algn="ctr">
                       <a:solidFill>
@@ -5081,6 +4843,11 @@
                     </a:solidFill>
                   </a:tcPr>
                 </a:tc>
+                <a:extLst>
+                  <a:ext uri="{0D108BD9-81ED-4DB2-BD59-A6C34878D82A}">
+                    <a16:rowId xmlns:a16="http://schemas.microsoft.com/office/drawing/2014/main" val="10001"/>
+                  </a:ext>
+                </a:extLst>
               </a:tr>
               <a:tr h="329184">
                 <a:tc>
@@ -5088,7 +4855,7 @@
                     <a:bodyPr/>
                     <a:lstStyle/>
                     <a:p>
-                      <a:pPr algn="l" indent="0" marL="0">
+                      <a:pPr marL="0" indent="0" algn="l">
                         <a:buNone/>
                       </a:pPr>
                       <a:r>
@@ -5096,16 +4863,16 @@
                           <a:solidFill>
                             <a:srgbClr val="3A3A3A"/>
                           </a:solidFill>
-                          <a:latin typeface="Open Sans" pitchFamily="34" charset="0"/>
-                          <a:ea typeface="Open Sans" pitchFamily="34" charset="-122"/>
-                          <a:cs typeface="Open Sans" pitchFamily="34" charset="-120"/>
+                          <a:latin typeface="Open Sans ExtraBold" pitchFamily="34" charset="0"/>
+                          <a:ea typeface="Open Sans ExtraBold" pitchFamily="34" charset="-122"/>
+                          <a:cs typeface="Open Sans ExtraBold" pitchFamily="34" charset="-120"/>
                         </a:rPr>
                         <a:t>Evidence-central</a:t>
                       </a:r>
                       <a:endParaRPr lang="en-US" sz="1250" dirty="0">
-                        <a:latin typeface="Open Sans" charset="0"/>
-                        <a:ea typeface="Open Sans" charset="0"/>
-                        <a:cs typeface="Open Sans" charset="0"/>
+                        <a:latin typeface="Open Sans Light" charset="0"/>
+                        <a:ea typeface="Open Sans Light" charset="0"/>
+                        <a:cs typeface="Open Sans Light" charset="0"/>
                       </a:endParaRPr>
                     </a:p>
                   </a:txBody>
@@ -5116,8 +4883,14 @@
                     <a:lnR w="0" cap="flat" cmpd="sng" algn="ctr">
                       <a:noFill/>
                     </a:lnR>
-                    <a:lnT w="0" cap="flat" cmpd="sng" algn="ctr">
-                      <a:noFill/>
+                    <a:lnT w="9525" cap="flat" cmpd="sng" algn="ctr">
+                      <a:solidFill>
+                        <a:srgbClr val="D9D9D9"/>
+                      </a:solidFill>
+                      <a:prstDash val="solid"/>
+                      <a:round/>
+                      <a:headEnd type="none" w="med" len="med"/>
+                      <a:tailEnd type="none" w="med" len="med"/>
                     </a:lnT>
                     <a:lnB w="9525" cap="flat" cmpd="sng" algn="ctr">
                       <a:solidFill>
@@ -5138,7 +4911,7 @@
                     <a:bodyPr/>
                     <a:lstStyle/>
                     <a:p>
-                      <a:pPr algn="r" indent="0" marL="0">
+                      <a:pPr marL="0" indent="0" algn="r">
                         <a:buNone/>
                       </a:pPr>
                       <a:r>
@@ -5146,16 +4919,16 @@
                           <a:solidFill>
                             <a:srgbClr val="024140"/>
                           </a:solidFill>
-                          <a:latin typeface="Open Sans" pitchFamily="34" charset="0"/>
-                          <a:ea typeface="Open Sans" pitchFamily="34" charset="-122"/>
-                          <a:cs typeface="Open Sans" pitchFamily="34" charset="-120"/>
+                          <a:latin typeface="Open Sans ExtraBold" pitchFamily="34" charset="0"/>
+                          <a:ea typeface="Open Sans ExtraBold" pitchFamily="34" charset="-122"/>
+                          <a:cs typeface="Open Sans ExtraBold" pitchFamily="34" charset="-120"/>
                         </a:rPr>
                         <a:t>1.49</a:t>
                       </a:r>
                       <a:endParaRPr lang="en-US" sz="1250" dirty="0">
-                        <a:latin typeface="Open Sans" charset="0"/>
-                        <a:ea typeface="Open Sans" charset="0"/>
-                        <a:cs typeface="Open Sans" charset="0"/>
+                        <a:latin typeface="Open Sans Light" charset="0"/>
+                        <a:ea typeface="Open Sans Light" charset="0"/>
+                        <a:cs typeface="Open Sans Light" charset="0"/>
                       </a:endParaRPr>
                     </a:p>
                   </a:txBody>
@@ -5166,8 +4939,14 @@
                     <a:lnR w="0" cap="flat" cmpd="sng" algn="ctr">
                       <a:noFill/>
                     </a:lnR>
-                    <a:lnT w="0" cap="flat" cmpd="sng" algn="ctr">
-                      <a:noFill/>
+                    <a:lnT w="9525" cap="flat" cmpd="sng" algn="ctr">
+                      <a:solidFill>
+                        <a:srgbClr val="D9D9D9"/>
+                      </a:solidFill>
+                      <a:prstDash val="solid"/>
+                      <a:round/>
+                      <a:headEnd type="none" w="med" len="med"/>
+                      <a:tailEnd type="none" w="med" len="med"/>
                     </a:lnT>
                     <a:lnB w="9525" cap="flat" cmpd="sng" algn="ctr">
                       <a:solidFill>
@@ -5183,6 +4962,11 @@
                     </a:solidFill>
                   </a:tcPr>
                 </a:tc>
+                <a:extLst>
+                  <a:ext uri="{0D108BD9-81ED-4DB2-BD59-A6C34878D82A}">
+                    <a16:rowId xmlns:a16="http://schemas.microsoft.com/office/drawing/2014/main" val="10002"/>
+                  </a:ext>
+                </a:extLst>
               </a:tr>
               <a:tr h="329184">
                 <a:tc>
@@ -5190,7 +4974,7 @@
                     <a:bodyPr/>
                     <a:lstStyle/>
                     <a:p>
-                      <a:pPr algn="l" indent="0" marL="0">
+                      <a:pPr marL="0" indent="0" algn="l">
                         <a:buNone/>
                       </a:pPr>
                       <a:r>
@@ -5198,16 +4982,16 @@
                           <a:solidFill>
                             <a:srgbClr val="3A3A3A"/>
                           </a:solidFill>
-                          <a:latin typeface="Open Sans" pitchFamily="34" charset="0"/>
-                          <a:ea typeface="Open Sans" pitchFamily="34" charset="-122"/>
-                          <a:cs typeface="Open Sans" pitchFamily="34" charset="-120"/>
+                          <a:latin typeface="Open Sans Light" pitchFamily="34" charset="0"/>
+                          <a:ea typeface="Open Sans Light" pitchFamily="34" charset="-122"/>
+                          <a:cs typeface="Open Sans Light" pitchFamily="34" charset="-120"/>
                         </a:rPr>
                         <a:t>High (joint upper corner)</a:t>
                       </a:r>
                       <a:endParaRPr lang="en-US" sz="1250" dirty="0">
-                        <a:latin typeface="Open Sans" charset="0"/>
-                        <a:ea typeface="Open Sans" charset="0"/>
-                        <a:cs typeface="Open Sans" charset="0"/>
+                        <a:latin typeface="Open Sans Light" charset="0"/>
+                        <a:ea typeface="Open Sans Light" charset="0"/>
+                        <a:cs typeface="Open Sans Light" charset="0"/>
                       </a:endParaRPr>
                     </a:p>
                   </a:txBody>
@@ -5218,8 +5002,14 @@
                     <a:lnR w="0" cap="flat" cmpd="sng" algn="ctr">
                       <a:noFill/>
                     </a:lnR>
-                    <a:lnT w="0" cap="flat" cmpd="sng" algn="ctr">
-                      <a:noFill/>
+                    <a:lnT w="9525" cap="flat" cmpd="sng" algn="ctr">
+                      <a:solidFill>
+                        <a:srgbClr val="D9D9D9"/>
+                      </a:solidFill>
+                      <a:prstDash val="solid"/>
+                      <a:round/>
+                      <a:headEnd type="none" w="med" len="med"/>
+                      <a:tailEnd type="none" w="med" len="med"/>
                     </a:lnT>
                     <a:lnB w="9525" cap="flat" cmpd="sng" algn="ctr">
                       <a:solidFill>
@@ -5240,7 +5030,7 @@
                     <a:bodyPr/>
                     <a:lstStyle/>
                     <a:p>
-                      <a:pPr algn="r" indent="0" marL="0">
+                      <a:pPr marL="0" indent="0" algn="r">
                         <a:buNone/>
                       </a:pPr>
                       <a:r>
@@ -5248,16 +5038,16 @@
                           <a:solidFill>
                             <a:srgbClr val="3A3A3A"/>
                           </a:solidFill>
-                          <a:latin typeface="Open Sans" pitchFamily="34" charset="0"/>
-                          <a:ea typeface="Open Sans" pitchFamily="34" charset="-122"/>
-                          <a:cs typeface="Open Sans" pitchFamily="34" charset="-120"/>
+                          <a:latin typeface="Open Sans Light" pitchFamily="34" charset="0"/>
+                          <a:ea typeface="Open Sans Light" pitchFamily="34" charset="-122"/>
+                          <a:cs typeface="Open Sans Light" pitchFamily="34" charset="-120"/>
                         </a:rPr>
                         <a:t>3.81</a:t>
                       </a:r>
                       <a:endParaRPr lang="en-US" sz="1250" dirty="0">
-                        <a:latin typeface="Open Sans" charset="0"/>
-                        <a:ea typeface="Open Sans" charset="0"/>
-                        <a:cs typeface="Open Sans" charset="0"/>
+                        <a:latin typeface="Open Sans Light" charset="0"/>
+                        <a:ea typeface="Open Sans Light" charset="0"/>
+                        <a:cs typeface="Open Sans Light" charset="0"/>
                       </a:endParaRPr>
                     </a:p>
                   </a:txBody>
@@ -5268,8 +5058,14 @@
                     <a:lnR w="0" cap="flat" cmpd="sng" algn="ctr">
                       <a:noFill/>
                     </a:lnR>
-                    <a:lnT w="0" cap="flat" cmpd="sng" algn="ctr">
-                      <a:noFill/>
+                    <a:lnT w="9525" cap="flat" cmpd="sng" algn="ctr">
+                      <a:solidFill>
+                        <a:srgbClr val="D9D9D9"/>
+                      </a:solidFill>
+                      <a:prstDash val="solid"/>
+                      <a:round/>
+                      <a:headEnd type="none" w="med" len="med"/>
+                      <a:tailEnd type="none" w="med" len="med"/>
                     </a:lnT>
                     <a:lnB w="9525" cap="flat" cmpd="sng" algn="ctr">
                       <a:solidFill>
@@ -5285,6 +5081,11 @@
                     </a:solidFill>
                   </a:tcPr>
                 </a:tc>
+                <a:extLst>
+                  <a:ext uri="{0D108BD9-81ED-4DB2-BD59-A6C34878D82A}">
+                    <a16:rowId xmlns:a16="http://schemas.microsoft.com/office/drawing/2014/main" val="10003"/>
+                  </a:ext>
+                </a:extLst>
               </a:tr>
               <a:tr h="329184">
                 <a:tc>
@@ -5292,7 +5093,7 @@
                     <a:bodyPr/>
                     <a:lstStyle/>
                     <a:p>
-                      <a:pPr algn="l" indent="0" marL="0">
+                      <a:pPr marL="0" indent="0" algn="l">
                         <a:buNone/>
                       </a:pPr>
                       <a:r>
@@ -5300,16 +5101,16 @@
                           <a:solidFill>
                             <a:srgbClr val="3A3A3A"/>
                           </a:solidFill>
-                          <a:latin typeface="Open Sans" pitchFamily="34" charset="0"/>
-                          <a:ea typeface="Open Sans" pitchFamily="34" charset="-122"/>
-                          <a:cs typeface="Open Sans" pitchFamily="34" charset="-120"/>
+                          <a:latin typeface="Open Sans Light" pitchFamily="34" charset="0"/>
+                          <a:ea typeface="Open Sans Light" pitchFamily="34" charset="-122"/>
+                          <a:cs typeface="Open Sans Light" pitchFamily="34" charset="-120"/>
                         </a:rPr>
                         <a:t>Full range across the parameter grid</a:t>
                       </a:r>
                       <a:endParaRPr lang="en-US" sz="1250" dirty="0">
-                        <a:latin typeface="Open Sans" charset="0"/>
-                        <a:ea typeface="Open Sans" charset="0"/>
-                        <a:cs typeface="Open Sans" charset="0"/>
+                        <a:latin typeface="Open Sans Light" charset="0"/>
+                        <a:ea typeface="Open Sans Light" charset="0"/>
+                        <a:cs typeface="Open Sans Light" charset="0"/>
                       </a:endParaRPr>
                     </a:p>
                   </a:txBody>
@@ -5320,8 +5121,14 @@
                     <a:lnR w="0" cap="flat" cmpd="sng" algn="ctr">
                       <a:noFill/>
                     </a:lnR>
-                    <a:lnT w="0" cap="flat" cmpd="sng" algn="ctr">
-                      <a:noFill/>
+                    <a:lnT w="9525" cap="flat" cmpd="sng" algn="ctr">
+                      <a:solidFill>
+                        <a:srgbClr val="D9D9D9"/>
+                      </a:solidFill>
+                      <a:prstDash val="solid"/>
+                      <a:round/>
+                      <a:headEnd type="none" w="med" len="med"/>
+                      <a:tailEnd type="none" w="med" len="med"/>
                     </a:lnT>
                     <a:lnB w="9525" cap="flat" cmpd="sng" algn="ctr">
                       <a:solidFill>
@@ -5342,7 +5149,7 @@
                     <a:bodyPr/>
                     <a:lstStyle/>
                     <a:p>
-                      <a:pPr algn="r" indent="0" marL="0">
+                      <a:pPr marL="0" indent="0" algn="r">
                         <a:buNone/>
                       </a:pPr>
                       <a:r>
@@ -5350,16 +5157,16 @@
                           <a:solidFill>
                             <a:srgbClr val="3A3A3A"/>
                           </a:solidFill>
-                          <a:latin typeface="Open Sans" pitchFamily="34" charset="0"/>
-                          <a:ea typeface="Open Sans" pitchFamily="34" charset="-122"/>
-                          <a:cs typeface="Open Sans" pitchFamily="34" charset="-120"/>
+                          <a:latin typeface="Open Sans Light" pitchFamily="34" charset="0"/>
+                          <a:ea typeface="Open Sans Light" pitchFamily="34" charset="-122"/>
+                          <a:cs typeface="Open Sans Light" pitchFamily="34" charset="-120"/>
                         </a:rPr>
                         <a:t>0.23–3.81</a:t>
                       </a:r>
                       <a:endParaRPr lang="en-US" sz="1250" dirty="0">
-                        <a:latin typeface="Open Sans" charset="0"/>
-                        <a:ea typeface="Open Sans" charset="0"/>
-                        <a:cs typeface="Open Sans" charset="0"/>
+                        <a:latin typeface="Open Sans Light" charset="0"/>
+                        <a:ea typeface="Open Sans Light" charset="0"/>
+                        <a:cs typeface="Open Sans Light" charset="0"/>
                       </a:endParaRPr>
                     </a:p>
                   </a:txBody>
@@ -5370,8 +5177,14 @@
                     <a:lnR w="0" cap="flat" cmpd="sng" algn="ctr">
                       <a:noFill/>
                     </a:lnR>
-                    <a:lnT w="0" cap="flat" cmpd="sng" algn="ctr">
-                      <a:noFill/>
+                    <a:lnT w="9525" cap="flat" cmpd="sng" algn="ctr">
+                      <a:solidFill>
+                        <a:srgbClr val="D9D9D9"/>
+                      </a:solidFill>
+                      <a:prstDash val="solid"/>
+                      <a:round/>
+                      <a:headEnd type="none" w="med" len="med"/>
+                      <a:tailEnd type="none" w="med" len="med"/>
                     </a:lnT>
                     <a:lnB w="9525" cap="flat" cmpd="sng" algn="ctr">
                       <a:solidFill>
@@ -5387,6 +5200,11 @@
                     </a:solidFill>
                   </a:tcPr>
                 </a:tc>
+                <a:extLst>
+                  <a:ext uri="{0D108BD9-81ED-4DB2-BD59-A6C34878D82A}">
+                    <a16:rowId xmlns:a16="http://schemas.microsoft.com/office/drawing/2014/main" val="10004"/>
+                  </a:ext>
+                </a:extLst>
               </a:tr>
               <a:tr h="329184">
                 <a:tc>
@@ -5394,7 +5212,7 @@
                     <a:bodyPr/>
                     <a:lstStyle/>
                     <a:p>
-                      <a:pPr algn="l" indent="0" marL="0">
+                      <a:pPr marL="0" indent="0" algn="l">
                         <a:buNone/>
                       </a:pPr>
                       <a:r>
@@ -5402,16 +5220,16 @@
                           <a:solidFill>
                             <a:srgbClr val="3A3A3A"/>
                           </a:solidFill>
-                          <a:latin typeface="Open Sans" pitchFamily="34" charset="0"/>
-                          <a:ea typeface="Open Sans" pitchFamily="34" charset="-122"/>
-                          <a:cs typeface="Open Sans" pitchFamily="34" charset="-120"/>
+                          <a:latin typeface="Open Sans ExtraBold" pitchFamily="34" charset="0"/>
+                          <a:ea typeface="Open Sans ExtraBold" pitchFamily="34" charset="-122"/>
+                          <a:cs typeface="Open Sans ExtraBold" pitchFamily="34" charset="-120"/>
                         </a:rPr>
                         <a:t>Evidence-central, by group — single mothers</a:t>
                       </a:r>
                       <a:endParaRPr lang="en-US" sz="1250" dirty="0">
-                        <a:latin typeface="Open Sans" charset="0"/>
-                        <a:ea typeface="Open Sans" charset="0"/>
-                        <a:cs typeface="Open Sans" charset="0"/>
+                        <a:latin typeface="Open Sans Light" charset="0"/>
+                        <a:ea typeface="Open Sans Light" charset="0"/>
+                        <a:cs typeface="Open Sans Light" charset="0"/>
                       </a:endParaRPr>
                     </a:p>
                   </a:txBody>
@@ -5422,8 +5240,14 @@
                     <a:lnR w="0" cap="flat" cmpd="sng" algn="ctr">
                       <a:noFill/>
                     </a:lnR>
-                    <a:lnT w="0" cap="flat" cmpd="sng" algn="ctr">
-                      <a:noFill/>
+                    <a:lnT w="9525" cap="flat" cmpd="sng" algn="ctr">
+                      <a:solidFill>
+                        <a:srgbClr val="D9D9D9"/>
+                      </a:solidFill>
+                      <a:prstDash val="solid"/>
+                      <a:round/>
+                      <a:headEnd type="none" w="med" len="med"/>
+                      <a:tailEnd type="none" w="med" len="med"/>
                     </a:lnT>
                     <a:lnB w="9525" cap="flat" cmpd="sng" algn="ctr">
                       <a:solidFill>
@@ -5444,7 +5268,7 @@
                     <a:bodyPr/>
                     <a:lstStyle/>
                     <a:p>
-                      <a:pPr algn="r" indent="0" marL="0">
+                      <a:pPr marL="0" indent="0" algn="r">
                         <a:buNone/>
                       </a:pPr>
                       <a:r>
@@ -5452,16 +5276,16 @@
                           <a:solidFill>
                             <a:srgbClr val="3A3A3A"/>
                           </a:solidFill>
-                          <a:latin typeface="Open Sans" pitchFamily="34" charset="0"/>
-                          <a:ea typeface="Open Sans" pitchFamily="34" charset="-122"/>
-                          <a:cs typeface="Open Sans" pitchFamily="34" charset="-120"/>
+                          <a:latin typeface="Open Sans Light" pitchFamily="34" charset="0"/>
+                          <a:ea typeface="Open Sans Light" pitchFamily="34" charset="-122"/>
+                          <a:cs typeface="Open Sans Light" pitchFamily="34" charset="-120"/>
                         </a:rPr>
                         <a:t>0.24</a:t>
                       </a:r>
                       <a:endParaRPr lang="en-US" sz="1250" dirty="0">
-                        <a:latin typeface="Open Sans" charset="0"/>
-                        <a:ea typeface="Open Sans" charset="0"/>
-                        <a:cs typeface="Open Sans" charset="0"/>
+                        <a:latin typeface="Open Sans Light" charset="0"/>
+                        <a:ea typeface="Open Sans Light" charset="0"/>
+                        <a:cs typeface="Open Sans Light" charset="0"/>
                       </a:endParaRPr>
                     </a:p>
                   </a:txBody>
@@ -5472,8 +5296,14 @@
                     <a:lnR w="0" cap="flat" cmpd="sng" algn="ctr">
                       <a:noFill/>
                     </a:lnR>
-                    <a:lnT w="0" cap="flat" cmpd="sng" algn="ctr">
-                      <a:noFill/>
+                    <a:lnT w="9525" cap="flat" cmpd="sng" algn="ctr">
+                      <a:solidFill>
+                        <a:srgbClr val="D9D9D9"/>
+                      </a:solidFill>
+                      <a:prstDash val="solid"/>
+                      <a:round/>
+                      <a:headEnd type="none" w="med" len="med"/>
+                      <a:tailEnd type="none" w="med" len="med"/>
                     </a:lnT>
                     <a:lnB w="9525" cap="flat" cmpd="sng" algn="ctr">
                       <a:solidFill>
@@ -5489,6 +5319,11 @@
                     </a:solidFill>
                   </a:tcPr>
                 </a:tc>
+                <a:extLst>
+                  <a:ext uri="{0D108BD9-81ED-4DB2-BD59-A6C34878D82A}">
+                    <a16:rowId xmlns:a16="http://schemas.microsoft.com/office/drawing/2014/main" val="10005"/>
+                  </a:ext>
+                </a:extLst>
               </a:tr>
               <a:tr h="329184">
                 <a:tc>
@@ -5496,7 +5331,7 @@
                     <a:bodyPr/>
                     <a:lstStyle/>
                     <a:p>
-                      <a:pPr algn="l" indent="0" marL="0">
+                      <a:pPr marL="0" indent="0" algn="l">
                         <a:buNone/>
                       </a:pPr>
                       <a:r>
@@ -5504,16 +5339,16 @@
                           <a:solidFill>
                             <a:srgbClr val="3A3A3A"/>
                           </a:solidFill>
-                          <a:latin typeface="Open Sans" pitchFamily="34" charset="0"/>
-                          <a:ea typeface="Open Sans" pitchFamily="34" charset="-122"/>
-                          <a:cs typeface="Open Sans" pitchFamily="34" charset="-120"/>
+                          <a:latin typeface="Open Sans ExtraBold" pitchFamily="34" charset="0"/>
+                          <a:ea typeface="Open Sans ExtraBold" pitchFamily="34" charset="-122"/>
+                          <a:cs typeface="Open Sans ExtraBold" pitchFamily="34" charset="-120"/>
                         </a:rPr>
                         <a:t>Evidence-central, by group — other women</a:t>
                       </a:r>
                       <a:endParaRPr lang="en-US" sz="1250" dirty="0">
-                        <a:latin typeface="Open Sans" charset="0"/>
-                        <a:ea typeface="Open Sans" charset="0"/>
-                        <a:cs typeface="Open Sans" charset="0"/>
+                        <a:latin typeface="Open Sans Light" charset="0"/>
+                        <a:ea typeface="Open Sans Light" charset="0"/>
+                        <a:cs typeface="Open Sans Light" charset="0"/>
                       </a:endParaRPr>
                     </a:p>
                   </a:txBody>
@@ -5524,8 +5359,14 @@
                     <a:lnR w="0" cap="flat" cmpd="sng" algn="ctr">
                       <a:noFill/>
                     </a:lnR>
-                    <a:lnT w="0" cap="flat" cmpd="sng" algn="ctr">
-                      <a:noFill/>
+                    <a:lnT w="9525" cap="flat" cmpd="sng" algn="ctr">
+                      <a:solidFill>
+                        <a:srgbClr val="D9D9D9"/>
+                      </a:solidFill>
+                      <a:prstDash val="solid"/>
+                      <a:round/>
+                      <a:headEnd type="none" w="med" len="med"/>
+                      <a:tailEnd type="none" w="med" len="med"/>
                     </a:lnT>
                     <a:lnB w="9525" cap="flat" cmpd="sng" algn="ctr">
                       <a:solidFill>
@@ -5546,7 +5387,7 @@
                     <a:bodyPr/>
                     <a:lstStyle/>
                     <a:p>
-                      <a:pPr algn="r" indent="0" marL="0">
+                      <a:pPr marL="0" indent="0" algn="r">
                         <a:buNone/>
                       </a:pPr>
                       <a:r>
@@ -5554,16 +5395,16 @@
                           <a:solidFill>
                             <a:srgbClr val="3A3A3A"/>
                           </a:solidFill>
-                          <a:latin typeface="Open Sans" pitchFamily="34" charset="0"/>
-                          <a:ea typeface="Open Sans" pitchFamily="34" charset="-122"/>
-                          <a:cs typeface="Open Sans" pitchFamily="34" charset="-120"/>
+                          <a:latin typeface="Open Sans Light" pitchFamily="34" charset="0"/>
+                          <a:ea typeface="Open Sans Light" pitchFamily="34" charset="-122"/>
+                          <a:cs typeface="Open Sans Light" pitchFamily="34" charset="-120"/>
                         </a:rPr>
                         <a:t>1.07</a:t>
                       </a:r>
                       <a:endParaRPr lang="en-US" sz="1250" dirty="0">
-                        <a:latin typeface="Open Sans" charset="0"/>
-                        <a:ea typeface="Open Sans" charset="0"/>
-                        <a:cs typeface="Open Sans" charset="0"/>
+                        <a:latin typeface="Open Sans Light" charset="0"/>
+                        <a:ea typeface="Open Sans Light" charset="0"/>
+                        <a:cs typeface="Open Sans Light" charset="0"/>
                       </a:endParaRPr>
                     </a:p>
                   </a:txBody>
@@ -5574,8 +5415,14 @@
                     <a:lnR w="0" cap="flat" cmpd="sng" algn="ctr">
                       <a:noFill/>
                     </a:lnR>
-                    <a:lnT w="0" cap="flat" cmpd="sng" algn="ctr">
-                      <a:noFill/>
+                    <a:lnT w="9525" cap="flat" cmpd="sng" algn="ctr">
+                      <a:solidFill>
+                        <a:srgbClr val="D9D9D9"/>
+                      </a:solidFill>
+                      <a:prstDash val="solid"/>
+                      <a:round/>
+                      <a:headEnd type="none" w="med" len="med"/>
+                      <a:tailEnd type="none" w="med" len="med"/>
                     </a:lnT>
                     <a:lnB w="9525" cap="flat" cmpd="sng" algn="ctr">
                       <a:solidFill>
@@ -5591,6 +5438,11 @@
                     </a:solidFill>
                   </a:tcPr>
                 </a:tc>
+                <a:extLst>
+                  <a:ext uri="{0D108BD9-81ED-4DB2-BD59-A6C34878D82A}">
+                    <a16:rowId xmlns:a16="http://schemas.microsoft.com/office/drawing/2014/main" val="10006"/>
+                  </a:ext>
+                </a:extLst>
               </a:tr>
               <a:tr h="329184">
                 <a:tc>
@@ -5598,7 +5450,7 @@
                     <a:bodyPr/>
                     <a:lstStyle/>
                     <a:p>
-                      <a:pPr algn="l" indent="0" marL="0">
+                      <a:pPr marL="0" indent="0" algn="l">
                         <a:buNone/>
                       </a:pPr>
                       <a:r>
@@ -5606,16 +5458,16 @@
                           <a:solidFill>
                             <a:srgbClr val="3A3A3A"/>
                           </a:solidFill>
-                          <a:latin typeface="Open Sans" pitchFamily="34" charset="0"/>
-                          <a:ea typeface="Open Sans" pitchFamily="34" charset="-122"/>
-                          <a:cs typeface="Open Sans" pitchFamily="34" charset="-120"/>
+                          <a:latin typeface="Open Sans ExtraBold" pitchFamily="34" charset="0"/>
+                          <a:ea typeface="Open Sans ExtraBold" pitchFamily="34" charset="-122"/>
+                          <a:cs typeface="Open Sans ExtraBold" pitchFamily="34" charset="-120"/>
                         </a:rPr>
                         <a:t>Evidence-central, by group — men</a:t>
                       </a:r>
                       <a:endParaRPr lang="en-US" sz="1250" dirty="0">
-                        <a:latin typeface="Open Sans" charset="0"/>
-                        <a:ea typeface="Open Sans" charset="0"/>
-                        <a:cs typeface="Open Sans" charset="0"/>
+                        <a:latin typeface="Open Sans Light" charset="0"/>
+                        <a:ea typeface="Open Sans Light" charset="0"/>
+                        <a:cs typeface="Open Sans Light" charset="0"/>
                       </a:endParaRPr>
                     </a:p>
                   </a:txBody>
@@ -5626,8 +5478,14 @@
                     <a:lnR w="0" cap="flat" cmpd="sng" algn="ctr">
                       <a:noFill/>
                     </a:lnR>
-                    <a:lnT w="0" cap="flat" cmpd="sng" algn="ctr">
-                      <a:noFill/>
+                    <a:lnT w="9525" cap="flat" cmpd="sng" algn="ctr">
+                      <a:solidFill>
+                        <a:srgbClr val="D9D9D9"/>
+                      </a:solidFill>
+                      <a:prstDash val="solid"/>
+                      <a:round/>
+                      <a:headEnd type="none" w="med" len="med"/>
+                      <a:tailEnd type="none" w="med" len="med"/>
                     </a:lnT>
                     <a:lnB w="9525" cap="flat" cmpd="sng" algn="ctr">
                       <a:solidFill>
@@ -5648,7 +5506,7 @@
                     <a:bodyPr/>
                     <a:lstStyle/>
                     <a:p>
-                      <a:pPr algn="r" indent="0" marL="0">
+                      <a:pPr marL="0" indent="0" algn="r">
                         <a:buNone/>
                       </a:pPr>
                       <a:r>
@@ -5656,16 +5514,16 @@
                           <a:solidFill>
                             <a:srgbClr val="3A3A3A"/>
                           </a:solidFill>
-                          <a:latin typeface="Open Sans" pitchFamily="34" charset="0"/>
-                          <a:ea typeface="Open Sans" pitchFamily="34" charset="-122"/>
-                          <a:cs typeface="Open Sans" pitchFamily="34" charset="-120"/>
+                          <a:latin typeface="Open Sans Light" pitchFamily="34" charset="0"/>
+                          <a:ea typeface="Open Sans Light" pitchFamily="34" charset="-122"/>
+                          <a:cs typeface="Open Sans Light" pitchFamily="34" charset="-120"/>
                         </a:rPr>
                         <a:t>0.18</a:t>
                       </a:r>
                       <a:endParaRPr lang="en-US" sz="1250" dirty="0">
-                        <a:latin typeface="Open Sans" charset="0"/>
-                        <a:ea typeface="Open Sans" charset="0"/>
-                        <a:cs typeface="Open Sans" charset="0"/>
+                        <a:latin typeface="Open Sans Light" charset="0"/>
+                        <a:ea typeface="Open Sans Light" charset="0"/>
+                        <a:cs typeface="Open Sans Light" charset="0"/>
                       </a:endParaRPr>
                     </a:p>
                   </a:txBody>
@@ -5676,8 +5534,14 @@
                     <a:lnR w="0" cap="flat" cmpd="sng" algn="ctr">
                       <a:noFill/>
                     </a:lnR>
-                    <a:lnT w="0" cap="flat" cmpd="sng" algn="ctr">
-                      <a:noFill/>
+                    <a:lnT w="9525" cap="flat" cmpd="sng" algn="ctr">
+                      <a:solidFill>
+                        <a:srgbClr val="D9D9D9"/>
+                      </a:solidFill>
+                      <a:prstDash val="solid"/>
+                      <a:round/>
+                      <a:headEnd type="none" w="med" len="med"/>
+                      <a:tailEnd type="none" w="med" len="med"/>
                     </a:lnT>
                     <a:lnB w="9525" cap="flat" cmpd="sng" algn="ctr">
                       <a:solidFill>
@@ -5693,6 +5557,11 @@
                     </a:solidFill>
                   </a:tcPr>
                 </a:tc>
+                <a:extLst>
+                  <a:ext uri="{0D108BD9-81ED-4DB2-BD59-A6C34878D82A}">
+                    <a16:rowId xmlns:a16="http://schemas.microsoft.com/office/drawing/2014/main" val="10007"/>
+                  </a:ext>
+                </a:extLst>
               </a:tr>
             </a:tbl>
           </a:graphicData>
@@ -5719,7 +5588,7 @@
           <a:bodyPr wrap="square" lIns="0" tIns="0" rIns="0" bIns="0" rtlCol="0" anchor="ctr"/>
           <a:lstStyle/>
           <a:p>
-            <a:pPr indent="0" marL="0">
+            <a:pPr marL="0" indent="0">
               <a:buNone/>
             </a:pPr>
             <a:r>
@@ -5727,9 +5596,9 @@
                 <a:solidFill>
                   <a:srgbClr val="8A8A8A"/>
                 </a:solidFill>
-                <a:latin typeface="Open Sans" pitchFamily="34" charset="0"/>
-                <a:ea typeface="Open Sans" pitchFamily="34" charset="-122"/>
-                <a:cs typeface="Open Sans" pitchFamily="34" charset="-120"/>
+                <a:latin typeface="Open Sans Light" pitchFamily="34" charset="0"/>
+                <a:ea typeface="Open Sans Light" pitchFamily="34" charset="-122"/>
+                <a:cs typeface="Open Sans Light" pitchFamily="34" charset="-120"/>
               </a:rPr>
               <a:t>Headline scenarios are internally-consistent parameter bundles, not single-lever excursions. Source: EIG 80-80 wage subsidy simulation, 2026.</a:t>
             </a:r>
@@ -5753,6 +5622,7 @@
         <a:solidFill>
           <a:srgbClr val="FFFFFF"/>
         </a:solidFill>
+        <a:effectLst/>
       </p:bgPr>
     </p:bg>
     <p:spTree>
@@ -5790,17 +5660,17 @@
           <a:bodyPr wrap="square" lIns="0" tIns="0" rIns="0" bIns="0" rtlCol="0" anchor="ctr"/>
           <a:lstStyle/>
           <a:p>
-            <a:pPr algn="l" indent="0" marL="0">
+            <a:pPr marL="0" indent="0" algn="l">
               <a:buNone/>
             </a:pPr>
             <a:r>
-              <a:rPr lang="en-US" sz="1100" b="1" spc="200" kern="0" dirty="0">
+              <a:rPr lang="en-US" sz="1100" b="1" kern="0" spc="200" dirty="0">
                 <a:solidFill>
                   <a:srgbClr val="19644D"/>
                 </a:solidFill>
-                <a:latin typeface="Open Sans" pitchFamily="34" charset="0"/>
-                <a:ea typeface="Open Sans" pitchFamily="34" charset="-122"/>
-                <a:cs typeface="Open Sans" pitchFamily="34" charset="-120"/>
+                <a:latin typeface="Open Sans ExtraBold" pitchFamily="34" charset="0"/>
+                <a:ea typeface="Open Sans ExtraBold" pitchFamily="34" charset="-122"/>
+                <a:cs typeface="Open Sans ExtraBold" pitchFamily="34" charset="-120"/>
               </a:rPr>
               <a:t>DOES IT PULL PEOPLE INTO WORK?</a:t>
             </a:r>
@@ -5829,7 +5699,7 @@
           <a:bodyPr wrap="square" lIns="0" tIns="0" rIns="0" bIns="0" rtlCol="0" anchor="t"/>
           <a:lstStyle/>
           <a:p>
-            <a:pPr algn="l" indent="0" marL="0">
+            <a:pPr marL="0" indent="0" algn="l">
               <a:lnSpc>
                 <a:spcPct val="98000"/>
               </a:lnSpc>
@@ -5871,7 +5741,7 @@
           <a:bodyPr wrap="square" lIns="0" tIns="0" rIns="0" bIns="0" rtlCol="0" anchor="t"/>
           <a:lstStyle/>
           <a:p>
-            <a:pPr indent="0" marL="0">
+            <a:pPr marL="0" indent="0">
               <a:lnSpc>
                 <a:spcPct val="100000"/>
               </a:lnSpc>
@@ -5882,9 +5752,9 @@
                 <a:solidFill>
                   <a:srgbClr val="3A3A3A"/>
                 </a:solidFill>
-                <a:latin typeface="Open Sans" pitchFamily="34" charset="0"/>
-                <a:ea typeface="Open Sans" pitchFamily="34" charset="-122"/>
-                <a:cs typeface="Open Sans" pitchFamily="34" charset="-120"/>
+                <a:latin typeface="Open Sans ExtraBold" pitchFamily="34" charset="0"/>
+                <a:ea typeface="Open Sans ExtraBold" pitchFamily="34" charset="-122"/>
+                <a:cs typeface="Open Sans ExtraBold" pitchFamily="34" charset="-120"/>
               </a:rPr>
               <a:t>1.49M central (floor 1.02M, high 3.81M) — between Paycheck Plus and the Self-Sufficiency Project.</a:t>
             </a:r>
@@ -5894,14 +5764,14 @@
       </p:sp>
       <p:pic>
         <p:nvPicPr>
-          <p:cNvPr id="5" name="Image 0" descr="/Users/benjamin/Documents/GitHub/eig-wagesubsidy-policy-sim/output/figures/slides/fig07_entry_band_by_cell.png">    </p:cNvPr>
+          <p:cNvPr id="5" name="Image 0" descr="/Users/benjamin/Documents/GitHub/eig-wagesubsidy-policy-sim/output/figures/slides/fig07_entry_band_by_cell.png"/>
           <p:cNvPicPr>
             <a:picLocks noChangeAspect="1"/>
           </p:cNvPicPr>
           <p:nvPr/>
         </p:nvPicPr>
         <p:blipFill>
-          <a:blip r:embed="rId1"/>
+          <a:blip r:embed="rId3"/>
           <a:stretch>
             <a:fillRect/>
           </a:stretch>
@@ -5937,7 +5807,7 @@
           <a:bodyPr wrap="square" lIns="0" tIns="0" rIns="0" bIns="0" rtlCol="0" anchor="ctr"/>
           <a:lstStyle/>
           <a:p>
-            <a:pPr indent="0" marL="0">
+            <a:pPr marL="0" indent="0">
               <a:buNone/>
             </a:pPr>
             <a:r>
@@ -5945,9 +5815,9 @@
                 <a:solidFill>
                   <a:srgbClr val="8A8A8A"/>
                 </a:solidFill>
-                <a:latin typeface="Open Sans" pitchFamily="34" charset="0"/>
-                <a:ea typeface="Open Sans" pitchFamily="34" charset="-122"/>
-                <a:cs typeface="Open Sans" pitchFamily="34" charset="-120"/>
+                <a:latin typeface="Open Sans Light" pitchFamily="34" charset="0"/>
+                <a:ea typeface="Open Sans Light" pitchFamily="34" charset="-122"/>
+                <a:cs typeface="Open Sans Light" pitchFamily="34" charset="-120"/>
               </a:rPr>
               <a:t>Source: Economic Innovation Group 80-80 wage subsidy simulation, 2026.</a:t>
             </a:r>
@@ -5971,6 +5841,7 @@
         <a:solidFill>
           <a:srgbClr val="FFFFFF"/>
         </a:solidFill>
+        <a:effectLst/>
       </p:bgPr>
     </p:bg>
     <p:spTree>
@@ -6008,17 +5879,17 @@
           <a:bodyPr wrap="square" lIns="0" tIns="0" rIns="0" bIns="0" rtlCol="0" anchor="ctr"/>
           <a:lstStyle/>
           <a:p>
-            <a:pPr algn="l" indent="0" marL="0">
+            <a:pPr marL="0" indent="0" algn="l">
               <a:buNone/>
             </a:pPr>
             <a:r>
-              <a:rPr lang="en-US" sz="1100" b="1" spc="200" kern="0" dirty="0">
+              <a:rPr lang="en-US" sz="1100" b="1" kern="0" spc="200" dirty="0">
                 <a:solidFill>
                   <a:srgbClr val="19644D"/>
                 </a:solidFill>
-                <a:latin typeface="Open Sans" pitchFamily="34" charset="0"/>
-                <a:ea typeface="Open Sans" pitchFamily="34" charset="-122"/>
-                <a:cs typeface="Open Sans" pitchFamily="34" charset="-120"/>
+                <a:latin typeface="Open Sans ExtraBold" pitchFamily="34" charset="0"/>
+                <a:ea typeface="Open Sans ExtraBold" pitchFamily="34" charset="-122"/>
+                <a:cs typeface="Open Sans ExtraBold" pitchFamily="34" charset="-120"/>
               </a:rPr>
               <a:t>DOES IT PULL PEOPLE INTO WORK?</a:t>
             </a:r>
@@ -6047,7 +5918,7 @@
           <a:bodyPr wrap="square" lIns="0" tIns="0" rIns="0" bIns="0" rtlCol="0" anchor="t"/>
           <a:lstStyle/>
           <a:p>
-            <a:pPr algn="l" indent="0" marL="0">
+            <a:pPr marL="0" indent="0" algn="l">
               <a:lnSpc>
                 <a:spcPct val="98000"/>
               </a:lnSpc>
@@ -6089,7 +5960,7 @@
           <a:bodyPr wrap="square" lIns="0" tIns="0" rIns="0" bIns="0" rtlCol="0" anchor="t"/>
           <a:lstStyle/>
           <a:p>
-            <a:pPr indent="0" marL="0">
+            <a:pPr marL="0" indent="0">
               <a:lnSpc>
                 <a:spcPct val="100000"/>
               </a:lnSpc>
@@ -6100,9 +5971,9 @@
                 <a:solidFill>
                   <a:srgbClr val="3A3A3A"/>
                 </a:solidFill>
-                <a:latin typeface="Open Sans" pitchFamily="34" charset="0"/>
-                <a:ea typeface="Open Sans" pitchFamily="34" charset="-122"/>
-                <a:cs typeface="Open Sans" pitchFamily="34" charset="-120"/>
+                <a:latin typeface="Open Sans ExtraBold" pitchFamily="34" charset="0"/>
+                <a:ea typeface="Open Sans ExtraBold" pitchFamily="34" charset="-122"/>
+                <a:cs typeface="Open Sans ExtraBold" pitchFamily="34" charset="-120"/>
               </a:rPr>
               <a:t>About a third are unemployed searchers; the disabled and retired are ~3% of entrants.</a:t>
             </a:r>
@@ -6112,14 +5983,14 @@
       </p:sp>
       <p:pic>
         <p:nvPicPr>
-          <p:cNvPr id="5" name="Image 0" descr="/Users/benjamin/Documents/GitHub/eig-wagesubsidy-policy-sim/output/figures/slides/fig07b_entrants_by_status.png">    </p:cNvPr>
+          <p:cNvPr id="5" name="Image 0" descr="/Users/benjamin/Documents/GitHub/eig-wagesubsidy-policy-sim/output/figures/slides/fig07b_entrants_by_status.png"/>
           <p:cNvPicPr>
             <a:picLocks noChangeAspect="1"/>
           </p:cNvPicPr>
           <p:nvPr/>
         </p:nvPicPr>
         <p:blipFill>
-          <a:blip r:embed="rId1"/>
+          <a:blip r:embed="rId3"/>
           <a:stretch>
             <a:fillRect/>
           </a:stretch>
@@ -6155,7 +6026,7 @@
           <a:bodyPr wrap="square" lIns="0" tIns="0" rIns="0" bIns="0" rtlCol="0" anchor="ctr"/>
           <a:lstStyle/>
           <a:p>
-            <a:pPr indent="0" marL="0">
+            <a:pPr marL="0" indent="0">
               <a:buNone/>
             </a:pPr>
             <a:r>
@@ -6163,9 +6034,9 @@
                 <a:solidFill>
                   <a:srgbClr val="8A8A8A"/>
                 </a:solidFill>
-                <a:latin typeface="Open Sans" pitchFamily="34" charset="0"/>
-                <a:ea typeface="Open Sans" pitchFamily="34" charset="-122"/>
-                <a:cs typeface="Open Sans" pitchFamily="34" charset="-120"/>
+                <a:latin typeface="Open Sans Light" pitchFamily="34" charset="0"/>
+                <a:ea typeface="Open Sans Light" pitchFamily="34" charset="-122"/>
+                <a:cs typeface="Open Sans Light" pitchFamily="34" charset="-120"/>
               </a:rPr>
               <a:t>Source: Economic Innovation Group 80-80 wage subsidy simulation, 2026.</a:t>
             </a:r>
@@ -6189,6 +6060,7 @@
         <a:solidFill>
           <a:srgbClr val="FFFFFF"/>
         </a:solidFill>
+        <a:effectLst/>
       </p:bgPr>
     </p:bg>
     <p:spTree>
@@ -6226,17 +6098,17 @@
           <a:bodyPr wrap="square" lIns="0" tIns="0" rIns="0" bIns="0" rtlCol="0" anchor="ctr"/>
           <a:lstStyle/>
           <a:p>
-            <a:pPr algn="l" indent="0" marL="0">
+            <a:pPr marL="0" indent="0" algn="l">
               <a:buNone/>
             </a:pPr>
             <a:r>
-              <a:rPr lang="en-US" sz="1100" b="1" spc="200" kern="0" dirty="0">
+              <a:rPr lang="en-US" sz="1100" b="1" kern="0" spc="200" dirty="0">
                 <a:solidFill>
                   <a:srgbClr val="19644D"/>
                 </a:solidFill>
-                <a:latin typeface="Open Sans" pitchFamily="34" charset="0"/>
-                <a:ea typeface="Open Sans" pitchFamily="34" charset="-122"/>
-                <a:cs typeface="Open Sans" pitchFamily="34" charset="-120"/>
+                <a:latin typeface="Open Sans ExtraBold" pitchFamily="34" charset="0"/>
+                <a:ea typeface="Open Sans ExtraBold" pitchFamily="34" charset="-122"/>
+                <a:cs typeface="Open Sans ExtraBold" pitchFamily="34" charset="-120"/>
               </a:rPr>
               <a:t>DOES IT PULL PEOPLE INTO WORK?</a:t>
             </a:r>
@@ -6265,7 +6137,7 @@
           <a:bodyPr wrap="square" lIns="0" tIns="0" rIns="0" bIns="0" rtlCol="0" anchor="t"/>
           <a:lstStyle/>
           <a:p>
-            <a:pPr algn="l" indent="0" marL="0">
+            <a:pPr marL="0" indent="0" algn="l">
               <a:lnSpc>
                 <a:spcPct val="98000"/>
               </a:lnSpc>
@@ -6307,7 +6179,7 @@
           <a:bodyPr wrap="square" lIns="0" tIns="0" rIns="0" bIns="0" rtlCol="0" anchor="t"/>
           <a:lstStyle/>
           <a:p>
-            <a:pPr indent="0" marL="0">
+            <a:pPr marL="0" indent="0">
               <a:lnSpc>
                 <a:spcPct val="100000"/>
               </a:lnSpc>
@@ -6318,9 +6190,9 @@
                 <a:solidFill>
                   <a:srgbClr val="3A3A3A"/>
                 </a:solidFill>
-                <a:latin typeface="Open Sans" pitchFamily="34" charset="0"/>
-                <a:ea typeface="Open Sans" pitchFamily="34" charset="-122"/>
-                <a:cs typeface="Open Sans" pitchFamily="34" charset="-120"/>
+                <a:latin typeface="Open Sans ExtraBold" pitchFamily="34" charset="0"/>
+                <a:ea typeface="Open Sans ExtraBold" pitchFamily="34" charset="-122"/>
+                <a:cs typeface="Open Sans ExtraBold" pitchFamily="34" charset="-120"/>
               </a:rPr>
               <a:t>47.8% of the pool draws offers below $16.80, vs. 21.7% of paid-hourly workers.</a:t>
             </a:r>
@@ -6330,14 +6202,14 @@
       </p:sp>
       <p:pic>
         <p:nvPicPr>
-          <p:cNvPr id="5" name="Image 0" descr="/Users/benjamin/Documents/GitHub/eig-wagesubsidy-policy-sim/output/figures/slides/fig08_pool_wage_distribution.png">    </p:cNvPr>
+          <p:cNvPr id="5" name="Image 0" descr="/Users/benjamin/Documents/GitHub/eig-wagesubsidy-policy-sim/output/figures/slides/fig08_pool_wage_distribution.png"/>
           <p:cNvPicPr>
             <a:picLocks noChangeAspect="1"/>
           </p:cNvPicPr>
           <p:nvPr/>
         </p:nvPicPr>
         <p:blipFill>
-          <a:blip r:embed="rId1"/>
+          <a:blip r:embed="rId3"/>
           <a:stretch>
             <a:fillRect/>
           </a:stretch>
@@ -6373,7 +6245,7 @@
           <a:bodyPr wrap="square" lIns="0" tIns="0" rIns="0" bIns="0" rtlCol="0" anchor="ctr"/>
           <a:lstStyle/>
           <a:p>
-            <a:pPr indent="0" marL="0">
+            <a:pPr marL="0" indent="0">
               <a:buNone/>
             </a:pPr>
             <a:r>
@@ -6381,9 +6253,9 @@
                 <a:solidFill>
                   <a:srgbClr val="8A8A8A"/>
                 </a:solidFill>
-                <a:latin typeface="Open Sans" pitchFamily="34" charset="0"/>
-                <a:ea typeface="Open Sans" pitchFamily="34" charset="-122"/>
-                <a:cs typeface="Open Sans" pitchFamily="34" charset="-120"/>
+                <a:latin typeface="Open Sans Light" pitchFamily="34" charset="0"/>
+                <a:ea typeface="Open Sans Light" pitchFamily="34" charset="-122"/>
+                <a:cs typeface="Open Sans Light" pitchFamily="34" charset="-120"/>
               </a:rPr>
               <a:t>Source: Economic Innovation Group 80-80 wage subsidy simulation, 2026.</a:t>
             </a:r>
@@ -6407,6 +6279,7 @@
         <a:solidFill>
           <a:srgbClr val="FFFFFF"/>
         </a:solidFill>
+        <a:effectLst/>
       </p:bgPr>
     </p:bg>
     <p:spTree>
@@ -6444,17 +6317,17 @@
           <a:bodyPr wrap="square" lIns="0" tIns="0" rIns="0" bIns="0" rtlCol="0" anchor="ctr"/>
           <a:lstStyle/>
           <a:p>
-            <a:pPr algn="l" indent="0" marL="0">
+            <a:pPr marL="0" indent="0" algn="l">
               <a:buNone/>
             </a:pPr>
             <a:r>
-              <a:rPr lang="en-US" sz="1100" b="1" spc="200" kern="0" dirty="0">
+              <a:rPr lang="en-US" sz="1100" b="1" kern="0" spc="200" dirty="0">
                 <a:solidFill>
                   <a:srgbClr val="19644D"/>
                 </a:solidFill>
-                <a:latin typeface="Open Sans" pitchFamily="34" charset="0"/>
-                <a:ea typeface="Open Sans" pitchFamily="34" charset="-122"/>
-                <a:cs typeface="Open Sans" pitchFamily="34" charset="-120"/>
+                <a:latin typeface="Open Sans ExtraBold" pitchFamily="34" charset="0"/>
+                <a:ea typeface="Open Sans ExtraBold" pitchFamily="34" charset="-122"/>
+                <a:cs typeface="Open Sans ExtraBold" pitchFamily="34" charset="-120"/>
               </a:rPr>
               <a:t>DOES IT PULL PEOPLE INTO WORK?</a:t>
             </a:r>
@@ -6483,7 +6356,7 @@
           <a:bodyPr wrap="square" lIns="0" tIns="0" rIns="0" bIns="0" rtlCol="0" anchor="t"/>
           <a:lstStyle/>
           <a:p>
-            <a:pPr algn="l" indent="0" marL="0">
+            <a:pPr marL="0" indent="0" algn="l">
               <a:lnSpc>
                 <a:spcPct val="98000"/>
               </a:lnSpc>
@@ -6525,7 +6398,7 @@
           <a:bodyPr wrap="square" lIns="0" tIns="0" rIns="0" bIns="0" rtlCol="0" anchor="ctr"/>
           <a:lstStyle/>
           <a:p>
-            <a:pPr indent="0" marL="0">
+            <a:pPr marL="0" indent="0">
               <a:buNone/>
             </a:pPr>
             <a:r>
@@ -6564,7 +6437,7 @@
           <a:bodyPr wrap="square" lIns="0" tIns="0" rIns="0" bIns="0" rtlCol="0" anchor="t"/>
           <a:lstStyle/>
           <a:p>
-            <a:pPr indent="0" marL="0">
+            <a:pPr marL="0" indent="0">
               <a:lnSpc>
                 <a:spcPct val="105000"/>
               </a:lnSpc>
@@ -6575,9 +6448,9 @@
                 <a:solidFill>
                   <a:srgbClr val="3A3A3A"/>
                 </a:solidFill>
-                <a:latin typeface="Open Sans" pitchFamily="34" charset="0"/>
-                <a:ea typeface="Open Sans" pitchFamily="34" charset="-122"/>
-                <a:cs typeface="Open Sans" pitchFamily="34" charset="-120"/>
+                <a:latin typeface="Open Sans Light" pitchFamily="34" charset="0"/>
+                <a:ea typeface="Open Sans Light" pitchFamily="34" charset="-122"/>
+                <a:cs typeface="Open Sans Light" pitchFamily="34" charset="-120"/>
               </a:rPr>
               <a:t>male entrants at the evidence-central estimate — about 120K at the conservative floor, up to ~800K in the high scenario</a:t>
             </a:r>
@@ -6606,7 +6479,7 @@
           <a:bodyPr wrap="square" lIns="0" tIns="0" rIns="0" bIns="0" rtlCol="0" anchor="t"/>
           <a:lstStyle/>
           <a:p>
-            <a:pPr indent="0" marL="0">
+            <a:pPr marL="0" indent="0">
               <a:lnSpc>
                 <a:spcPct val="106000"/>
               </a:lnSpc>
@@ -6620,16 +6493,16 @@
                 <a:solidFill>
                   <a:srgbClr val="3A3A3A"/>
                 </a:solidFill>
-                <a:latin typeface="Open Sans" pitchFamily="34" charset="0"/>
-                <a:ea typeface="Open Sans" pitchFamily="34" charset="-122"/>
-                <a:cs typeface="Open Sans" pitchFamily="34" charset="-120"/>
+                <a:latin typeface="Open Sans Light" pitchFamily="34" charset="0"/>
+                <a:ea typeface="Open Sans Light" pitchFamily="34" charset="-122"/>
+                <a:cs typeface="Open Sans Light" pitchFamily="34" charset="-120"/>
               </a:rPr>
               <a:t>Roughly half of prime-age men out of the labor force report a serious health condition, and a quarter to a third receive disability benefits — barriers a higher wage does not remove.</a:t>
             </a:r>
             <a:endParaRPr lang="en-US" sz="1500" dirty="0"/>
           </a:p>
           <a:p>
-            <a:pPr indent="0" marL="0">
+            <a:pPr marL="0" indent="0">
               <a:lnSpc>
                 <a:spcPct val="106000"/>
               </a:lnSpc>
@@ -6640,9 +6513,9 @@
                 <a:solidFill>
                   <a:srgbClr val="3A3A3A"/>
                 </a:solidFill>
-                <a:latin typeface="Open Sans" pitchFamily="34" charset="0"/>
-                <a:ea typeface="Open Sans" pitchFamily="34" charset="-122"/>
-                <a:cs typeface="Open Sans" pitchFamily="34" charset="-120"/>
+                <a:latin typeface="Open Sans Light" pitchFamily="34" charset="0"/>
+                <a:ea typeface="Open Sans Light" pitchFamily="34" charset="-122"/>
+                <a:cs typeface="Open Sans Light" pitchFamily="34" charset="-120"/>
               </a:rPr>
               <a:t>The subsidy reaches the men a wage can move — disproportionately unemployed job-seekers and the most disadvantaged. The broader prime-age male non-employment crisis, much of it rooted in health and demand-side exclusion, needs complementary tools. We would rather report that straight than oversell the policy.</a:t>
             </a:r>
@@ -6671,7 +6544,7 @@
           <a:bodyPr wrap="square" lIns="0" tIns="0" rIns="0" bIns="0" rtlCol="0" anchor="ctr"/>
           <a:lstStyle/>
           <a:p>
-            <a:pPr indent="0" marL="0">
+            <a:pPr marL="0" indent="0">
               <a:buNone/>
             </a:pPr>
             <a:r>
@@ -6679,9 +6552,9 @@
                 <a:solidFill>
                   <a:srgbClr val="8A8A8A"/>
                 </a:solidFill>
-                <a:latin typeface="Open Sans" pitchFamily="34" charset="0"/>
-                <a:ea typeface="Open Sans" pitchFamily="34" charset="-122"/>
-                <a:cs typeface="Open Sans" pitchFamily="34" charset="-120"/>
+                <a:latin typeface="Open Sans Light" pitchFamily="34" charset="0"/>
+                <a:ea typeface="Open Sans Light" pitchFamily="34" charset="-122"/>
+                <a:cs typeface="Open Sans Light" pitchFamily="34" charset="-120"/>
               </a:rPr>
               <a:t>Source: Economic Innovation Group 80-80 wage subsidy simulation, 2026.</a:t>
             </a:r>
@@ -6705,6 +6578,7 @@
         <a:solidFill>
           <a:srgbClr val="024140"/>
         </a:solidFill>
+        <a:effectLst/>
       </p:bgPr>
     </p:bg>
     <p:spTree>
@@ -6742,7 +6616,7 @@
           <a:bodyPr wrap="square" lIns="0" tIns="0" rIns="0" bIns="0" rtlCol="0" anchor="t"/>
           <a:lstStyle/>
           <a:p>
-            <a:pPr algn="l" indent="0" marL="0">
+            <a:pPr marL="0" indent="0" algn="l">
               <a:buNone/>
             </a:pPr>
             <a:r>
@@ -6781,7 +6655,7 @@
           <a:bodyPr wrap="square" lIns="0" tIns="0" rIns="0" bIns="0" rtlCol="0" anchor="t"/>
           <a:lstStyle/>
           <a:p>
-            <a:pPr algn="l" indent="0" marL="0">
+            <a:pPr marL="0" indent="0" algn="l">
               <a:lnSpc>
                 <a:spcPct val="100000"/>
               </a:lnSpc>
@@ -6823,7 +6697,7 @@
           <a:bodyPr wrap="square" lIns="0" tIns="0" rIns="0" bIns="0" rtlCol="0" anchor="t"/>
           <a:lstStyle/>
           <a:p>
-            <a:pPr algn="l" indent="0" marL="0">
+            <a:pPr marL="0" indent="0" algn="l">
               <a:buNone/>
             </a:pPr>
             <a:r>
@@ -6831,9 +6705,9 @@
                 <a:solidFill>
                   <a:srgbClr val="B3D6DD"/>
                 </a:solidFill>
-                <a:latin typeface="Open Sans" pitchFamily="34" charset="0"/>
-                <a:ea typeface="Open Sans" pitchFamily="34" charset="-122"/>
-                <a:cs typeface="Open Sans" pitchFamily="34" charset="-120"/>
+                <a:latin typeface="Open Sans Light" pitchFamily="34" charset="0"/>
+                <a:ea typeface="Open Sans Light" pitchFamily="34" charset="-122"/>
+                <a:cs typeface="Open Sans Light" pitchFamily="34" charset="-120"/>
               </a:rPr>
               <a:t>Employers keep almost none of it — and each new job costs a fraction of the alternatives we already fund.</a:t>
             </a:r>
@@ -6857,6 +6731,7 @@
         <a:solidFill>
           <a:srgbClr val="FFFFFF"/>
         </a:solidFill>
+        <a:effectLst/>
       </p:bgPr>
     </p:bg>
     <p:spTree>
@@ -6894,17 +6769,17 @@
           <a:bodyPr wrap="square" lIns="0" tIns="0" rIns="0" bIns="0" rtlCol="0" anchor="ctr"/>
           <a:lstStyle/>
           <a:p>
-            <a:pPr algn="l" indent="0" marL="0">
+            <a:pPr marL="0" indent="0" algn="l">
               <a:buNone/>
             </a:pPr>
             <a:r>
-              <a:rPr lang="en-US" sz="1100" b="1" spc="200" kern="0" dirty="0">
+              <a:rPr lang="en-US" sz="1100" b="1" kern="0" spc="200" dirty="0">
                 <a:solidFill>
                   <a:srgbClr val="19644D"/>
                 </a:solidFill>
-                <a:latin typeface="Open Sans" pitchFamily="34" charset="0"/>
-                <a:ea typeface="Open Sans" pitchFamily="34" charset="-122"/>
-                <a:cs typeface="Open Sans" pitchFamily="34" charset="-120"/>
+                <a:latin typeface="Open Sans ExtraBold" pitchFamily="34" charset="0"/>
+                <a:ea typeface="Open Sans ExtraBold" pitchFamily="34" charset="-122"/>
+                <a:cs typeface="Open Sans ExtraBold" pitchFamily="34" charset="-120"/>
               </a:rPr>
               <a:t>WHY IT MATTERS</a:t>
             </a:r>
@@ -6933,7 +6808,7 @@
           <a:bodyPr wrap="square" lIns="0" tIns="0" rIns="0" bIns="0" rtlCol="0" anchor="t"/>
           <a:lstStyle/>
           <a:p>
-            <a:pPr algn="l" indent="0" marL="0">
+            <a:pPr marL="0" indent="0" algn="l">
               <a:lnSpc>
                 <a:spcPct val="98000"/>
               </a:lnSpc>
@@ -6948,38 +6823,18 @@
                 <a:ea typeface="Source Serif Pro" pitchFamily="34" charset="-122"/>
                 <a:cs typeface="Source Serif Pro" pitchFamily="34" charset="-120"/>
               </a:rPr>
-              <a:t>One policy, three results: a raise, a modest bill, and more work.</a:t>
-            </a:r>
-            <a:endParaRPr lang="en-US" sz="2400" dirty="0"/>
-          </a:p>
-        </p:txBody>
-      </p:sp>
-      <p:sp>
-        <p:nvSpPr>
-          <p:cNvPr id="4" name="Text 2"/>
-          <p:cNvSpPr/>
-          <p:nvPr/>
-        </p:nvSpPr>
-        <p:spPr>
-          <a:xfrm>
-            <a:off x="457200" y="1874520"/>
-            <a:ext cx="2529840" cy="868680"/>
-          </a:xfrm>
-          <a:prstGeom prst="rect">
-            <a:avLst/>
-          </a:prstGeom>
-          <a:noFill/>
-          <a:ln/>
-        </p:spPr>
-        <p:txBody>
-          <a:bodyPr wrap="square" lIns="0" tIns="0" rIns="0" bIns="0" rtlCol="0" anchor="ctr"/>
-          <a:lstStyle/>
-          <a:p>
-            <a:pPr algn="l" indent="0" marL="0">
+              <a:t>One policy, three results: </a:t>
+            </a:r>
+          </a:p>
+          <a:p>
+            <a:pPr marL="0" indent="0" algn="l">
+              <a:lnSpc>
+                <a:spcPct val="98000"/>
+              </a:lnSpc>
               <a:buNone/>
             </a:pPr>
             <a:r>
-              <a:rPr lang="en-US" sz="4000" b="1" dirty="0">
+              <a:rPr lang="en-US" sz="2400" b="1" dirty="0">
                 <a:solidFill>
                   <a:srgbClr val="024140"/>
                 </a:solidFill>
@@ -6987,6 +6842,45 @@
                 <a:ea typeface="Source Serif Pro" pitchFamily="34" charset="-122"/>
                 <a:cs typeface="Source Serif Pro" pitchFamily="34" charset="-120"/>
               </a:rPr>
+              <a:t>a raise, a work-linked support, and more work.</a:t>
+            </a:r>
+            <a:endParaRPr lang="en-US" sz="2400" dirty="0"/>
+          </a:p>
+        </p:txBody>
+      </p:sp>
+      <p:sp>
+        <p:nvSpPr>
+          <p:cNvPr id="4" name="Text 2"/>
+          <p:cNvSpPr/>
+          <p:nvPr/>
+        </p:nvSpPr>
+        <p:spPr>
+          <a:xfrm>
+            <a:off x="457200" y="1874520"/>
+            <a:ext cx="2529840" cy="868680"/>
+          </a:xfrm>
+          <a:prstGeom prst="rect">
+            <a:avLst/>
+          </a:prstGeom>
+          <a:noFill/>
+          <a:ln/>
+        </p:spPr>
+        <p:txBody>
+          <a:bodyPr wrap="square" lIns="0" tIns="0" rIns="0" bIns="0" rtlCol="0" anchor="ctr"/>
+          <a:lstStyle/>
+          <a:p>
+            <a:pPr marL="0" indent="0" algn="l">
+              <a:buNone/>
+            </a:pPr>
+            <a:r>
+              <a:rPr lang="en-US" sz="4000" b="1" dirty="0">
+                <a:solidFill>
+                  <a:srgbClr val="024140"/>
+                </a:solidFill>
+                <a:latin typeface="Source Serif Pro" pitchFamily="34" charset="0"/>
+                <a:ea typeface="Source Serif Pro" pitchFamily="34" charset="-122"/>
+                <a:cs typeface="Source Serif Pro" pitchFamily="34" charset="-120"/>
+              </a:rPr>
               <a:t>15.9M</a:t>
             </a:r>
             <a:endParaRPr lang="en-US" sz="4000" dirty="0"/>
@@ -7014,7 +6908,7 @@
           <a:bodyPr wrap="square" lIns="0" tIns="0" rIns="0" bIns="0" rtlCol="0" anchor="t"/>
           <a:lstStyle/>
           <a:p>
-            <a:pPr algn="l" indent="0" marL="0">
+            <a:pPr marL="0" indent="0" algn="l">
               <a:lnSpc>
                 <a:spcPct val="105000"/>
               </a:lnSpc>
@@ -7025,13 +6919,17 @@
                 <a:solidFill>
                   <a:srgbClr val="3A3A3A"/>
                 </a:solidFill>
-                <a:latin typeface="Open Sans" pitchFamily="34" charset="0"/>
-                <a:ea typeface="Open Sans" pitchFamily="34" charset="-122"/>
-                <a:cs typeface="Open Sans" pitchFamily="34" charset="-120"/>
+                <a:latin typeface="Open Sans Light" pitchFamily="2" charset="0"/>
+                <a:ea typeface="Open Sans Light" pitchFamily="2" charset="0"/>
+                <a:cs typeface="Open Sans Light" pitchFamily="2" charset="0"/>
               </a:rPr>
               <a:t>workers get a per-paycheck raise — about one in ten American workers</a:t>
             </a:r>
-            <a:endParaRPr lang="en-US" sz="1500" dirty="0"/>
+            <a:endParaRPr lang="en-US" sz="1500" dirty="0">
+              <a:latin typeface="Open Sans Light" pitchFamily="2" charset="0"/>
+              <a:ea typeface="Open Sans Light" pitchFamily="2" charset="0"/>
+              <a:cs typeface="Open Sans Light" pitchFamily="2" charset="0"/>
+            </a:endParaRPr>
           </a:p>
         </p:txBody>
       </p:sp>
@@ -7056,7 +6954,7 @@
           <a:bodyPr wrap="square" lIns="0" tIns="0" rIns="0" bIns="0" rtlCol="0" anchor="ctr"/>
           <a:lstStyle/>
           <a:p>
-            <a:pPr algn="l" indent="0" marL="0">
+            <a:pPr marL="0" indent="0" algn="l">
               <a:buNone/>
             </a:pPr>
             <a:r>
@@ -7095,7 +6993,7 @@
           <a:bodyPr wrap="square" lIns="0" tIns="0" rIns="0" bIns="0" rtlCol="0" anchor="t"/>
           <a:lstStyle/>
           <a:p>
-            <a:pPr algn="l" indent="0" marL="0">
+            <a:pPr marL="0" indent="0" algn="l">
               <a:lnSpc>
                 <a:spcPct val="105000"/>
               </a:lnSpc>
@@ -7106,11 +7004,11 @@
                 <a:solidFill>
                   <a:srgbClr val="3A3A3A"/>
                 </a:solidFill>
-                <a:latin typeface="Open Sans" pitchFamily="34" charset="0"/>
-                <a:ea typeface="Open Sans" pitchFamily="34" charset="-122"/>
-                <a:cs typeface="Open Sans" pitchFamily="34" charset="-120"/>
-              </a:rPr>
-              <a:t>net federal cost per year, stable across every modeling approach</a:t>
+                <a:latin typeface="Open Sans Light" pitchFamily="34" charset="0"/>
+                <a:ea typeface="Open Sans Light" pitchFamily="34" charset="-122"/>
+                <a:cs typeface="Open Sans Light" pitchFamily="34" charset="-120"/>
+              </a:rPr>
+              <a:t>net federal cost per year</a:t>
             </a:r>
             <a:endParaRPr lang="en-US" sz="1500" dirty="0"/>
           </a:p>
@@ -7137,7 +7035,7 @@
           <a:bodyPr wrap="square" lIns="0" tIns="0" rIns="0" bIns="0" rtlCol="0" anchor="ctr"/>
           <a:lstStyle/>
           <a:p>
-            <a:pPr algn="l" indent="0" marL="0">
+            <a:pPr marL="0" indent="0" algn="l">
               <a:buNone/>
             </a:pPr>
             <a:r>
@@ -7176,7 +7074,7 @@
           <a:bodyPr wrap="square" lIns="0" tIns="0" rIns="0" bIns="0" rtlCol="0" anchor="t"/>
           <a:lstStyle/>
           <a:p>
-            <a:pPr algn="l" indent="0" marL="0">
+            <a:pPr marL="0" indent="0" algn="l">
               <a:lnSpc>
                 <a:spcPct val="105000"/>
               </a:lnSpc>
@@ -7187,9 +7085,9 @@
                 <a:solidFill>
                   <a:srgbClr val="3A3A3A"/>
                 </a:solidFill>
-                <a:latin typeface="Open Sans" pitchFamily="34" charset="0"/>
-                <a:ea typeface="Open Sans" pitchFamily="34" charset="-122"/>
-                <a:cs typeface="Open Sans" pitchFamily="34" charset="-120"/>
+                <a:latin typeface="Open Sans Light" pitchFamily="34" charset="0"/>
+                <a:ea typeface="Open Sans Light" pitchFamily="34" charset="-122"/>
+                <a:cs typeface="Open Sans Light" pitchFamily="34" charset="-120"/>
               </a:rPr>
               <a:t>non-workers drawn into jobs (floor ~1.0M), plus ~200K FTE of added hours</a:t>
             </a:r>
@@ -7218,7 +7116,7 @@
           <a:bodyPr wrap="square" lIns="0" tIns="0" rIns="0" bIns="0" rtlCol="0" anchor="ctr"/>
           <a:lstStyle/>
           <a:p>
-            <a:pPr indent="0" marL="0">
+            <a:pPr marL="0" indent="0">
               <a:buNone/>
             </a:pPr>
             <a:r>
@@ -7226,9 +7124,9 @@
                 <a:solidFill>
                   <a:srgbClr val="8A8A8A"/>
                 </a:solidFill>
-                <a:latin typeface="Open Sans" pitchFamily="34" charset="0"/>
-                <a:ea typeface="Open Sans" pitchFamily="34" charset="-122"/>
-                <a:cs typeface="Open Sans" pitchFamily="34" charset="-120"/>
+                <a:latin typeface="Open Sans Light" pitchFamily="34" charset="0"/>
+                <a:ea typeface="Open Sans Light" pitchFamily="34" charset="-122"/>
+                <a:cs typeface="Open Sans Light" pitchFamily="34" charset="-120"/>
               </a:rPr>
               <a:t>Source: Economic Innovation Group 80-80 wage subsidy simulation, 2026.</a:t>
             </a:r>
@@ -7252,6 +7150,7 @@
         <a:solidFill>
           <a:srgbClr val="FFFFFF"/>
         </a:solidFill>
+        <a:effectLst/>
       </p:bgPr>
     </p:bg>
     <p:spTree>
@@ -7289,17 +7188,17 @@
           <a:bodyPr wrap="square" lIns="0" tIns="0" rIns="0" bIns="0" rtlCol="0" anchor="ctr"/>
           <a:lstStyle/>
           <a:p>
-            <a:pPr algn="l" indent="0" marL="0">
+            <a:pPr marL="0" indent="0" algn="l">
               <a:buNone/>
             </a:pPr>
             <a:r>
-              <a:rPr lang="en-US" sz="1100" b="1" spc="200" kern="0" dirty="0">
+              <a:rPr lang="en-US" sz="1100" b="1" kern="0" spc="200" dirty="0">
                 <a:solidFill>
                   <a:srgbClr val="19644D"/>
                 </a:solidFill>
-                <a:latin typeface="Open Sans" pitchFamily="34" charset="0"/>
-                <a:ea typeface="Open Sans" pitchFamily="34" charset="-122"/>
-                <a:cs typeface="Open Sans" pitchFamily="34" charset="-120"/>
+                <a:latin typeface="Open Sans ExtraBold" pitchFamily="34" charset="0"/>
+                <a:ea typeface="Open Sans ExtraBold" pitchFamily="34" charset="-122"/>
+                <a:cs typeface="Open Sans ExtraBold" pitchFamily="34" charset="-120"/>
               </a:rPr>
               <a:t>IS IT WORTH IT?</a:t>
             </a:r>
@@ -7328,7 +7227,7 @@
           <a:bodyPr wrap="square" lIns="0" tIns="0" rIns="0" bIns="0" rtlCol="0" anchor="t"/>
           <a:lstStyle/>
           <a:p>
-            <a:pPr algn="l" indent="0" marL="0">
+            <a:pPr marL="0" indent="0" algn="l">
               <a:lnSpc>
                 <a:spcPct val="98000"/>
               </a:lnSpc>
@@ -7370,7 +7269,7 @@
           <a:bodyPr wrap="square" lIns="0" tIns="0" rIns="0" bIns="0" rtlCol="0" anchor="t"/>
           <a:lstStyle/>
           <a:p>
-            <a:pPr indent="0" marL="0">
+            <a:pPr marL="0" indent="0">
               <a:lnSpc>
                 <a:spcPct val="100000"/>
               </a:lnSpc>
@@ -7381,9 +7280,9 @@
                 <a:solidFill>
                   <a:srgbClr val="3A3A3A"/>
                 </a:solidFill>
-                <a:latin typeface="Open Sans" pitchFamily="34" charset="0"/>
-                <a:ea typeface="Open Sans" pitchFamily="34" charset="-122"/>
-                <a:cs typeface="Open Sans" pitchFamily="34" charset="-120"/>
+                <a:latin typeface="Open Sans ExtraBold" pitchFamily="34" charset="0"/>
+                <a:ea typeface="Open Sans ExtraBold" pitchFamily="34" charset="-122"/>
+                <a:cs typeface="Open Sans ExtraBold" pitchFamily="34" charset="-120"/>
               </a:rPr>
               <a:t>No more than ~4% across bargaining assumptions; the $7.25 floor caps how far wages can fall.</a:t>
             </a:r>
@@ -7393,14 +7292,14 @@
       </p:sp>
       <p:pic>
         <p:nvPicPr>
-          <p:cNvPr id="5" name="Image 0" descr="/Users/benjamin/Documents/GitHub/eig-wagesubsidy-policy-sim/output/figures/slides/fig09_firm_capture.png">    </p:cNvPr>
+          <p:cNvPr id="5" name="Image 0" descr="/Users/benjamin/Documents/GitHub/eig-wagesubsidy-policy-sim/output/figures/slides/fig09_firm_capture.png"/>
           <p:cNvPicPr>
             <a:picLocks noChangeAspect="1"/>
           </p:cNvPicPr>
           <p:nvPr/>
         </p:nvPicPr>
         <p:blipFill>
-          <a:blip r:embed="rId1"/>
+          <a:blip r:embed="rId3"/>
           <a:stretch>
             <a:fillRect/>
           </a:stretch>
@@ -7436,7 +7335,7 @@
           <a:bodyPr wrap="square" lIns="0" tIns="0" rIns="0" bIns="0" rtlCol="0" anchor="ctr"/>
           <a:lstStyle/>
           <a:p>
-            <a:pPr indent="0" marL="0">
+            <a:pPr marL="0" indent="0">
               <a:buNone/>
             </a:pPr>
             <a:r>
@@ -7444,9 +7343,9 @@
                 <a:solidFill>
                   <a:srgbClr val="8A8A8A"/>
                 </a:solidFill>
-                <a:latin typeface="Open Sans" pitchFamily="34" charset="0"/>
-                <a:ea typeface="Open Sans" pitchFamily="34" charset="-122"/>
-                <a:cs typeface="Open Sans" pitchFamily="34" charset="-120"/>
+                <a:latin typeface="Open Sans Light" pitchFamily="34" charset="0"/>
+                <a:ea typeface="Open Sans Light" pitchFamily="34" charset="-122"/>
+                <a:cs typeface="Open Sans Light" pitchFamily="34" charset="-120"/>
               </a:rPr>
               <a:t>Source: Economic Innovation Group 80-80 wage subsidy simulation, 2026.</a:t>
             </a:r>
@@ -7470,6 +7369,7 @@
         <a:solidFill>
           <a:srgbClr val="FFFFFF"/>
         </a:solidFill>
+        <a:effectLst/>
       </p:bgPr>
     </p:bg>
     <p:spTree>
@@ -7507,17 +7407,17 @@
           <a:bodyPr wrap="square" lIns="0" tIns="0" rIns="0" bIns="0" rtlCol="0" anchor="ctr"/>
           <a:lstStyle/>
           <a:p>
-            <a:pPr algn="l" indent="0" marL="0">
+            <a:pPr marL="0" indent="0" algn="l">
               <a:buNone/>
             </a:pPr>
             <a:r>
-              <a:rPr lang="en-US" sz="1100" b="1" spc="200" kern="0" dirty="0">
+              <a:rPr lang="en-US" sz="1100" b="1" kern="0" spc="200" dirty="0">
                 <a:solidFill>
                   <a:srgbClr val="19644D"/>
                 </a:solidFill>
-                <a:latin typeface="Open Sans" pitchFamily="34" charset="0"/>
-                <a:ea typeface="Open Sans" pitchFamily="34" charset="-122"/>
-                <a:cs typeface="Open Sans" pitchFamily="34" charset="-120"/>
+                <a:latin typeface="Open Sans ExtraBold" pitchFamily="34" charset="0"/>
+                <a:ea typeface="Open Sans ExtraBold" pitchFamily="34" charset="-122"/>
+                <a:cs typeface="Open Sans ExtraBold" pitchFamily="34" charset="-120"/>
               </a:rPr>
               <a:t>IS IT WORTH IT?</a:t>
             </a:r>
@@ -7546,7 +7446,7 @@
           <a:bodyPr wrap="square" lIns="0" tIns="0" rIns="0" bIns="0" rtlCol="0" anchor="t"/>
           <a:lstStyle/>
           <a:p>
-            <a:pPr algn="l" indent="0" marL="0">
+            <a:pPr marL="0" indent="0" algn="l">
               <a:lnSpc>
                 <a:spcPct val="98000"/>
               </a:lnSpc>
@@ -7588,7 +7488,7 @@
           <a:bodyPr wrap="square" lIns="0" tIns="0" rIns="0" bIns="0" rtlCol="0" anchor="t"/>
           <a:lstStyle/>
           <a:p>
-            <a:pPr indent="0" marL="0">
+            <a:pPr marL="0" indent="0">
               <a:lnSpc>
                 <a:spcPct val="100000"/>
               </a:lnSpc>
@@ -7599,9 +7499,9 @@
                 <a:solidFill>
                   <a:srgbClr val="3A3A3A"/>
                 </a:solidFill>
-                <a:latin typeface="Open Sans" pitchFamily="34" charset="0"/>
-                <a:ea typeface="Open Sans" pitchFamily="34" charset="-122"/>
-                <a:cs typeface="Open Sans" pitchFamily="34" charset="-120"/>
+                <a:latin typeface="Open Sans ExtraBold" pitchFamily="34" charset="0"/>
+                <a:ea typeface="Open Sans ExtraBold" pitchFamily="34" charset="-122"/>
+                <a:cs typeface="Open Sans ExtraBold" pitchFamily="34" charset="-120"/>
               </a:rPr>
               <a:t>~$5,300 marginal; ~$32K fully loaded vs. $154K+ Buy American and ~$900K steel tariffs.</a:t>
             </a:r>
@@ -7611,14 +7511,14 @@
       </p:sp>
       <p:pic>
         <p:nvPicPr>
-          <p:cNvPr id="5" name="Image 0" descr="/Users/benjamin/Documents/GitHub/eig-wagesubsidy-policy-sim/output/figures/slides/fig10_cost_per_job.png">    </p:cNvPr>
+          <p:cNvPr id="5" name="Image 0" descr="/Users/benjamin/Documents/GitHub/eig-wagesubsidy-policy-sim/output/figures/slides/fig10_cost_per_job.png"/>
           <p:cNvPicPr>
             <a:picLocks noChangeAspect="1"/>
           </p:cNvPicPr>
           <p:nvPr/>
         </p:nvPicPr>
         <p:blipFill>
-          <a:blip r:embed="rId1"/>
+          <a:blip r:embed="rId3"/>
           <a:stretch>
             <a:fillRect/>
           </a:stretch>
@@ -7654,7 +7554,7 @@
           <a:bodyPr wrap="square" lIns="0" tIns="0" rIns="0" bIns="0" rtlCol="0" anchor="ctr"/>
           <a:lstStyle/>
           <a:p>
-            <a:pPr indent="0" marL="0">
+            <a:pPr marL="0" indent="0">
               <a:buNone/>
             </a:pPr>
             <a:r>
@@ -7662,9 +7562,9 @@
                 <a:solidFill>
                   <a:srgbClr val="8A8A8A"/>
                 </a:solidFill>
-                <a:latin typeface="Open Sans" pitchFamily="34" charset="0"/>
-                <a:ea typeface="Open Sans" pitchFamily="34" charset="-122"/>
-                <a:cs typeface="Open Sans" pitchFamily="34" charset="-120"/>
+                <a:latin typeface="Open Sans Light" pitchFamily="34" charset="0"/>
+                <a:ea typeface="Open Sans Light" pitchFamily="34" charset="-122"/>
+                <a:cs typeface="Open Sans Light" pitchFamily="34" charset="-120"/>
               </a:rPr>
               <a:t>Source: Economic Innovation Group 80-80 wage subsidy simulation, 2026.</a:t>
             </a:r>
@@ -7688,6 +7588,7 @@
         <a:solidFill>
           <a:srgbClr val="024140"/>
         </a:solidFill>
+        <a:effectLst/>
       </p:bgPr>
     </p:bg>
     <p:spTree>
@@ -7725,7 +7626,7 @@
           <a:bodyPr wrap="square" lIns="0" tIns="0" rIns="0" bIns="0" rtlCol="0" anchor="t"/>
           <a:lstStyle/>
           <a:p>
-            <a:pPr algn="l" indent="0" marL="0">
+            <a:pPr marL="0" indent="0" algn="l">
               <a:buNone/>
             </a:pPr>
             <a:r>
@@ -7764,7 +7665,7 @@
           <a:bodyPr wrap="square" lIns="0" tIns="0" rIns="0" bIns="0" rtlCol="0" anchor="t"/>
           <a:lstStyle/>
           <a:p>
-            <a:pPr algn="l" indent="0" marL="0">
+            <a:pPr marL="0" indent="0" algn="l">
               <a:lnSpc>
                 <a:spcPct val="100000"/>
               </a:lnSpc>
@@ -7806,7 +7707,7 @@
           <a:bodyPr wrap="square" lIns="0" tIns="0" rIns="0" bIns="0" rtlCol="0" anchor="t"/>
           <a:lstStyle/>
           <a:p>
-            <a:pPr algn="l" indent="0" marL="0">
+            <a:pPr marL="0" indent="0" algn="l">
               <a:buNone/>
             </a:pPr>
             <a:r>
@@ -7814,9 +7715,9 @@
                 <a:solidFill>
                   <a:srgbClr val="B3D6DD"/>
                 </a:solidFill>
-                <a:latin typeface="Open Sans" pitchFamily="34" charset="0"/>
-                <a:ea typeface="Open Sans" pitchFamily="34" charset="-122"/>
-                <a:cs typeface="Open Sans" pitchFamily="34" charset="-120"/>
+                <a:latin typeface="Open Sans Light" pitchFamily="34" charset="0"/>
+                <a:ea typeface="Open Sans Light" pitchFamily="34" charset="-122"/>
+                <a:cs typeface="Open Sans Light" pitchFamily="34" charset="-120"/>
               </a:rPr>
               <a:t>The subsidy has no cliff of its own — but it inherits everyone else's.</a:t>
             </a:r>
@@ -7840,6 +7741,7 @@
         <a:solidFill>
           <a:srgbClr val="FFFFFF"/>
         </a:solidFill>
+        <a:effectLst/>
       </p:bgPr>
     </p:bg>
     <p:spTree>
@@ -7877,17 +7779,17 @@
           <a:bodyPr wrap="square" lIns="0" tIns="0" rIns="0" bIns="0" rtlCol="0" anchor="ctr"/>
           <a:lstStyle/>
           <a:p>
-            <a:pPr algn="l" indent="0" marL="0">
+            <a:pPr marL="0" indent="0" algn="l">
               <a:buNone/>
             </a:pPr>
             <a:r>
-              <a:rPr lang="en-US" sz="1100" b="1" spc="200" kern="0" dirty="0">
+              <a:rPr lang="en-US" sz="1100" b="1" kern="0" spc="200" dirty="0">
                 <a:solidFill>
                   <a:srgbClr val="19644D"/>
                 </a:solidFill>
-                <a:latin typeface="Open Sans" pitchFamily="34" charset="0"/>
-                <a:ea typeface="Open Sans" pitchFamily="34" charset="-122"/>
-                <a:cs typeface="Open Sans" pitchFamily="34" charset="-120"/>
+                <a:latin typeface="Open Sans ExtraBold" pitchFamily="34" charset="0"/>
+                <a:ea typeface="Open Sans ExtraBold" pitchFamily="34" charset="-122"/>
+                <a:cs typeface="Open Sans ExtraBold" pitchFamily="34" charset="-120"/>
               </a:rPr>
               <a:t>THE SAFETY-NET CLAWBACK</a:t>
             </a:r>
@@ -7916,7 +7818,7 @@
           <a:bodyPr wrap="square" lIns="0" tIns="0" rIns="0" bIns="0" rtlCol="0" anchor="t"/>
           <a:lstStyle/>
           <a:p>
-            <a:pPr algn="l" indent="0" marL="0">
+            <a:pPr marL="0" indent="0" algn="l">
               <a:lnSpc>
                 <a:spcPct val="98000"/>
               </a:lnSpc>
@@ -7958,7 +7860,7 @@
           <a:bodyPr wrap="square" lIns="0" tIns="0" rIns="0" bIns="0" rtlCol="0" anchor="t"/>
           <a:lstStyle/>
           <a:p>
-            <a:pPr indent="0" marL="0">
+            <a:pPr marL="0" indent="0">
               <a:lnSpc>
                 <a:spcPct val="100000"/>
               </a:lnSpc>
@@ -7969,9 +7871,9 @@
                 <a:solidFill>
                   <a:srgbClr val="3A3A3A"/>
                 </a:solidFill>
-                <a:latin typeface="Open Sans" pitchFamily="34" charset="0"/>
-                <a:ea typeface="Open Sans" pitchFamily="34" charset="-122"/>
-                <a:cs typeface="Open Sans" pitchFamily="34" charset="-120"/>
+                <a:latin typeface="Open Sans ExtraBold" pitchFamily="34" charset="0"/>
+                <a:ea typeface="Open Sans ExtraBold" pitchFamily="34" charset="-122"/>
+                <a:cs typeface="Open Sans ExtraBold" pitchFamily="34" charset="-120"/>
               </a:rPr>
               <a:t>Net income climbs with earnings, then drops where Medicaid and other benefits phase out.</a:t>
             </a:r>
@@ -7981,14 +7883,14 @@
       </p:sp>
       <p:pic>
         <p:nvPicPr>
-          <p:cNvPr id="5" name="Image 0" descr="/Users/benjamin/Documents/GitHub/eig-wagesubsidy-policy-sim/output/figures/slides/fig11_benefit_cliff.png">    </p:cNvPr>
+          <p:cNvPr id="5" name="Image 0" descr="/Users/benjamin/Documents/GitHub/eig-wagesubsidy-policy-sim/output/figures/slides/fig11_benefit_cliff.png"/>
           <p:cNvPicPr>
             <a:picLocks noChangeAspect="1"/>
           </p:cNvPicPr>
           <p:nvPr/>
         </p:nvPicPr>
         <p:blipFill>
-          <a:blip r:embed="rId1"/>
+          <a:blip r:embed="rId3"/>
           <a:stretch>
             <a:fillRect/>
           </a:stretch>
@@ -8024,7 +7926,7 @@
           <a:bodyPr wrap="square" lIns="0" tIns="0" rIns="0" bIns="0" rtlCol="0" anchor="ctr"/>
           <a:lstStyle/>
           <a:p>
-            <a:pPr indent="0" marL="0">
+            <a:pPr marL="0" indent="0">
               <a:buNone/>
             </a:pPr>
             <a:r>
@@ -8032,9 +7934,9 @@
                 <a:solidFill>
                   <a:srgbClr val="8A8A8A"/>
                 </a:solidFill>
-                <a:latin typeface="Open Sans" pitchFamily="34" charset="0"/>
-                <a:ea typeface="Open Sans" pitchFamily="34" charset="-122"/>
-                <a:cs typeface="Open Sans" pitchFamily="34" charset="-120"/>
+                <a:latin typeface="Open Sans Light" pitchFamily="34" charset="0"/>
+                <a:ea typeface="Open Sans Light" pitchFamily="34" charset="-122"/>
+                <a:cs typeface="Open Sans Light" pitchFamily="34" charset="-120"/>
               </a:rPr>
               <a:t>Source: Economic Innovation Group 80-80 wage subsidy simulation, 2026.</a:t>
             </a:r>
@@ -8058,6 +7960,7 @@
         <a:solidFill>
           <a:srgbClr val="FFFFFF"/>
         </a:solidFill>
+        <a:effectLst/>
       </p:bgPr>
     </p:bg>
     <p:spTree>
@@ -8095,17 +7998,17 @@
           <a:bodyPr wrap="square" lIns="0" tIns="0" rIns="0" bIns="0" rtlCol="0" anchor="ctr"/>
           <a:lstStyle/>
           <a:p>
-            <a:pPr algn="l" indent="0" marL="0">
+            <a:pPr marL="0" indent="0" algn="l">
               <a:buNone/>
             </a:pPr>
             <a:r>
-              <a:rPr lang="en-US" sz="1100" b="1" spc="200" kern="0" dirty="0">
+              <a:rPr lang="en-US" sz="1100" b="1" kern="0" spc="200" dirty="0">
                 <a:solidFill>
                   <a:srgbClr val="19644D"/>
                 </a:solidFill>
-                <a:latin typeface="Open Sans" pitchFamily="34" charset="0"/>
-                <a:ea typeface="Open Sans" pitchFamily="34" charset="-122"/>
-                <a:cs typeface="Open Sans" pitchFamily="34" charset="-120"/>
+                <a:latin typeface="Open Sans ExtraBold" pitchFamily="34" charset="0"/>
+                <a:ea typeface="Open Sans ExtraBold" pitchFamily="34" charset="-122"/>
+                <a:cs typeface="Open Sans ExtraBold" pitchFamily="34" charset="-120"/>
               </a:rPr>
               <a:t>THE SAFETY-NET CLAWBACK</a:t>
             </a:r>
@@ -8134,7 +8037,7 @@
           <a:bodyPr wrap="square" lIns="0" tIns="0" rIns="0" bIns="0" rtlCol="0" anchor="t"/>
           <a:lstStyle/>
           <a:p>
-            <a:pPr algn="l" indent="0" marL="0">
+            <a:pPr marL="0" indent="0" algn="l">
               <a:lnSpc>
                 <a:spcPct val="98000"/>
               </a:lnSpc>
@@ -8176,7 +8079,7 @@
           <a:bodyPr wrap="square" lIns="0" tIns="0" rIns="0" bIns="0" rtlCol="0" anchor="t"/>
           <a:lstStyle/>
           <a:p>
-            <a:pPr indent="0" marL="0">
+            <a:pPr marL="0" indent="0">
               <a:lnSpc>
                 <a:spcPct val="100000"/>
               </a:lnSpc>
@@ -8187,9 +8090,9 @@
                 <a:solidFill>
                   <a:srgbClr val="3A3A3A"/>
                 </a:solidFill>
-                <a:latin typeface="Open Sans" pitchFamily="34" charset="0"/>
-                <a:ea typeface="Open Sans" pitchFamily="34" charset="-122"/>
-                <a:cs typeface="Open Sans" pitchFamily="34" charset="-120"/>
+                <a:latin typeface="Open Sans ExtraBold" pitchFamily="34" charset="0"/>
+                <a:ea typeface="Open Sans ExtraBold" pitchFamily="34" charset="-122"/>
+                <a:cs typeface="Open Sans ExtraBold" pitchFamily="34" charset="-120"/>
               </a:rPr>
               <a:t>The subsidy adds ~$7,800 net at 20 hrs/wk and ~$5,600 at 40; it caps at 2,080 hours a year.</a:t>
             </a:r>
@@ -8199,14 +8102,14 @@
       </p:sp>
       <p:pic>
         <p:nvPicPr>
-          <p:cNvPr id="5" name="Image 0" descr="/Users/benjamin/Documents/GitHub/eig-wagesubsidy-policy-sim/output/figures/slides/fig11b_net_income_by_hours.png">    </p:cNvPr>
+          <p:cNvPr id="5" name="Image 0" descr="/Users/benjamin/Documents/GitHub/eig-wagesubsidy-policy-sim/output/figures/slides/fig11b_net_income_by_hours.png"/>
           <p:cNvPicPr>
             <a:picLocks noChangeAspect="1"/>
           </p:cNvPicPr>
           <p:nvPr/>
         </p:nvPicPr>
         <p:blipFill>
-          <a:blip r:embed="rId1"/>
+          <a:blip r:embed="rId3"/>
           <a:stretch>
             <a:fillRect/>
           </a:stretch>
@@ -8242,7 +8145,7 @@
           <a:bodyPr wrap="square" lIns="0" tIns="0" rIns="0" bIns="0" rtlCol="0" anchor="ctr"/>
           <a:lstStyle/>
           <a:p>
-            <a:pPr indent="0" marL="0">
+            <a:pPr marL="0" indent="0">
               <a:buNone/>
             </a:pPr>
             <a:r>
@@ -8250,9 +8153,9 @@
                 <a:solidFill>
                   <a:srgbClr val="8A8A8A"/>
                 </a:solidFill>
-                <a:latin typeface="Open Sans" pitchFamily="34" charset="0"/>
-                <a:ea typeface="Open Sans" pitchFamily="34" charset="-122"/>
-                <a:cs typeface="Open Sans" pitchFamily="34" charset="-120"/>
+                <a:latin typeface="Open Sans Light" pitchFamily="34" charset="0"/>
+                <a:ea typeface="Open Sans Light" pitchFamily="34" charset="-122"/>
+                <a:cs typeface="Open Sans Light" pitchFamily="34" charset="-120"/>
               </a:rPr>
               <a:t>Source: Economic Innovation Group 80-80 wage subsidy simulation, 2026.</a:t>
             </a:r>
@@ -8276,6 +8179,7 @@
         <a:solidFill>
           <a:srgbClr val="FFFFFF"/>
         </a:solidFill>
+        <a:effectLst/>
       </p:bgPr>
     </p:bg>
     <p:spTree>
@@ -8313,17 +8217,17 @@
           <a:bodyPr wrap="square" lIns="0" tIns="0" rIns="0" bIns="0" rtlCol="0" anchor="ctr"/>
           <a:lstStyle/>
           <a:p>
-            <a:pPr algn="l" indent="0" marL="0">
+            <a:pPr marL="0" indent="0" algn="l">
               <a:buNone/>
             </a:pPr>
             <a:r>
-              <a:rPr lang="en-US" sz="1100" b="1" spc="200" kern="0" dirty="0">
+              <a:rPr lang="en-US" sz="1100" b="1" kern="0" spc="200" dirty="0">
                 <a:solidFill>
                   <a:srgbClr val="19644D"/>
                 </a:solidFill>
-                <a:latin typeface="Open Sans" pitchFamily="34" charset="0"/>
-                <a:ea typeface="Open Sans" pitchFamily="34" charset="-122"/>
-                <a:cs typeface="Open Sans" pitchFamily="34" charset="-120"/>
+                <a:latin typeface="Open Sans ExtraBold" pitchFamily="34" charset="0"/>
+                <a:ea typeface="Open Sans ExtraBold" pitchFamily="34" charset="-122"/>
+                <a:cs typeface="Open Sans ExtraBold" pitchFamily="34" charset="-120"/>
               </a:rPr>
               <a:t>THE SAFETY-NET CLAWBACK</a:t>
             </a:r>
@@ -8352,7 +8256,7 @@
           <a:bodyPr wrap="square" lIns="0" tIns="0" rIns="0" bIns="0" rtlCol="0" anchor="t"/>
           <a:lstStyle/>
           <a:p>
-            <a:pPr algn="l" indent="0" marL="0">
+            <a:pPr marL="0" indent="0" algn="l">
               <a:lnSpc>
                 <a:spcPct val="98000"/>
               </a:lnSpc>
@@ -8394,7 +8298,7 @@
           <a:bodyPr wrap="square" lIns="0" tIns="0" rIns="0" bIns="0" rtlCol="0" anchor="t"/>
           <a:lstStyle/>
           <a:p>
-            <a:pPr indent="0" marL="0">
+            <a:pPr marL="0" indent="0">
               <a:lnSpc>
                 <a:spcPct val="100000"/>
               </a:lnSpc>
@@ -8405,9 +8309,9 @@
                 <a:solidFill>
                   <a:srgbClr val="3A3A3A"/>
                 </a:solidFill>
-                <a:latin typeface="Open Sans" pitchFamily="34" charset="0"/>
-                <a:ea typeface="Open Sans" pitchFamily="34" charset="-122"/>
-                <a:cs typeface="Open Sans" pitchFamily="34" charset="-120"/>
+                <a:latin typeface="Open Sans ExtraBold" pitchFamily="34" charset="0"/>
+                <a:ea typeface="Open Sans ExtraBold" pitchFamily="34" charset="-122"/>
+                <a:cs typeface="Open Sans ExtraBold" pitchFamily="34" charset="-120"/>
               </a:rPr>
               <a:t>Median net return to working rises ~18% for single mothers vs. ~27% and ~23% for others.</a:t>
             </a:r>
@@ -8417,14 +8321,14 @@
       </p:sp>
       <p:pic>
         <p:nvPicPr>
-          <p:cNvPr id="5" name="Image 0" descr="/Users/benjamin/Documents/GitHub/eig-wagesubsidy-policy-sim/output/figures/slides/fig12_clawback_net_gain.png">    </p:cNvPr>
+          <p:cNvPr id="5" name="Image 0" descr="/Users/benjamin/Documents/GitHub/eig-wagesubsidy-policy-sim/output/figures/slides/fig12_clawback_net_gain.png"/>
           <p:cNvPicPr>
             <a:picLocks noChangeAspect="1"/>
           </p:cNvPicPr>
           <p:nvPr/>
         </p:nvPicPr>
         <p:blipFill>
-          <a:blip r:embed="rId1"/>
+          <a:blip r:embed="rId3"/>
           <a:stretch>
             <a:fillRect/>
           </a:stretch>
@@ -8460,7 +8364,7 @@
           <a:bodyPr wrap="square" lIns="0" tIns="0" rIns="0" bIns="0" rtlCol="0" anchor="ctr"/>
           <a:lstStyle/>
           <a:p>
-            <a:pPr indent="0" marL="0">
+            <a:pPr marL="0" indent="0">
               <a:buNone/>
             </a:pPr>
             <a:r>
@@ -8468,9 +8372,9 @@
                 <a:solidFill>
                   <a:srgbClr val="8A8A8A"/>
                 </a:solidFill>
-                <a:latin typeface="Open Sans" pitchFamily="34" charset="0"/>
-                <a:ea typeface="Open Sans" pitchFamily="34" charset="-122"/>
-                <a:cs typeface="Open Sans" pitchFamily="34" charset="-120"/>
+                <a:latin typeface="Open Sans Light" pitchFamily="34" charset="0"/>
+                <a:ea typeface="Open Sans Light" pitchFamily="34" charset="-122"/>
+                <a:cs typeface="Open Sans Light" pitchFamily="34" charset="-120"/>
               </a:rPr>
               <a:t>Source: Economic Innovation Group 80-80 wage subsidy simulation, 2026.</a:t>
             </a:r>
@@ -8494,6 +8398,7 @@
         <a:solidFill>
           <a:srgbClr val="024140"/>
         </a:solidFill>
+        <a:effectLst/>
       </p:bgPr>
     </p:bg>
     <p:spTree>
@@ -8531,7 +8436,7 @@
           <a:bodyPr wrap="square" lIns="0" tIns="0" rIns="0" bIns="0" rtlCol="0" anchor="t"/>
           <a:lstStyle/>
           <a:p>
-            <a:pPr algn="l" indent="0" marL="0">
+            <a:pPr marL="0" indent="0" algn="l">
               <a:buNone/>
             </a:pPr>
             <a:r>
@@ -8570,7 +8475,7 @@
           <a:bodyPr wrap="square" lIns="0" tIns="0" rIns="0" bIns="0" rtlCol="0" anchor="t"/>
           <a:lstStyle/>
           <a:p>
-            <a:pPr algn="l" indent="0" marL="0">
+            <a:pPr marL="0" indent="0" algn="l">
               <a:lnSpc>
                 <a:spcPct val="100000"/>
               </a:lnSpc>
@@ -8612,7 +8517,7 @@
           <a:bodyPr wrap="square" lIns="0" tIns="0" rIns="0" bIns="0" rtlCol="0" anchor="t"/>
           <a:lstStyle/>
           <a:p>
-            <a:pPr algn="l" indent="0" marL="0">
+            <a:pPr marL="0" indent="0" algn="l">
               <a:buNone/>
             </a:pPr>
             <a:r>
@@ -8620,9 +8525,9 @@
                 <a:solidFill>
                   <a:srgbClr val="B3D6DD"/>
                 </a:solidFill>
-                <a:latin typeface="Open Sans" pitchFamily="34" charset="0"/>
-                <a:ea typeface="Open Sans" pitchFamily="34" charset="-122"/>
-                <a:cs typeface="Open Sans" pitchFamily="34" charset="-120"/>
+                <a:latin typeface="Open Sans Light" pitchFamily="34" charset="0"/>
+                <a:ea typeface="Open Sans Light" pitchFamily="34" charset="-122"/>
+                <a:cs typeface="Open Sans Light" pitchFamily="34" charset="-120"/>
               </a:rPr>
               <a:t>Cost is the firm result. Entry is the wider band — and we vary its drivers jointly, not one at a time.</a:t>
             </a:r>
@@ -8646,6 +8551,7 @@
         <a:solidFill>
           <a:srgbClr val="FFFFFF"/>
         </a:solidFill>
+        <a:effectLst/>
       </p:bgPr>
     </p:bg>
     <p:spTree>
@@ -8683,17 +8589,17 @@
           <a:bodyPr wrap="square" lIns="0" tIns="0" rIns="0" bIns="0" rtlCol="0" anchor="ctr"/>
           <a:lstStyle/>
           <a:p>
-            <a:pPr algn="l" indent="0" marL="0">
+            <a:pPr marL="0" indent="0" algn="l">
               <a:buNone/>
             </a:pPr>
             <a:r>
-              <a:rPr lang="en-US" sz="1100" b="1" spc="200" kern="0" dirty="0">
+              <a:rPr lang="en-US" sz="1100" b="1" kern="0" spc="200" dirty="0">
                 <a:solidFill>
                   <a:srgbClr val="19644D"/>
                 </a:solidFill>
-                <a:latin typeface="Open Sans" pitchFamily="34" charset="0"/>
-                <a:ea typeface="Open Sans" pitchFamily="34" charset="-122"/>
-                <a:cs typeface="Open Sans" pitchFamily="34" charset="-120"/>
+                <a:latin typeface="Open Sans ExtraBold" pitchFamily="34" charset="0"/>
+                <a:ea typeface="Open Sans ExtraBold" pitchFamily="34" charset="-122"/>
+                <a:cs typeface="Open Sans ExtraBold" pitchFamily="34" charset="-120"/>
               </a:rPr>
               <a:t>HOW SURE ARE YOU?</a:t>
             </a:r>
@@ -8722,7 +8628,7 @@
           <a:bodyPr wrap="square" lIns="0" tIns="0" rIns="0" bIns="0" rtlCol="0" anchor="t"/>
           <a:lstStyle/>
           <a:p>
-            <a:pPr algn="l" indent="0" marL="0">
+            <a:pPr marL="0" indent="0" algn="l">
               <a:lnSpc>
                 <a:spcPct val="98000"/>
               </a:lnSpc>
@@ -8764,7 +8670,7 @@
           <a:bodyPr wrap="square" lIns="0" tIns="0" rIns="0" bIns="0" rtlCol="0" anchor="t"/>
           <a:lstStyle/>
           <a:p>
-            <a:pPr indent="0" marL="0">
+            <a:pPr marL="0" indent="0">
               <a:lnSpc>
                 <a:spcPct val="100000"/>
               </a:lnSpc>
@@ -8775,9 +8681,9 @@
                 <a:solidFill>
                   <a:srgbClr val="3A3A3A"/>
                 </a:solidFill>
-                <a:latin typeface="Open Sans" pitchFamily="34" charset="0"/>
-                <a:ea typeface="Open Sans" pitchFamily="34" charset="-122"/>
-                <a:cs typeface="Open Sans" pitchFamily="34" charset="-120"/>
+                <a:latin typeface="Open Sans ExtraBold" pitchFamily="34" charset="0"/>
+                <a:ea typeface="Open Sans ExtraBold" pitchFamily="34" charset="-122"/>
+                <a:cs typeface="Open Sans ExtraBold" pitchFamily="34" charset="-120"/>
               </a:rPr>
               <a:t>27-cell grid: penalty × dispersion × elasticity.</a:t>
             </a:r>
@@ -8787,14 +8693,14 @@
       </p:sp>
       <p:pic>
         <p:nvPicPr>
-          <p:cNvPr id="5" name="Image 0" descr="/Users/benjamin/Documents/GitHub/eig-wagesubsidy-policy-sim/output/figures/slides/fig14_mpl_uncertainty.png">    </p:cNvPr>
+          <p:cNvPr id="5" name="Image 0" descr="/Users/benjamin/Documents/GitHub/eig-wagesubsidy-policy-sim/output/figures/slides/fig14_mpl_uncertainty.png"/>
           <p:cNvPicPr>
             <a:picLocks noChangeAspect="1"/>
           </p:cNvPicPr>
           <p:nvPr/>
         </p:nvPicPr>
         <p:blipFill>
-          <a:blip r:embed="rId1"/>
+          <a:blip r:embed="rId3"/>
           <a:stretch>
             <a:fillRect/>
           </a:stretch>
@@ -8842,9 +8748,9 @@
                 <a:solidFill>
                   <a:srgbClr val="3A3A3A"/>
                 </a:solidFill>
-                <a:latin typeface="Open Sans" pitchFamily="34" charset="0"/>
-                <a:ea typeface="Open Sans" pitchFamily="34" charset="-122"/>
-                <a:cs typeface="Open Sans" pitchFamily="34" charset="-120"/>
+                <a:latin typeface="Open Sans Light" pitchFamily="34" charset="0"/>
+                <a:ea typeface="Open Sans Light" pitchFamily="34" charset="-122"/>
+                <a:cs typeface="Open Sans Light" pitchFamily="34" charset="-120"/>
               </a:rPr>
               <a:t>Cost is the firm result: $45–48B net across all three models.</a:t>
             </a:r>
@@ -8863,9 +8769,9 @@
                 <a:solidFill>
                   <a:srgbClr val="3A3A3A"/>
                 </a:solidFill>
-                <a:latin typeface="Open Sans" pitchFamily="34" charset="0"/>
-                <a:ea typeface="Open Sans" pitchFamily="34" charset="-122"/>
-                <a:cs typeface="Open Sans" pitchFamily="34" charset="-120"/>
+                <a:latin typeface="Open Sans Light" pitchFamily="34" charset="0"/>
+                <a:ea typeface="Open Sans Light" pitchFamily="34" charset="-122"/>
+                <a:cs typeface="Open Sans Light" pitchFamily="34" charset="-120"/>
               </a:rPr>
               <a:t>Entry is the wider band — we vary its three drivers jointly, not one at a time.</a:t>
             </a:r>
@@ -8884,9 +8790,9 @@
                 <a:solidFill>
                   <a:srgbClr val="3A3A3A"/>
                 </a:solidFill>
-                <a:latin typeface="Open Sans" pitchFamily="34" charset="0"/>
-                <a:ea typeface="Open Sans" pitchFamily="34" charset="-122"/>
-                <a:cs typeface="Open Sans" pitchFamily="34" charset="-120"/>
+                <a:latin typeface="Open Sans Light" pitchFamily="34" charset="0"/>
+                <a:ea typeface="Open Sans Light" pitchFamily="34" charset="-122"/>
+                <a:cs typeface="Open Sans Light" pitchFamily="34" charset="-120"/>
               </a:rPr>
               <a:t>Drivers: participation elasticity, offer dispersion, and the non-employment wage penalty.</a:t>
             </a:r>
@@ -8905,9 +8811,9 @@
                 <a:solidFill>
                   <a:srgbClr val="3A3A3A"/>
                 </a:solidFill>
-                <a:latin typeface="Open Sans" pitchFamily="34" charset="0"/>
-                <a:ea typeface="Open Sans" pitchFamily="34" charset="-122"/>
-                <a:cs typeface="Open Sans" pitchFamily="34" charset="-120"/>
+                <a:latin typeface="Open Sans Light" pitchFamily="34" charset="0"/>
+                <a:ea typeface="Open Sans Light" pitchFamily="34" charset="-122"/>
+                <a:cs typeface="Open Sans Light" pitchFamily="34" charset="-120"/>
               </a:rPr>
               <a:t>We headline the evidence-central because a zero wage penalty is the one setting the evidence rules out.</a:t>
             </a:r>
@@ -8936,7 +8842,7 @@
           <a:bodyPr wrap="square" lIns="0" tIns="0" rIns="0" bIns="0" rtlCol="0" anchor="ctr"/>
           <a:lstStyle/>
           <a:p>
-            <a:pPr indent="0" marL="0">
+            <a:pPr marL="0" indent="0">
               <a:buNone/>
             </a:pPr>
             <a:r>
@@ -8944,9 +8850,9 @@
                 <a:solidFill>
                   <a:srgbClr val="8A8A8A"/>
                 </a:solidFill>
-                <a:latin typeface="Open Sans" pitchFamily="34" charset="0"/>
-                <a:ea typeface="Open Sans" pitchFamily="34" charset="-122"/>
-                <a:cs typeface="Open Sans" pitchFamily="34" charset="-120"/>
+                <a:latin typeface="Open Sans Light" pitchFamily="34" charset="0"/>
+                <a:ea typeface="Open Sans Light" pitchFamily="34" charset="-122"/>
+                <a:cs typeface="Open Sans Light" pitchFamily="34" charset="-120"/>
               </a:rPr>
               <a:t>Source: Economic Innovation Group 80-80 wage subsidy simulation, 2026.</a:t>
             </a:r>
@@ -8970,6 +8876,7 @@
         <a:solidFill>
           <a:srgbClr val="FFFFFF"/>
         </a:solidFill>
+        <a:effectLst/>
       </p:bgPr>
     </p:bg>
     <p:spTree>
@@ -9007,17 +8914,17 @@
           <a:bodyPr wrap="square" lIns="0" tIns="0" rIns="0" bIns="0" rtlCol="0" anchor="ctr"/>
           <a:lstStyle/>
           <a:p>
-            <a:pPr algn="l" indent="0" marL="0">
+            <a:pPr marL="0" indent="0" algn="l">
               <a:buNone/>
             </a:pPr>
             <a:r>
-              <a:rPr lang="en-US" sz="1100" b="1" spc="200" kern="0" dirty="0">
+              <a:rPr lang="en-US" sz="1100" b="1" kern="0" spc="200" dirty="0">
                 <a:solidFill>
                   <a:srgbClr val="19644D"/>
                 </a:solidFill>
-                <a:latin typeface="Open Sans" pitchFamily="34" charset="0"/>
-                <a:ea typeface="Open Sans" pitchFamily="34" charset="-122"/>
-                <a:cs typeface="Open Sans" pitchFamily="34" charset="-120"/>
+                <a:latin typeface="Open Sans ExtraBold" pitchFamily="34" charset="0"/>
+                <a:ea typeface="Open Sans ExtraBold" pitchFamily="34" charset="-122"/>
+                <a:cs typeface="Open Sans ExtraBold" pitchFamily="34" charset="-120"/>
               </a:rPr>
               <a:t>HOW SURE ARE YOU?</a:t>
             </a:r>
@@ -9046,7 +8953,7 @@
           <a:bodyPr wrap="square" lIns="0" tIns="0" rIns="0" bIns="0" rtlCol="0" anchor="t"/>
           <a:lstStyle/>
           <a:p>
-            <a:pPr algn="l" indent="0" marL="0">
+            <a:pPr marL="0" indent="0" algn="l">
               <a:lnSpc>
                 <a:spcPct val="98000"/>
               </a:lnSpc>
@@ -9088,7 +8995,7 @@
           <a:bodyPr wrap="square" lIns="0" tIns="0" rIns="0" bIns="0" rtlCol="0" anchor="t"/>
           <a:lstStyle/>
           <a:p>
-            <a:pPr indent="0" marL="0">
+            <a:pPr marL="0" indent="0">
               <a:lnSpc>
                 <a:spcPct val="100000"/>
               </a:lnSpc>
@@ -9099,9 +9006,9 @@
                 <a:solidFill>
                   <a:srgbClr val="3A3A3A"/>
                 </a:solidFill>
-                <a:latin typeface="Open Sans" pitchFamily="34" charset="0"/>
-                <a:ea typeface="Open Sans" pitchFamily="34" charset="-122"/>
-                <a:cs typeface="Open Sans" pitchFamily="34" charset="-120"/>
+                <a:latin typeface="Open Sans ExtraBold" pitchFamily="34" charset="0"/>
+                <a:ea typeface="Open Sans ExtraBold" pitchFamily="34" charset="-122"/>
+                <a:cs typeface="Open Sans ExtraBold" pitchFamily="34" charset="-120"/>
               </a:rPr>
               <a:t>Consensus elasticities (0.2–0.33) give 0.19–0.28M FTE, alongside ~0.7M FTE from entry.</a:t>
             </a:r>
@@ -9111,14 +9018,14 @@
       </p:sp>
       <p:pic>
         <p:nvPicPr>
-          <p:cNvPr id="5" name="Image 0" descr="/Users/benjamin/Documents/GitHub/eig-wagesubsidy-policy-sim/output/figures/slides/fig15_hours_margin.png">    </p:cNvPr>
+          <p:cNvPr id="5" name="Image 0" descr="/Users/benjamin/Documents/GitHub/eig-wagesubsidy-policy-sim/output/figures/slides/fig15_hours_margin.png"/>
           <p:cNvPicPr>
             <a:picLocks noChangeAspect="1"/>
           </p:cNvPicPr>
           <p:nvPr/>
         </p:nvPicPr>
         <p:blipFill>
-          <a:blip r:embed="rId1"/>
+          <a:blip r:embed="rId3"/>
           <a:stretch>
             <a:fillRect/>
           </a:stretch>
@@ -9154,7 +9061,7 @@
           <a:bodyPr wrap="square" lIns="0" tIns="0" rIns="0" bIns="0" rtlCol="0" anchor="ctr"/>
           <a:lstStyle/>
           <a:p>
-            <a:pPr indent="0" marL="0">
+            <a:pPr marL="0" indent="0">
               <a:buNone/>
             </a:pPr>
             <a:r>
@@ -9162,9 +9069,9 @@
                 <a:solidFill>
                   <a:srgbClr val="8A8A8A"/>
                 </a:solidFill>
-                <a:latin typeface="Open Sans" pitchFamily="34" charset="0"/>
-                <a:ea typeface="Open Sans" pitchFamily="34" charset="-122"/>
-                <a:cs typeface="Open Sans" pitchFamily="34" charset="-120"/>
+                <a:latin typeface="Open Sans Light" pitchFamily="34" charset="0"/>
+                <a:ea typeface="Open Sans Light" pitchFamily="34" charset="-122"/>
+                <a:cs typeface="Open Sans Light" pitchFamily="34" charset="-120"/>
               </a:rPr>
               <a:t>Source: Economic Innovation Group 80-80 wage subsidy simulation, 2026.</a:t>
             </a:r>
@@ -9188,6 +9095,7 @@
         <a:solidFill>
           <a:srgbClr val="024140"/>
         </a:solidFill>
+        <a:effectLst/>
       </p:bgPr>
     </p:bg>
     <p:spTree>
@@ -9225,17 +9133,17 @@
           <a:bodyPr wrap="square" lIns="0" tIns="0" rIns="0" bIns="0" rtlCol="0" anchor="ctr"/>
           <a:lstStyle/>
           <a:p>
-            <a:pPr algn="l" indent="0" marL="0">
+            <a:pPr marL="0" indent="0" algn="l">
               <a:buNone/>
             </a:pPr>
             <a:r>
-              <a:rPr lang="en-US" sz="1100" b="1" spc="200" kern="0" dirty="0">
+              <a:rPr lang="en-US" sz="1100" b="1" kern="0" spc="200" dirty="0">
                 <a:solidFill>
                   <a:srgbClr val="E1AD28"/>
                 </a:solidFill>
-                <a:latin typeface="Open Sans" pitchFamily="34" charset="0"/>
-                <a:ea typeface="Open Sans" pitchFamily="34" charset="-122"/>
-                <a:cs typeface="Open Sans" pitchFamily="34" charset="-120"/>
+                <a:latin typeface="Open Sans ExtraBold" pitchFamily="34" charset="0"/>
+                <a:ea typeface="Open Sans ExtraBold" pitchFamily="34" charset="-122"/>
+                <a:cs typeface="Open Sans ExtraBold" pitchFamily="34" charset="-120"/>
               </a:rPr>
               <a:t>THE BOTTOM LINE</a:t>
             </a:r>
@@ -9264,7 +9172,7 @@
           <a:bodyPr wrap="square" lIns="0" tIns="0" rIns="0" bIns="0" rtlCol="0" anchor="t"/>
           <a:lstStyle/>
           <a:p>
-            <a:pPr indent="0" marL="0">
+            <a:pPr marL="0" indent="0">
               <a:lnSpc>
                 <a:spcPct val="102000"/>
               </a:lnSpc>
@@ -9321,9 +9229,9 @@
                 <a:solidFill>
                   <a:srgbClr val="FEECD6"/>
                 </a:solidFill>
-                <a:latin typeface="Open Sans" pitchFamily="34" charset="0"/>
-                <a:ea typeface="Open Sans" pitchFamily="34" charset="-122"/>
-                <a:cs typeface="Open Sans" pitchFamily="34" charset="-120"/>
+                <a:latin typeface="Open Sans Light" pitchFamily="34" charset="0"/>
+                <a:ea typeface="Open Sans Light" pitchFamily="34" charset="-122"/>
+                <a:cs typeface="Open Sans Light" pitchFamily="34" charset="-120"/>
               </a:rPr>
               <a:t>Largest checks go to the poorest workers and the most distressed states.</a:t>
             </a:r>
@@ -9345,9 +9253,9 @@
                 <a:solidFill>
                   <a:srgbClr val="FEECD6"/>
                 </a:solidFill>
-                <a:latin typeface="Open Sans" pitchFamily="34" charset="0"/>
-                <a:ea typeface="Open Sans" pitchFamily="34" charset="-122"/>
-                <a:cs typeface="Open Sans" pitchFamily="34" charset="-120"/>
+                <a:latin typeface="Open Sans Light" pitchFamily="34" charset="0"/>
+                <a:ea typeface="Open Sans Light" pitchFamily="34" charset="-122"/>
+                <a:cs typeface="Open Sans Light" pitchFamily="34" charset="-120"/>
               </a:rPr>
               <a:t>~1.49M new entrants (floor ~1.0M; up to 3.81M) plus ~200K FTE of added part-time hours.</a:t>
             </a:r>
@@ -9369,9 +9277,9 @@
                 <a:solidFill>
                   <a:srgbClr val="FEECD6"/>
                 </a:solidFill>
-                <a:latin typeface="Open Sans" pitchFamily="34" charset="0"/>
-                <a:ea typeface="Open Sans" pitchFamily="34" charset="-122"/>
-                <a:cs typeface="Open Sans" pitchFamily="34" charset="-120"/>
+                <a:latin typeface="Open Sans Light" pitchFamily="34" charset="0"/>
+                <a:ea typeface="Open Sans Light" pitchFamily="34" charset="-122"/>
+                <a:cs typeface="Open Sans Light" pitchFamily="34" charset="-120"/>
               </a:rPr>
               <a:t>Marginal cost per new job is a few thousand dollars; fully-loaded ~$32K still beats the incentives we already run.</a:t>
             </a:r>
@@ -9390,9 +9298,9 @@
                 <a:solidFill>
                   <a:srgbClr val="FEECD6"/>
                 </a:solidFill>
-                <a:latin typeface="Open Sans" pitchFamily="34" charset="0"/>
-                <a:ea typeface="Open Sans" pitchFamily="34" charset="-122"/>
-                <a:cs typeface="Open Sans" pitchFamily="34" charset="-120"/>
+                <a:latin typeface="Open Sans Light" pitchFamily="34" charset="0"/>
+                <a:ea typeface="Open Sans Light" pitchFamily="34" charset="-122"/>
+                <a:cs typeface="Open Sans Light" pitchFamily="34" charset="-120"/>
               </a:rPr>
               <a:t>The open question is deliberate: whether the subsidy counts against means-tested benefits — a choice for statute.</a:t>
             </a:r>
@@ -9421,7 +9329,7 @@
           <a:bodyPr wrap="square" lIns="0" tIns="0" rIns="0" bIns="0" rtlCol="0" anchor="ctr"/>
           <a:lstStyle/>
           <a:p>
-            <a:pPr indent="0" marL="0">
+            <a:pPr marL="0" indent="0">
               <a:buNone/>
             </a:pPr>
             <a:r>
@@ -9429,23 +9337,20 @@
                 <a:solidFill>
                   <a:srgbClr val="B9CCC9"/>
                 </a:solidFill>
-                <a:latin typeface="Open Sans" pitchFamily="34" charset="0"/>
-                <a:ea typeface="Open Sans" pitchFamily="34" charset="-122"/>
-                <a:cs typeface="Open Sans" pitchFamily="34" charset="-120"/>
+                <a:latin typeface="Open Sans Light" pitchFamily="34" charset="0"/>
+                <a:ea typeface="Open Sans Light" pitchFamily="34" charset="-122"/>
+                <a:cs typeface="Open Sans Light" pitchFamily="34" charset="-120"/>
               </a:rPr>
               <a:t>Explore the interactive model: </a:t>
             </a:r>
-            <a:pPr indent="0" marL="0">
-              <a:buNone/>
-            </a:pPr>
             <a:r>
               <a:rPr lang="en-US" sz="1300" b="1" dirty="0">
                 <a:solidFill>
                   <a:srgbClr val="E1AD28"/>
                 </a:solidFill>
-                <a:latin typeface="Open Sans" pitchFamily="34" charset="0"/>
-                <a:ea typeface="Open Sans" pitchFamily="34" charset="-122"/>
-                <a:cs typeface="Open Sans" pitchFamily="34" charset="-120"/>
+                <a:latin typeface="Open Sans ExtraBold" pitchFamily="34" charset="0"/>
+                <a:ea typeface="Open Sans ExtraBold" pitchFamily="34" charset="-122"/>
+                <a:cs typeface="Open Sans ExtraBold" pitchFamily="34" charset="-120"/>
               </a:rPr>
               <a:t>eig-wage-subsidy.streamlit.app</a:t>
             </a:r>
@@ -9469,6 +9374,7 @@
         <a:solidFill>
           <a:srgbClr val="FFFFFF"/>
         </a:solidFill>
+        <a:effectLst/>
       </p:bgPr>
     </p:bg>
     <p:spTree>
@@ -9506,17 +9412,17 @@
           <a:bodyPr wrap="square" lIns="0" tIns="0" rIns="0" bIns="0" rtlCol="0" anchor="ctr"/>
           <a:lstStyle/>
           <a:p>
-            <a:pPr algn="l" indent="0" marL="0">
+            <a:pPr marL="0" indent="0" algn="l">
               <a:buNone/>
             </a:pPr>
             <a:r>
-              <a:rPr lang="en-US" sz="1100" b="1" spc="200" kern="0" dirty="0">
+              <a:rPr lang="en-US" sz="1100" b="1" kern="0" spc="200" dirty="0">
                 <a:solidFill>
                   <a:srgbClr val="19644D"/>
                 </a:solidFill>
-                <a:latin typeface="Open Sans" pitchFamily="34" charset="0"/>
-                <a:ea typeface="Open Sans" pitchFamily="34" charset="-122"/>
-                <a:cs typeface="Open Sans" pitchFamily="34" charset="-120"/>
+                <a:latin typeface="Open Sans ExtraBold" pitchFamily="34" charset="0"/>
+                <a:ea typeface="Open Sans ExtraBold" pitchFamily="34" charset="-122"/>
+                <a:cs typeface="Open Sans ExtraBold" pitchFamily="34" charset="-120"/>
               </a:rPr>
               <a:t>A QUICK REFRESHER</a:t>
             </a:r>
@@ -9545,7 +9451,7 @@
           <a:bodyPr wrap="square" lIns="0" tIns="0" rIns="0" bIns="0" rtlCol="0" anchor="t"/>
           <a:lstStyle/>
           <a:p>
-            <a:pPr algn="l" indent="0" marL="0">
+            <a:pPr marL="0" indent="0" algn="l">
               <a:lnSpc>
                 <a:spcPct val="98000"/>
               </a:lnSpc>
@@ -9560,7 +9466,7 @@
                 <a:ea typeface="Source Serif Pro" pitchFamily="34" charset="-122"/>
                 <a:cs typeface="Source Serif Pro" pitchFamily="34" charset="-120"/>
               </a:rPr>
-              <a:t>The subsidy fills 80% of the gap to a $16.80 target — in every paycheck.</a:t>
+              <a:t>Cover 80% of the gap to 80% of the median wage of hourly workers.</a:t>
             </a:r>
             <a:endParaRPr lang="en-US" sz="2500" dirty="0"/>
           </a:p>
@@ -9587,7 +9493,7 @@
           <a:bodyPr wrap="square" lIns="0" tIns="0" rIns="0" bIns="0" rtlCol="0" anchor="t"/>
           <a:lstStyle/>
           <a:p>
-            <a:pPr indent="0" marL="0">
+            <a:pPr marL="0" indent="0">
               <a:lnSpc>
                 <a:spcPct val="100000"/>
               </a:lnSpc>
@@ -9598,9 +9504,9 @@
                 <a:solidFill>
                   <a:srgbClr val="3A3A3A"/>
                 </a:solidFill>
-                <a:latin typeface="Open Sans" pitchFamily="34" charset="0"/>
-                <a:ea typeface="Open Sans" pitchFamily="34" charset="-122"/>
-                <a:cs typeface="Open Sans" pitchFamily="34" charset="-120"/>
+                <a:latin typeface="Open Sans ExtraBold" pitchFamily="34" charset="0"/>
+                <a:ea typeface="Open Sans ExtraBold" pitchFamily="34" charset="-122"/>
+                <a:cs typeface="Open Sans ExtraBold" pitchFamily="34" charset="-120"/>
               </a:rPr>
               <a:t>Target = 80% of the $21.00 paid-hourly median; $7.25 is the lowest creditable base wage.</a:t>
             </a:r>
@@ -9610,14 +9516,14 @@
       </p:sp>
       <p:pic>
         <p:nvPicPr>
-          <p:cNvPr id="5" name="Image 0" descr="/Users/benjamin/Documents/GitHub/eig-wagesubsidy-policy-sim/output/figures/slides/fig01_subsidy_schedule.png">    </p:cNvPr>
+          <p:cNvPr id="5" name="Image 0" descr="/Users/benjamin/Documents/GitHub/eig-wagesubsidy-policy-sim/output/figures/slides/fig01_subsidy_schedule.png"/>
           <p:cNvPicPr>
             <a:picLocks noChangeAspect="1"/>
           </p:cNvPicPr>
           <p:nvPr/>
         </p:nvPicPr>
         <p:blipFill>
-          <a:blip r:embed="rId1"/>
+          <a:blip r:embed="rId3"/>
           <a:stretch>
             <a:fillRect/>
           </a:stretch>
@@ -9653,7 +9559,7 @@
           <a:bodyPr wrap="square" lIns="0" tIns="0" rIns="0" bIns="0" rtlCol="0" anchor="ctr"/>
           <a:lstStyle/>
           <a:p>
-            <a:pPr indent="0" marL="0">
+            <a:pPr marL="0" indent="0">
               <a:buNone/>
             </a:pPr>
             <a:r>
@@ -9661,9 +9567,9 @@
                 <a:solidFill>
                   <a:srgbClr val="8A8A8A"/>
                 </a:solidFill>
-                <a:latin typeface="Open Sans" pitchFamily="34" charset="0"/>
-                <a:ea typeface="Open Sans" pitchFamily="34" charset="-122"/>
-                <a:cs typeface="Open Sans" pitchFamily="34" charset="-120"/>
+                <a:latin typeface="Open Sans Light" pitchFamily="34" charset="0"/>
+                <a:ea typeface="Open Sans Light" pitchFamily="34" charset="-122"/>
+                <a:cs typeface="Open Sans Light" pitchFamily="34" charset="-120"/>
               </a:rPr>
               <a:t>Source: Economic Innovation Group 80-80 wage subsidy simulation, 2026.</a:t>
             </a:r>
@@ -9687,6 +9593,7 @@
         <a:solidFill>
           <a:srgbClr val="024140"/>
         </a:solidFill>
+        <a:effectLst/>
       </p:bgPr>
     </p:bg>
     <p:spTree>
@@ -9724,7 +9631,7 @@
           <a:bodyPr wrap="square" lIns="0" tIns="0" rIns="0" bIns="0" rtlCol="0" anchor="t"/>
           <a:lstStyle/>
           <a:p>
-            <a:pPr algn="l" indent="0" marL="0">
+            <a:pPr marL="0" indent="0" algn="l">
               <a:buNone/>
             </a:pPr>
             <a:r>
@@ -9763,7 +9670,7 @@
           <a:bodyPr wrap="square" lIns="0" tIns="0" rIns="0" bIns="0" rtlCol="0" anchor="t"/>
           <a:lstStyle/>
           <a:p>
-            <a:pPr algn="l" indent="0" marL="0">
+            <a:pPr marL="0" indent="0" algn="l">
               <a:lnSpc>
                 <a:spcPct val="100000"/>
               </a:lnSpc>
@@ -9805,7 +9712,7 @@
           <a:bodyPr wrap="square" lIns="0" tIns="0" rIns="0" bIns="0" rtlCol="0" anchor="t"/>
           <a:lstStyle/>
           <a:p>
-            <a:pPr algn="l" indent="0" marL="0">
+            <a:pPr marL="0" indent="0" algn="l">
               <a:buNone/>
             </a:pPr>
             <a:r>
@@ -9813,9 +9720,9 @@
                 <a:solidFill>
                   <a:srgbClr val="B3D6DD"/>
                 </a:solidFill>
-                <a:latin typeface="Open Sans" pitchFamily="34" charset="0"/>
-                <a:ea typeface="Open Sans" pitchFamily="34" charset="-122"/>
-                <a:cs typeface="Open Sans" pitchFamily="34" charset="-120"/>
+                <a:latin typeface="Open Sans Light" pitchFamily="34" charset="0"/>
+                <a:ea typeface="Open Sans Light" pitchFamily="34" charset="-122"/>
+                <a:cs typeface="Open Sans Light" pitchFamily="34" charset="-120"/>
               </a:rPr>
               <a:t>The machinery behind every number: accounting, transported evidence, and disclosed judgment.</a:t>
             </a:r>
@@ -9839,6 +9746,7 @@
         <a:solidFill>
           <a:srgbClr val="FFFFFF"/>
         </a:solidFill>
+        <a:effectLst/>
       </p:bgPr>
     </p:bg>
     <p:spTree>
@@ -9876,17 +9784,17 @@
           <a:bodyPr wrap="square" lIns="0" tIns="0" rIns="0" bIns="0" rtlCol="0" anchor="ctr"/>
           <a:lstStyle/>
           <a:p>
-            <a:pPr algn="l" indent="0" marL="0">
+            <a:pPr marL="0" indent="0" algn="l">
               <a:buNone/>
             </a:pPr>
             <a:r>
-              <a:rPr lang="en-US" sz="1100" b="1" spc="200" kern="0" dirty="0">
+              <a:rPr lang="en-US" sz="1100" b="1" kern="0" spc="200" dirty="0">
                 <a:solidFill>
                   <a:srgbClr val="19644D"/>
                 </a:solidFill>
-                <a:latin typeface="Open Sans" pitchFamily="34" charset="0"/>
-                <a:ea typeface="Open Sans" pitchFamily="34" charset="-122"/>
-                <a:cs typeface="Open Sans" pitchFamily="34" charset="-120"/>
+                <a:latin typeface="Open Sans ExtraBold" pitchFamily="34" charset="0"/>
+                <a:ea typeface="Open Sans ExtraBold" pitchFamily="34" charset="-122"/>
+                <a:cs typeface="Open Sans ExtraBold" pitchFamily="34" charset="-120"/>
               </a:rPr>
               <a:t>TECHNICAL APPENDIX · THE DATA FOUNDATION</a:t>
             </a:r>
@@ -9915,7 +9823,7 @@
           <a:bodyPr wrap="square" lIns="0" tIns="0" rIns="0" bIns="0" rtlCol="0" anchor="t"/>
           <a:lstStyle/>
           <a:p>
-            <a:pPr algn="l" indent="0" marL="0">
+            <a:pPr marL="0" indent="0" algn="l">
               <a:lnSpc>
                 <a:spcPct val="98000"/>
               </a:lnSpc>
@@ -9952,15 +9860,27 @@
         </p:nvGraphicFramePr>
         <p:xfrm>
           <a:off x="457200" y="1463040"/>
-          <a:ext cx="5212080" cy="914400"/>
+          <a:ext cx="5212080" cy="1920240"/>
         </p:xfrm>
         <a:graphic>
           <a:graphicData uri="http://schemas.openxmlformats.org/drawingml/2006/table">
             <a:tbl>
               <a:tblPr/>
               <a:tblGrid>
-                <a:gridCol w="4023360"/>
-                <a:gridCol w="1188720"/>
+                <a:gridCol w="4023360">
+                  <a:extLst>
+                    <a:ext uri="{9D8B030D-6E8A-4147-A177-3AD203B41FA5}">
+                      <a16:colId xmlns:a16="http://schemas.microsoft.com/office/drawing/2014/main" val="20000"/>
+                    </a:ext>
+                  </a:extLst>
+                </a:gridCol>
+                <a:gridCol w="1188720">
+                  <a:extLst>
+                    <a:ext uri="{9D8B030D-6E8A-4147-A177-3AD203B41FA5}">
+                      <a16:colId xmlns:a16="http://schemas.microsoft.com/office/drawing/2014/main" val="20001"/>
+                    </a:ext>
+                  </a:extLst>
+                </a:gridCol>
               </a:tblGrid>
               <a:tr h="384048">
                 <a:tc>
@@ -9968,7 +9888,7 @@
                     <a:bodyPr/>
                     <a:lstStyle/>
                     <a:p>
-                      <a:pPr algn="l" indent="0" marL="0">
+                      <a:pPr marL="0" indent="0" algn="l">
                         <a:buNone/>
                       </a:pPr>
                       <a:r>
@@ -9976,16 +9896,16 @@
                           <a:solidFill>
                             <a:srgbClr val="FFFFFF"/>
                           </a:solidFill>
-                          <a:latin typeface="Open Sans" pitchFamily="34" charset="0"/>
-                          <a:ea typeface="Open Sans" pitchFamily="34" charset="-122"/>
-                          <a:cs typeface="Open Sans" pitchFamily="34" charset="-120"/>
+                          <a:latin typeface="Open Sans ExtraBold" pitchFamily="34" charset="0"/>
+                          <a:ea typeface="Open Sans ExtraBold" pitchFamily="34" charset="-122"/>
+                          <a:cs typeface="Open Sans ExtraBold" pitchFamily="34" charset="-120"/>
                         </a:rPr>
                         <a:t>From the hourly workforce to the eligible population</a:t>
                       </a:r>
                       <a:endParaRPr lang="en-US" sz="1150" dirty="0">
-                        <a:latin typeface="Open Sans" charset="0"/>
-                        <a:ea typeface="Open Sans" charset="0"/>
-                        <a:cs typeface="Open Sans" charset="0"/>
+                        <a:latin typeface="Open Sans Light" charset="0"/>
+                        <a:ea typeface="Open Sans Light" charset="0"/>
+                        <a:cs typeface="Open Sans Light" charset="0"/>
                       </a:endParaRPr>
                     </a:p>
                   </a:txBody>
@@ -10018,7 +9938,7 @@
                     <a:bodyPr/>
                     <a:lstStyle/>
                     <a:p>
-                      <a:pPr algn="r" indent="0" marL="0">
+                      <a:pPr marL="0" indent="0" algn="r">
                         <a:buNone/>
                       </a:pPr>
                       <a:r>
@@ -10026,16 +9946,16 @@
                           <a:solidFill>
                             <a:srgbClr val="FFFFFF"/>
                           </a:solidFill>
-                          <a:latin typeface="Open Sans" pitchFamily="34" charset="0"/>
-                          <a:ea typeface="Open Sans" pitchFamily="34" charset="-122"/>
-                          <a:cs typeface="Open Sans" pitchFamily="34" charset="-120"/>
+                          <a:latin typeface="Open Sans ExtraBold" pitchFamily="34" charset="0"/>
+                          <a:ea typeface="Open Sans ExtraBold" pitchFamily="34" charset="-122"/>
+                          <a:cs typeface="Open Sans ExtraBold" pitchFamily="34" charset="-120"/>
                         </a:rPr>
                         <a:t>Workers (M)</a:t>
                       </a:r>
                       <a:endParaRPr lang="en-US" sz="1150" dirty="0">
-                        <a:latin typeface="Open Sans" charset="0"/>
-                        <a:ea typeface="Open Sans" charset="0"/>
-                        <a:cs typeface="Open Sans" charset="0"/>
+                        <a:latin typeface="Open Sans Light" charset="0"/>
+                        <a:ea typeface="Open Sans Light" charset="0"/>
+                        <a:cs typeface="Open Sans Light" charset="0"/>
                       </a:endParaRPr>
                     </a:p>
                   </a:txBody>
@@ -10063,6 +9983,11 @@
                     </a:solidFill>
                   </a:tcPr>
                 </a:tc>
+                <a:extLst>
+                  <a:ext uri="{0D108BD9-81ED-4DB2-BD59-A6C34878D82A}">
+                    <a16:rowId xmlns:a16="http://schemas.microsoft.com/office/drawing/2014/main" val="10000"/>
+                  </a:ext>
+                </a:extLst>
               </a:tr>
               <a:tr h="384048">
                 <a:tc>
@@ -10070,7 +9995,7 @@
                     <a:bodyPr/>
                     <a:lstStyle/>
                     <a:p>
-                      <a:pPr algn="l" indent="0" marL="0">
+                      <a:pPr marL="0" indent="0" algn="l">
                         <a:buNone/>
                       </a:pPr>
                       <a:r>
@@ -10078,16 +10003,16 @@
                           <a:solidFill>
                             <a:srgbClr val="3A3A3A"/>
                           </a:solidFill>
-                          <a:latin typeface="Open Sans" pitchFamily="34" charset="0"/>
-                          <a:ea typeface="Open Sans" pitchFamily="34" charset="-122"/>
-                          <a:cs typeface="Open Sans" pitchFamily="34" charset="-120"/>
+                          <a:latin typeface="Open Sans Light" pitchFamily="34" charset="0"/>
+                          <a:ea typeface="Open Sans Light" pitchFamily="34" charset="-122"/>
+                          <a:cs typeface="Open Sans Light" pitchFamily="34" charset="-120"/>
                         </a:rPr>
                         <a:t>Employed with an observed hourly wage, ages 16–64</a:t>
                       </a:r>
                       <a:endParaRPr lang="en-US" sz="1150" dirty="0">
-                        <a:latin typeface="Open Sans" charset="0"/>
-                        <a:ea typeface="Open Sans" charset="0"/>
-                        <a:cs typeface="Open Sans" charset="0"/>
+                        <a:latin typeface="Open Sans Light" charset="0"/>
+                        <a:ea typeface="Open Sans Light" charset="0"/>
+                        <a:cs typeface="Open Sans Light" charset="0"/>
                       </a:endParaRPr>
                     </a:p>
                   </a:txBody>
@@ -10099,7 +10024,13 @@
                       <a:noFill/>
                     </a:lnR>
                     <a:lnT w="0" cap="flat" cmpd="sng" algn="ctr">
-                      <a:noFill/>
+                      <a:solidFill>
+                        <a:srgbClr val="D9D9D9"/>
+                      </a:solidFill>
+                      <a:prstDash val="solid"/>
+                      <a:round/>
+                      <a:headEnd type="none" w="med" len="med"/>
+                      <a:tailEnd type="none" w="med" len="med"/>
                     </a:lnT>
                     <a:lnB w="9525" cap="flat" cmpd="sng" algn="ctr">
                       <a:solidFill>
@@ -10120,7 +10051,7 @@
                     <a:bodyPr/>
                     <a:lstStyle/>
                     <a:p>
-                      <a:pPr algn="r" indent="0" marL="0">
+                      <a:pPr marL="0" indent="0" algn="r">
                         <a:buNone/>
                       </a:pPr>
                       <a:r>
@@ -10128,16 +10059,16 @@
                           <a:solidFill>
                             <a:srgbClr val="3A3A3A"/>
                           </a:solidFill>
-                          <a:latin typeface="Open Sans" pitchFamily="34" charset="0"/>
-                          <a:ea typeface="Open Sans" pitchFamily="34" charset="-122"/>
-                          <a:cs typeface="Open Sans" pitchFamily="34" charset="-120"/>
+                          <a:latin typeface="Open Sans Light" pitchFamily="34" charset="0"/>
+                          <a:ea typeface="Open Sans Light" pitchFamily="34" charset="-122"/>
+                          <a:cs typeface="Open Sans Light" pitchFamily="34" charset="-120"/>
                         </a:rPr>
                         <a:t>137.2</a:t>
                       </a:r>
                       <a:endParaRPr lang="en-US" sz="1150" dirty="0">
-                        <a:latin typeface="Open Sans" charset="0"/>
-                        <a:ea typeface="Open Sans" charset="0"/>
-                        <a:cs typeface="Open Sans" charset="0"/>
+                        <a:latin typeface="Open Sans Light" charset="0"/>
+                        <a:ea typeface="Open Sans Light" charset="0"/>
+                        <a:cs typeface="Open Sans Light" charset="0"/>
                       </a:endParaRPr>
                     </a:p>
                   </a:txBody>
@@ -10149,7 +10080,13 @@
                       <a:noFill/>
                     </a:lnR>
                     <a:lnT w="0" cap="flat" cmpd="sng" algn="ctr">
-                      <a:noFill/>
+                      <a:solidFill>
+                        <a:srgbClr val="D9D9D9"/>
+                      </a:solidFill>
+                      <a:prstDash val="solid"/>
+                      <a:round/>
+                      <a:headEnd type="none" w="med" len="med"/>
+                      <a:tailEnd type="none" w="med" len="med"/>
                     </a:lnT>
                     <a:lnB w="9525" cap="flat" cmpd="sng" algn="ctr">
                       <a:solidFill>
@@ -10165,6 +10102,11 @@
                     </a:solidFill>
                   </a:tcPr>
                 </a:tc>
+                <a:extLst>
+                  <a:ext uri="{0D108BD9-81ED-4DB2-BD59-A6C34878D82A}">
+                    <a16:rowId xmlns:a16="http://schemas.microsoft.com/office/drawing/2014/main" val="10001"/>
+                  </a:ext>
+                </a:extLst>
               </a:tr>
               <a:tr h="384048">
                 <a:tc>
@@ -10172,7 +10114,7 @@
                     <a:bodyPr/>
                     <a:lstStyle/>
                     <a:p>
-                      <a:pPr algn="l" indent="0" marL="0">
+                      <a:pPr marL="0" indent="0" algn="l">
                         <a:buNone/>
                       </a:pPr>
                       <a:r>
@@ -10180,16 +10122,16 @@
                           <a:solidFill>
                             <a:srgbClr val="3A3A3A"/>
                           </a:solidFill>
-                          <a:latin typeface="Open Sans" pitchFamily="34" charset="0"/>
-                          <a:ea typeface="Open Sans" pitchFamily="34" charset="-122"/>
-                          <a:cs typeface="Open Sans" pitchFamily="34" charset="-120"/>
+                          <a:latin typeface="Open Sans Light" pitchFamily="34" charset="0"/>
+                          <a:ea typeface="Open Sans Light" pitchFamily="34" charset="-122"/>
+                          <a:cs typeface="Open Sans Light" pitchFamily="34" charset="-120"/>
                         </a:rPr>
                         <a:t>Paid by the hour (excludes salaried workers)</a:t>
                       </a:r>
                       <a:endParaRPr lang="en-US" sz="1150" dirty="0">
-                        <a:latin typeface="Open Sans" charset="0"/>
-                        <a:ea typeface="Open Sans" charset="0"/>
-                        <a:cs typeface="Open Sans" charset="0"/>
+                        <a:latin typeface="Open Sans Light" charset="0"/>
+                        <a:ea typeface="Open Sans Light" charset="0"/>
+                        <a:cs typeface="Open Sans Light" charset="0"/>
                       </a:endParaRPr>
                     </a:p>
                   </a:txBody>
@@ -10200,8 +10142,14 @@
                     <a:lnR w="0" cap="flat" cmpd="sng" algn="ctr">
                       <a:noFill/>
                     </a:lnR>
-                    <a:lnT w="0" cap="flat" cmpd="sng" algn="ctr">
-                      <a:noFill/>
+                    <a:lnT w="9525" cap="flat" cmpd="sng" algn="ctr">
+                      <a:solidFill>
+                        <a:srgbClr val="D9D9D9"/>
+                      </a:solidFill>
+                      <a:prstDash val="solid"/>
+                      <a:round/>
+                      <a:headEnd type="none" w="med" len="med"/>
+                      <a:tailEnd type="none" w="med" len="med"/>
                     </a:lnT>
                     <a:lnB w="9525" cap="flat" cmpd="sng" algn="ctr">
                       <a:solidFill>
@@ -10222,7 +10170,7 @@
                     <a:bodyPr/>
                     <a:lstStyle/>
                     <a:p>
-                      <a:pPr algn="r" indent="0" marL="0">
+                      <a:pPr marL="0" indent="0" algn="r">
                         <a:buNone/>
                       </a:pPr>
                       <a:r>
@@ -10230,16 +10178,16 @@
                           <a:solidFill>
                             <a:srgbClr val="3A3A3A"/>
                           </a:solidFill>
-                          <a:latin typeface="Open Sans" pitchFamily="34" charset="0"/>
-                          <a:ea typeface="Open Sans" pitchFamily="34" charset="-122"/>
-                          <a:cs typeface="Open Sans" pitchFamily="34" charset="-120"/>
+                          <a:latin typeface="Open Sans Light" pitchFamily="34" charset="0"/>
+                          <a:ea typeface="Open Sans Light" pitchFamily="34" charset="-122"/>
+                          <a:cs typeface="Open Sans Light" pitchFamily="34" charset="-120"/>
                         </a:rPr>
                         <a:t>76.0</a:t>
                       </a:r>
                       <a:endParaRPr lang="en-US" sz="1150" dirty="0">
-                        <a:latin typeface="Open Sans" charset="0"/>
-                        <a:ea typeface="Open Sans" charset="0"/>
-                        <a:cs typeface="Open Sans" charset="0"/>
+                        <a:latin typeface="Open Sans Light" charset="0"/>
+                        <a:ea typeface="Open Sans Light" charset="0"/>
+                        <a:cs typeface="Open Sans Light" charset="0"/>
                       </a:endParaRPr>
                     </a:p>
                   </a:txBody>
@@ -10250,8 +10198,14 @@
                     <a:lnR w="0" cap="flat" cmpd="sng" algn="ctr">
                       <a:noFill/>
                     </a:lnR>
-                    <a:lnT w="0" cap="flat" cmpd="sng" algn="ctr">
-                      <a:noFill/>
+                    <a:lnT w="9525" cap="flat" cmpd="sng" algn="ctr">
+                      <a:solidFill>
+                        <a:srgbClr val="D9D9D9"/>
+                      </a:solidFill>
+                      <a:prstDash val="solid"/>
+                      <a:round/>
+                      <a:headEnd type="none" w="med" len="med"/>
+                      <a:tailEnd type="none" w="med" len="med"/>
                     </a:lnT>
                     <a:lnB w="9525" cap="flat" cmpd="sng" algn="ctr">
                       <a:solidFill>
@@ -10267,6 +10221,11 @@
                     </a:solidFill>
                   </a:tcPr>
                 </a:tc>
+                <a:extLst>
+                  <a:ext uri="{0D108BD9-81ED-4DB2-BD59-A6C34878D82A}">
+                    <a16:rowId xmlns:a16="http://schemas.microsoft.com/office/drawing/2014/main" val="10002"/>
+                  </a:ext>
+                </a:extLst>
               </a:tr>
               <a:tr h="384048">
                 <a:tc>
@@ -10274,7 +10233,7 @@
                     <a:bodyPr/>
                     <a:lstStyle/>
                     <a:p>
-                      <a:pPr algn="l" indent="0" marL="0">
+                      <a:pPr marL="0" indent="0" algn="l">
                         <a:buNone/>
                       </a:pPr>
                       <a:r>
@@ -10282,16 +10241,16 @@
                           <a:solidFill>
                             <a:srgbClr val="3A3A3A"/>
                           </a:solidFill>
-                          <a:latin typeface="Open Sans" pitchFamily="34" charset="0"/>
-                          <a:ea typeface="Open Sans" pitchFamily="34" charset="-122"/>
-                          <a:cs typeface="Open Sans" pitchFamily="34" charset="-120"/>
+                          <a:latin typeface="Open Sans Light" pitchFamily="34" charset="0"/>
+                          <a:ea typeface="Open Sans Light" pitchFamily="34" charset="-122"/>
+                          <a:cs typeface="Open Sans Light" pitchFamily="34" charset="-120"/>
                         </a:rPr>
                         <a:t>Less dependent children under 19</a:t>
                       </a:r>
                       <a:endParaRPr lang="en-US" sz="1150" dirty="0">
-                        <a:latin typeface="Open Sans" charset="0"/>
-                        <a:ea typeface="Open Sans" charset="0"/>
-                        <a:cs typeface="Open Sans" charset="0"/>
+                        <a:latin typeface="Open Sans Light" charset="0"/>
+                        <a:ea typeface="Open Sans Light" charset="0"/>
+                        <a:cs typeface="Open Sans Light" charset="0"/>
                       </a:endParaRPr>
                     </a:p>
                   </a:txBody>
@@ -10302,8 +10261,14 @@
                     <a:lnR w="0" cap="flat" cmpd="sng" algn="ctr">
                       <a:noFill/>
                     </a:lnR>
-                    <a:lnT w="0" cap="flat" cmpd="sng" algn="ctr">
-                      <a:noFill/>
+                    <a:lnT w="9525" cap="flat" cmpd="sng" algn="ctr">
+                      <a:solidFill>
+                        <a:srgbClr val="D9D9D9"/>
+                      </a:solidFill>
+                      <a:prstDash val="solid"/>
+                      <a:round/>
+                      <a:headEnd type="none" w="med" len="med"/>
+                      <a:tailEnd type="none" w="med" len="med"/>
                     </a:lnT>
                     <a:lnB w="9525" cap="flat" cmpd="sng" algn="ctr">
                       <a:solidFill>
@@ -10324,7 +10289,7 @@
                     <a:bodyPr/>
                     <a:lstStyle/>
                     <a:p>
-                      <a:pPr algn="r" indent="0" marL="0">
+                      <a:pPr marL="0" indent="0" algn="r">
                         <a:buNone/>
                       </a:pPr>
                       <a:r>
@@ -10332,16 +10297,16 @@
                           <a:solidFill>
                             <a:srgbClr val="3A3A3A"/>
                           </a:solidFill>
-                          <a:latin typeface="Open Sans" pitchFamily="34" charset="0"/>
-                          <a:ea typeface="Open Sans" pitchFamily="34" charset="-122"/>
-                          <a:cs typeface="Open Sans" pitchFamily="34" charset="-120"/>
+                          <a:latin typeface="Open Sans Light" pitchFamily="34" charset="0"/>
+                          <a:ea typeface="Open Sans Light" pitchFamily="34" charset="-122"/>
+                          <a:cs typeface="Open Sans Light" pitchFamily="34" charset="-120"/>
                         </a:rPr>
                         <a:t>73.3</a:t>
                       </a:r>
                       <a:endParaRPr lang="en-US" sz="1150" dirty="0">
-                        <a:latin typeface="Open Sans" charset="0"/>
-                        <a:ea typeface="Open Sans" charset="0"/>
-                        <a:cs typeface="Open Sans" charset="0"/>
+                        <a:latin typeface="Open Sans Light" charset="0"/>
+                        <a:ea typeface="Open Sans Light" charset="0"/>
+                        <a:cs typeface="Open Sans Light" charset="0"/>
                       </a:endParaRPr>
                     </a:p>
                   </a:txBody>
@@ -10352,8 +10317,14 @@
                     <a:lnR w="0" cap="flat" cmpd="sng" algn="ctr">
                       <a:noFill/>
                     </a:lnR>
-                    <a:lnT w="0" cap="flat" cmpd="sng" algn="ctr">
-                      <a:noFill/>
+                    <a:lnT w="9525" cap="flat" cmpd="sng" algn="ctr">
+                      <a:solidFill>
+                        <a:srgbClr val="D9D9D9"/>
+                      </a:solidFill>
+                      <a:prstDash val="solid"/>
+                      <a:round/>
+                      <a:headEnd type="none" w="med" len="med"/>
+                      <a:tailEnd type="none" w="med" len="med"/>
                     </a:lnT>
                     <a:lnB w="9525" cap="flat" cmpd="sng" algn="ctr">
                       <a:solidFill>
@@ -10369,6 +10340,11 @@
                     </a:solidFill>
                   </a:tcPr>
                 </a:tc>
+                <a:extLst>
+                  <a:ext uri="{0D108BD9-81ED-4DB2-BD59-A6C34878D82A}">
+                    <a16:rowId xmlns:a16="http://schemas.microsoft.com/office/drawing/2014/main" val="10003"/>
+                  </a:ext>
+                </a:extLst>
               </a:tr>
               <a:tr h="384048">
                 <a:tc>
@@ -10376,7 +10352,7 @@
                     <a:bodyPr/>
                     <a:lstStyle/>
                     <a:p>
-                      <a:pPr algn="l" indent="0" marL="0">
+                      <a:pPr marL="0" indent="0" algn="l">
                         <a:buNone/>
                       </a:pPr>
                       <a:r>
@@ -10384,16 +10360,16 @@
                           <a:solidFill>
                             <a:srgbClr val="3A3A3A"/>
                           </a:solidFill>
-                          <a:latin typeface="Open Sans" pitchFamily="34" charset="0"/>
-                          <a:ea typeface="Open Sans" pitchFamily="34" charset="-122"/>
-                          <a:cs typeface="Open Sans" pitchFamily="34" charset="-120"/>
+                          <a:latin typeface="Open Sans ExtraBold" pitchFamily="34" charset="0"/>
+                          <a:ea typeface="Open Sans ExtraBold" pitchFamily="34" charset="-122"/>
+                          <a:cs typeface="Open Sans ExtraBold" pitchFamily="34" charset="-120"/>
                         </a:rPr>
                         <a:t>Earning below the $16.80 target — eligible</a:t>
                       </a:r>
                       <a:endParaRPr lang="en-US" sz="1150" dirty="0">
-                        <a:latin typeface="Open Sans" charset="0"/>
-                        <a:ea typeface="Open Sans" charset="0"/>
-                        <a:cs typeface="Open Sans" charset="0"/>
+                        <a:latin typeface="Open Sans Light" charset="0"/>
+                        <a:ea typeface="Open Sans Light" charset="0"/>
+                        <a:cs typeface="Open Sans Light" charset="0"/>
                       </a:endParaRPr>
                     </a:p>
                   </a:txBody>
@@ -10404,8 +10380,14 @@
                     <a:lnR w="0" cap="flat" cmpd="sng" algn="ctr">
                       <a:noFill/>
                     </a:lnR>
-                    <a:lnT w="0" cap="flat" cmpd="sng" algn="ctr">
-                      <a:noFill/>
+                    <a:lnT w="9525" cap="flat" cmpd="sng" algn="ctr">
+                      <a:solidFill>
+                        <a:srgbClr val="D9D9D9"/>
+                      </a:solidFill>
+                      <a:prstDash val="solid"/>
+                      <a:round/>
+                      <a:headEnd type="none" w="med" len="med"/>
+                      <a:tailEnd type="none" w="med" len="med"/>
                     </a:lnT>
                     <a:lnB w="9525" cap="flat" cmpd="sng" algn="ctr">
                       <a:solidFill>
@@ -10426,7 +10408,7 @@
                     <a:bodyPr/>
                     <a:lstStyle/>
                     <a:p>
-                      <a:pPr algn="r" indent="0" marL="0">
+                      <a:pPr marL="0" indent="0" algn="r">
                         <a:buNone/>
                       </a:pPr>
                       <a:r>
@@ -10434,16 +10416,16 @@
                           <a:solidFill>
                             <a:srgbClr val="024140"/>
                           </a:solidFill>
-                          <a:latin typeface="Open Sans" pitchFamily="34" charset="0"/>
-                          <a:ea typeface="Open Sans" pitchFamily="34" charset="-122"/>
-                          <a:cs typeface="Open Sans" pitchFamily="34" charset="-120"/>
+                          <a:latin typeface="Open Sans ExtraBold" pitchFamily="34" charset="0"/>
+                          <a:ea typeface="Open Sans ExtraBold" pitchFamily="34" charset="-122"/>
+                          <a:cs typeface="Open Sans ExtraBold" pitchFamily="34" charset="-120"/>
                         </a:rPr>
                         <a:t>15.9</a:t>
                       </a:r>
                       <a:endParaRPr lang="en-US" sz="1150" dirty="0">
-                        <a:latin typeface="Open Sans" charset="0"/>
-                        <a:ea typeface="Open Sans" charset="0"/>
-                        <a:cs typeface="Open Sans" charset="0"/>
+                        <a:latin typeface="Open Sans Light" charset="0"/>
+                        <a:ea typeface="Open Sans Light" charset="0"/>
+                        <a:cs typeface="Open Sans Light" charset="0"/>
                       </a:endParaRPr>
                     </a:p>
                   </a:txBody>
@@ -10454,8 +10436,14 @@
                     <a:lnR w="0" cap="flat" cmpd="sng" algn="ctr">
                       <a:noFill/>
                     </a:lnR>
-                    <a:lnT w="0" cap="flat" cmpd="sng" algn="ctr">
-                      <a:noFill/>
+                    <a:lnT w="9525" cap="flat" cmpd="sng" algn="ctr">
+                      <a:solidFill>
+                        <a:srgbClr val="D9D9D9"/>
+                      </a:solidFill>
+                      <a:prstDash val="solid"/>
+                      <a:round/>
+                      <a:headEnd type="none" w="med" len="med"/>
+                      <a:tailEnd type="none" w="med" len="med"/>
                     </a:lnT>
                     <a:lnB w="9525" cap="flat" cmpd="sng" algn="ctr">
                       <a:solidFill>
@@ -10471,6 +10459,11 @@
                     </a:solidFill>
                   </a:tcPr>
                 </a:tc>
+                <a:extLst>
+                  <a:ext uri="{0D108BD9-81ED-4DB2-BD59-A6C34878D82A}">
+                    <a16:rowId xmlns:a16="http://schemas.microsoft.com/office/drawing/2014/main" val="10004"/>
+                  </a:ext>
+                </a:extLst>
               </a:tr>
             </a:tbl>
           </a:graphicData>
@@ -10497,7 +10490,7 @@
           <a:bodyPr wrap="square" lIns="0" tIns="0" rIns="0" bIns="0" rtlCol="0" anchor="t"/>
           <a:lstStyle/>
           <a:p>
-            <a:pPr indent="0" marL="0">
+            <a:pPr marL="0" indent="0">
               <a:lnSpc>
                 <a:spcPct val="105000"/>
               </a:lnSpc>
@@ -10508,16 +10501,16 @@
                 <a:solidFill>
                   <a:srgbClr val="024140"/>
                 </a:solidFill>
-                <a:latin typeface="Open Sans" pitchFamily="34" charset="0"/>
-                <a:ea typeface="Open Sans" pitchFamily="34" charset="-122"/>
-                <a:cs typeface="Open Sans" pitchFamily="34" charset="-120"/>
+                <a:latin typeface="Open Sans ExtraBold" pitchFamily="34" charset="0"/>
+                <a:ea typeface="Open Sans ExtraBold" pitchFamily="34" charset="-122"/>
+                <a:cs typeface="Open Sans ExtraBold" pitchFamily="34" charset="-120"/>
               </a:rPr>
               <a:t>Two behavioral models, on purpose</a:t>
             </a:r>
             <a:endParaRPr lang="en-US" sz="1400" dirty="0"/>
           </a:p>
           <a:p>
-            <a:pPr indent="0" marL="0">
+            <a:pPr marL="0" indent="0">
               <a:lnSpc>
                 <a:spcPct val="105000"/>
               </a:lnSpc>
@@ -10528,16 +10521,16 @@
                 <a:solidFill>
                   <a:srgbClr val="3A3A3A"/>
                 </a:solidFill>
-                <a:latin typeface="Open Sans" pitchFamily="34" charset="0"/>
-                <a:ea typeface="Open Sans" pitchFamily="34" charset="-122"/>
-                <a:cs typeface="Open Sans" pitchFamily="34" charset="-120"/>
+                <a:latin typeface="Open Sans Light" pitchFamily="34" charset="0"/>
+                <a:ea typeface="Open Sans Light" pitchFamily="34" charset="-122"/>
+                <a:cs typeface="Open Sans Light" pitchFamily="34" charset="-120"/>
               </a:rPr>
               <a:t>Reduced-form benchmark (EITC/CBO elasticities) and a structural search-and-matching model land within a few $B on net cost — the strongest robustness fact in the project.</a:t>
             </a:r>
             <a:endParaRPr lang="en-US" sz="1400" dirty="0"/>
           </a:p>
           <a:p>
-            <a:pPr indent="0" marL="0">
+            <a:pPr marL="0" indent="0">
               <a:lnSpc>
                 <a:spcPct val="105000"/>
               </a:lnSpc>
@@ -10551,16 +10544,16 @@
                 <a:solidFill>
                   <a:srgbClr val="024140"/>
                 </a:solidFill>
-                <a:latin typeface="Open Sans" pitchFamily="34" charset="0"/>
-                <a:ea typeface="Open Sans" pitchFamily="34" charset="-122"/>
-                <a:cs typeface="Open Sans" pitchFamily="34" charset="-120"/>
+                <a:latin typeface="Open Sans ExtraBold" pitchFamily="34" charset="0"/>
+                <a:ea typeface="Open Sans ExtraBold" pitchFamily="34" charset="-122"/>
+                <a:cs typeface="Open Sans ExtraBold" pitchFamily="34" charset="-120"/>
               </a:rPr>
               <a:t>One design assumption runs through everything</a:t>
             </a:r>
             <a:endParaRPr lang="en-US" sz="1400" dirty="0"/>
           </a:p>
           <a:p>
-            <a:pPr indent="0" marL="0">
+            <a:pPr marL="0" indent="0">
               <a:lnSpc>
                 <a:spcPct val="105000"/>
               </a:lnSpc>
@@ -10571,9 +10564,9 @@
                 <a:solidFill>
                   <a:srgbClr val="3A3A3A"/>
                 </a:solidFill>
-                <a:latin typeface="Open Sans" pitchFamily="34" charset="0"/>
-                <a:ea typeface="Open Sans" pitchFamily="34" charset="-122"/>
-                <a:cs typeface="Open Sans" pitchFamily="34" charset="-120"/>
+                <a:latin typeface="Open Sans Light" pitchFamily="34" charset="0"/>
+                <a:ea typeface="Open Sans Light" pitchFamily="34" charset="-122"/>
+                <a:cs typeface="Open Sans Light" pitchFamily="34" charset="-120"/>
               </a:rPr>
               <a:t>The subsidy is modeled as taxable income that counts against means-tested eligibility — the conservative reading. We report its consequences rather than assume them away.</a:t>
             </a:r>
@@ -10602,7 +10595,7 @@
           <a:bodyPr wrap="square" lIns="0" tIns="0" rIns="0" bIns="0" rtlCol="0" anchor="ctr"/>
           <a:lstStyle/>
           <a:p>
-            <a:pPr indent="0" marL="0">
+            <a:pPr marL="0" indent="0">
               <a:buNone/>
             </a:pPr>
             <a:r>
@@ -10610,9 +10603,9 @@
                 <a:solidFill>
                   <a:srgbClr val="8A8A8A"/>
                 </a:solidFill>
-                <a:latin typeface="Open Sans" pitchFamily="34" charset="0"/>
-                <a:ea typeface="Open Sans" pitchFamily="34" charset="-122"/>
-                <a:cs typeface="Open Sans" pitchFamily="34" charset="-120"/>
+                <a:latin typeface="Open Sans Light" pitchFamily="34" charset="0"/>
+                <a:ea typeface="Open Sans Light" pitchFamily="34" charset="-122"/>
+                <a:cs typeface="Open Sans Light" pitchFamily="34" charset="-120"/>
               </a:rPr>
               <a:t>Each row is a period-average weighted headcount (EARNWT). Source: EIG simulation, 2026; CPS ORG via IPUMS-CPS.</a:t>
             </a:r>
@@ -10636,6 +10629,7 @@
         <a:solidFill>
           <a:srgbClr val="FFFFFF"/>
         </a:solidFill>
+        <a:effectLst/>
       </p:bgPr>
     </p:bg>
     <p:spTree>
@@ -10673,17 +10667,17 @@
           <a:bodyPr wrap="square" lIns="0" tIns="0" rIns="0" bIns="0" rtlCol="0" anchor="ctr"/>
           <a:lstStyle/>
           <a:p>
-            <a:pPr algn="l" indent="0" marL="0">
+            <a:pPr marL="0" indent="0" algn="l">
               <a:buNone/>
             </a:pPr>
             <a:r>
-              <a:rPr lang="en-US" sz="1100" b="1" spc="200" kern="0" dirty="0">
+              <a:rPr lang="en-US" sz="1100" b="1" kern="0" spc="200" dirty="0">
                 <a:solidFill>
                   <a:srgbClr val="19644D"/>
                 </a:solidFill>
-                <a:latin typeface="Open Sans" pitchFamily="34" charset="0"/>
-                <a:ea typeface="Open Sans" pitchFamily="34" charset="-122"/>
-                <a:cs typeface="Open Sans" pitchFamily="34" charset="-120"/>
+                <a:latin typeface="Open Sans ExtraBold" pitchFamily="34" charset="0"/>
+                <a:ea typeface="Open Sans ExtraBold" pitchFamily="34" charset="-122"/>
+                <a:cs typeface="Open Sans ExtraBold" pitchFamily="34" charset="-120"/>
               </a:rPr>
               <a:t>TECHNICAL APPENDIX · THE ELIGIBLE BASE</a:t>
             </a:r>
@@ -10712,7 +10706,7 @@
           <a:bodyPr wrap="square" lIns="0" tIns="0" rIns="0" bIns="0" rtlCol="0" anchor="t"/>
           <a:lstStyle/>
           <a:p>
-            <a:pPr algn="l" indent="0" marL="0">
+            <a:pPr marL="0" indent="0" algn="l">
               <a:lnSpc>
                 <a:spcPct val="98000"/>
               </a:lnSpc>
@@ -10754,7 +10748,7 @@
           <a:bodyPr wrap="square" lIns="0" tIns="0" rIns="0" bIns="0" rtlCol="0" anchor="t"/>
           <a:lstStyle/>
           <a:p>
-            <a:pPr indent="0" marL="0">
+            <a:pPr marL="0" indent="0">
               <a:lnSpc>
                 <a:spcPct val="100000"/>
               </a:lnSpc>
@@ -10765,9 +10759,9 @@
                 <a:solidFill>
                   <a:srgbClr val="3A3A3A"/>
                 </a:solidFill>
-                <a:latin typeface="Open Sans" pitchFamily="34" charset="0"/>
-                <a:ea typeface="Open Sans" pitchFamily="34" charset="-122"/>
-                <a:cs typeface="Open Sans" pitchFamily="34" charset="-120"/>
+                <a:latin typeface="Open Sans ExtraBold" pitchFamily="34" charset="0"/>
+                <a:ea typeface="Open Sans ExtraBold" pitchFamily="34" charset="-122"/>
+                <a:cs typeface="Open Sans ExtraBold" pitchFamily="34" charset="-120"/>
               </a:rPr>
               <a:t>Reported wages heap on round-dollar values; the $16.80 target sits on a dense stretch.</a:t>
             </a:r>
@@ -10777,14 +10771,14 @@
       </p:sp>
       <p:pic>
         <p:nvPicPr>
-          <p:cNvPr id="5" name="Image 0" descr="/Users/benjamin/Documents/GitHub/eig-wagesubsidy-policy-sim/output/figures/slides/figA1_wage_distribution.png">    </p:cNvPr>
+          <p:cNvPr id="5" name="Image 0" descr="/Users/benjamin/Documents/GitHub/eig-wagesubsidy-policy-sim/output/figures/slides/figA1_wage_distribution.png"/>
           <p:cNvPicPr>
             <a:picLocks noChangeAspect="1"/>
           </p:cNvPicPr>
           <p:nvPr/>
         </p:nvPicPr>
         <p:blipFill>
-          <a:blip r:embed="rId1"/>
+          <a:blip r:embed="rId3"/>
           <a:stretch>
             <a:fillRect/>
           </a:stretch>
@@ -10820,7 +10814,7 @@
           <a:bodyPr wrap="square" lIns="0" tIns="0" rIns="0" bIns="0" rtlCol="0" anchor="ctr"/>
           <a:lstStyle/>
           <a:p>
-            <a:pPr indent="0" marL="0">
+            <a:pPr marL="0" indent="0">
               <a:buNone/>
             </a:pPr>
             <a:r>
@@ -10828,9 +10822,9 @@
                 <a:solidFill>
                   <a:srgbClr val="8A8A8A"/>
                 </a:solidFill>
-                <a:latin typeface="Open Sans" pitchFamily="34" charset="0"/>
-                <a:ea typeface="Open Sans" pitchFamily="34" charset="-122"/>
-                <a:cs typeface="Open Sans" pitchFamily="34" charset="-120"/>
+                <a:latin typeface="Open Sans Light" pitchFamily="34" charset="0"/>
+                <a:ea typeface="Open Sans Light" pitchFamily="34" charset="-122"/>
+                <a:cs typeface="Open Sans Light" pitchFamily="34" charset="-120"/>
               </a:rPr>
               <a:t>Source: Economic Innovation Group 80-80 wage subsidy simulation, 2026.</a:t>
             </a:r>
@@ -10854,6 +10848,7 @@
         <a:solidFill>
           <a:srgbClr val="024140"/>
         </a:solidFill>
+        <a:effectLst/>
       </p:bgPr>
     </p:bg>
     <p:spTree>
@@ -10891,7 +10886,7 @@
           <a:bodyPr wrap="square" lIns="0" tIns="0" rIns="0" bIns="0" rtlCol="0" anchor="t"/>
           <a:lstStyle/>
           <a:p>
-            <a:pPr algn="l" indent="0" marL="0">
+            <a:pPr marL="0" indent="0" algn="l">
               <a:buNone/>
             </a:pPr>
             <a:r>
@@ -10930,7 +10925,7 @@
           <a:bodyPr wrap="square" lIns="0" tIns="0" rIns="0" bIns="0" rtlCol="0" anchor="t"/>
           <a:lstStyle/>
           <a:p>
-            <a:pPr algn="l" indent="0" marL="0">
+            <a:pPr marL="0" indent="0" algn="l">
               <a:lnSpc>
                 <a:spcPct val="100000"/>
               </a:lnSpc>
@@ -10972,7 +10967,7 @@
           <a:bodyPr wrap="square" lIns="0" tIns="0" rIns="0" bIns="0" rtlCol="0" anchor="t"/>
           <a:lstStyle/>
           <a:p>
-            <a:pPr algn="l" indent="0" marL="0">
+            <a:pPr marL="0" indent="0" algn="l">
               <a:buNone/>
             </a:pPr>
             <a:r>
@@ -10980,9 +10975,9 @@
                 <a:solidFill>
                   <a:srgbClr val="B3D6DD"/>
                 </a:solidFill>
-                <a:latin typeface="Open Sans" pitchFamily="34" charset="0"/>
-                <a:ea typeface="Open Sans" pitchFamily="34" charset="-122"/>
-                <a:cs typeface="Open Sans" pitchFamily="34" charset="-120"/>
+                <a:latin typeface="Open Sans Light" pitchFamily="34" charset="0"/>
+                <a:ea typeface="Open Sans Light" pitchFamily="34" charset="-122"/>
+                <a:cs typeface="Open Sans Light" pitchFamily="34" charset="-120"/>
               </a:rPr>
               <a:t>Start static, then let people respond. Reduced-form and structural models land in nearly the same place.</a:t>
             </a:r>
@@ -11006,6 +11001,7 @@
         <a:solidFill>
           <a:srgbClr val="FFFFFF"/>
         </a:solidFill>
+        <a:effectLst/>
       </p:bgPr>
     </p:bg>
     <p:spTree>
@@ -11043,17 +11039,17 @@
           <a:bodyPr wrap="square" lIns="0" tIns="0" rIns="0" bIns="0" rtlCol="0" anchor="ctr"/>
           <a:lstStyle/>
           <a:p>
-            <a:pPr algn="l" indent="0" marL="0">
+            <a:pPr marL="0" indent="0" algn="l">
               <a:buNone/>
             </a:pPr>
             <a:r>
-              <a:rPr lang="en-US" sz="1100" b="1" spc="200" kern="0" dirty="0">
+              <a:rPr lang="en-US" sz="1100" b="1" kern="0" spc="200" dirty="0">
                 <a:solidFill>
                   <a:srgbClr val="19644D"/>
                 </a:solidFill>
-                <a:latin typeface="Open Sans" pitchFamily="34" charset="0"/>
-                <a:ea typeface="Open Sans" pitchFamily="34" charset="-122"/>
-                <a:cs typeface="Open Sans" pitchFamily="34" charset="-120"/>
+                <a:latin typeface="Open Sans ExtraBold" pitchFamily="34" charset="0"/>
+                <a:ea typeface="Open Sans ExtraBold" pitchFamily="34" charset="-122"/>
+                <a:cs typeface="Open Sans ExtraBold" pitchFamily="34" charset="-120"/>
               </a:rPr>
               <a:t>WHAT DOES IT COST?</a:t>
             </a:r>
@@ -11082,7 +11078,7 @@
           <a:bodyPr wrap="square" lIns="0" tIns="0" rIns="0" bIns="0" rtlCol="0" anchor="t"/>
           <a:lstStyle/>
           <a:p>
-            <a:pPr algn="l" indent="0" marL="0">
+            <a:pPr marL="0" indent="0" algn="l">
               <a:lnSpc>
                 <a:spcPct val="98000"/>
               </a:lnSpc>
@@ -11124,7 +11120,7 @@
           <a:bodyPr wrap="square" lIns="0" tIns="0" rIns="0" bIns="0" rtlCol="0" anchor="t"/>
           <a:lstStyle/>
           <a:p>
-            <a:pPr indent="0" marL="0">
+            <a:pPr marL="0" indent="0">
               <a:lnSpc>
                 <a:spcPct val="100000"/>
               </a:lnSpc>
@@ -11135,9 +11131,9 @@
                 <a:solidFill>
                   <a:srgbClr val="3A3A3A"/>
                 </a:solidFill>
-                <a:latin typeface="Open Sans" pitchFamily="34" charset="0"/>
-                <a:ea typeface="Open Sans" pitchFamily="34" charset="-122"/>
-                <a:cs typeface="Open Sans" pitchFamily="34" charset="-120"/>
+                <a:latin typeface="Open Sans ExtraBold" pitchFamily="34" charset="0"/>
+                <a:ea typeface="Open Sans ExtraBold" pitchFamily="34" charset="-122"/>
+                <a:cs typeface="Open Sans ExtraBold" pitchFamily="34" charset="-120"/>
               </a:rPr>
               <a:t>Recaptured taxes and SNAP/Medicaid savings, partly offset by higher ACA premium credits.</a:t>
             </a:r>
@@ -11147,14 +11143,14 @@
       </p:sp>
       <p:pic>
         <p:nvPicPr>
-          <p:cNvPr id="5" name="Image 0" descr="/Users/benjamin/Documents/GitHub/eig-wagesubsidy-policy-sim/output/figures/slides/fig02_cost_waterfall.png">    </p:cNvPr>
+          <p:cNvPr id="5" name="Image 0" descr="/Users/benjamin/Documents/GitHub/eig-wagesubsidy-policy-sim/output/figures/slides/fig02_cost_waterfall.png"/>
           <p:cNvPicPr>
             <a:picLocks noChangeAspect="1"/>
           </p:cNvPicPr>
           <p:nvPr/>
         </p:nvPicPr>
         <p:blipFill>
-          <a:blip r:embed="rId1"/>
+          <a:blip r:embed="rId3"/>
           <a:stretch>
             <a:fillRect/>
           </a:stretch>
@@ -11190,7 +11186,7 @@
           <a:bodyPr wrap="square" lIns="0" tIns="0" rIns="0" bIns="0" rtlCol="0" anchor="ctr"/>
           <a:lstStyle/>
           <a:p>
-            <a:pPr indent="0" marL="0">
+            <a:pPr marL="0" indent="0">
               <a:buNone/>
             </a:pPr>
             <a:r>
@@ -11198,9 +11194,9 @@
                 <a:solidFill>
                   <a:srgbClr val="8A8A8A"/>
                 </a:solidFill>
-                <a:latin typeface="Open Sans" pitchFamily="34" charset="0"/>
-                <a:ea typeface="Open Sans" pitchFamily="34" charset="-122"/>
-                <a:cs typeface="Open Sans" pitchFamily="34" charset="-120"/>
+                <a:latin typeface="Open Sans Light" pitchFamily="34" charset="0"/>
+                <a:ea typeface="Open Sans Light" pitchFamily="34" charset="-122"/>
+                <a:cs typeface="Open Sans Light" pitchFamily="34" charset="-120"/>
               </a:rPr>
               <a:t>Source: Economic Innovation Group 80-80 wage subsidy simulation, 2026.</a:t>
             </a:r>
@@ -11224,6 +11220,7 @@
         <a:solidFill>
           <a:srgbClr val="FFFFFF"/>
         </a:solidFill>
+        <a:effectLst/>
       </p:bgPr>
     </p:bg>
     <p:spTree>
@@ -11261,17 +11258,17 @@
           <a:bodyPr wrap="square" lIns="0" tIns="0" rIns="0" bIns="0" rtlCol="0" anchor="ctr"/>
           <a:lstStyle/>
           <a:p>
-            <a:pPr algn="l" indent="0" marL="0">
+            <a:pPr marL="0" indent="0" algn="l">
               <a:buNone/>
             </a:pPr>
             <a:r>
-              <a:rPr lang="en-US" sz="1100" b="1" spc="200" kern="0" dirty="0">
+              <a:rPr lang="en-US" sz="1100" b="1" kern="0" spc="200" dirty="0">
                 <a:solidFill>
                   <a:srgbClr val="19644D"/>
                 </a:solidFill>
-                <a:latin typeface="Open Sans" pitchFamily="34" charset="0"/>
-                <a:ea typeface="Open Sans" pitchFamily="34" charset="-122"/>
-                <a:cs typeface="Open Sans" pitchFamily="34" charset="-120"/>
+                <a:latin typeface="Open Sans ExtraBold" pitchFamily="34" charset="0"/>
+                <a:ea typeface="Open Sans ExtraBold" pitchFamily="34" charset="-122"/>
+                <a:cs typeface="Open Sans ExtraBold" pitchFamily="34" charset="-120"/>
               </a:rPr>
               <a:t>WHAT DOES IT COST?</a:t>
             </a:r>
@@ -11300,7 +11297,7 @@
           <a:bodyPr wrap="square" lIns="0" tIns="0" rIns="0" bIns="0" rtlCol="0" anchor="t"/>
           <a:lstStyle/>
           <a:p>
-            <a:pPr algn="l" indent="0" marL="0">
+            <a:pPr marL="0" indent="0" algn="l">
               <a:lnSpc>
                 <a:spcPct val="98000"/>
               </a:lnSpc>
@@ -11337,16 +11334,34 @@
         </p:nvGraphicFramePr>
         <p:xfrm>
           <a:off x="457200" y="1417320"/>
-          <a:ext cx="8229600" cy="914400"/>
+          <a:ext cx="8229600" cy="2633472"/>
         </p:xfrm>
         <a:graphic>
           <a:graphicData uri="http://schemas.openxmlformats.org/drawingml/2006/table">
             <a:tbl>
               <a:tblPr/>
               <a:tblGrid>
-                <a:gridCol w="4937760"/>
-                <a:gridCol w="1645920"/>
-                <a:gridCol w="1645920"/>
+                <a:gridCol w="4937760">
+                  <a:extLst>
+                    <a:ext uri="{9D8B030D-6E8A-4147-A177-3AD203B41FA5}">
+                      <a16:colId xmlns:a16="http://schemas.microsoft.com/office/drawing/2014/main" val="20000"/>
+                    </a:ext>
+                  </a:extLst>
+                </a:gridCol>
+                <a:gridCol w="1645920">
+                  <a:extLst>
+                    <a:ext uri="{9D8B030D-6E8A-4147-A177-3AD203B41FA5}">
+                      <a16:colId xmlns:a16="http://schemas.microsoft.com/office/drawing/2014/main" val="20001"/>
+                    </a:ext>
+                  </a:extLst>
+                </a:gridCol>
+                <a:gridCol w="1645920">
+                  <a:extLst>
+                    <a:ext uri="{9D8B030D-6E8A-4147-A177-3AD203B41FA5}">
+                      <a16:colId xmlns:a16="http://schemas.microsoft.com/office/drawing/2014/main" val="20002"/>
+                    </a:ext>
+                  </a:extLst>
+                </a:gridCol>
               </a:tblGrid>
               <a:tr h="329184">
                 <a:tc>
@@ -11354,7 +11369,7 @@
                     <a:bodyPr/>
                     <a:lstStyle/>
                     <a:p>
-                      <a:pPr algn="l" indent="0" marL="0">
+                      <a:pPr marL="0" indent="0" algn="l">
                         <a:buNone/>
                       </a:pPr>
                       <a:r>
@@ -11362,16 +11377,16 @@
                           <a:solidFill>
                             <a:srgbClr val="FFFFFF"/>
                           </a:solidFill>
-                          <a:latin typeface="Open Sans" pitchFamily="34" charset="0"/>
-                          <a:ea typeface="Open Sans" pitchFamily="34" charset="-122"/>
-                          <a:cs typeface="Open Sans" pitchFamily="34" charset="-120"/>
+                          <a:latin typeface="Open Sans ExtraBold" pitchFamily="34" charset="0"/>
+                          <a:ea typeface="Open Sans ExtraBold" pitchFamily="34" charset="-122"/>
+                          <a:cs typeface="Open Sans ExtraBold" pitchFamily="34" charset="-120"/>
                         </a:rPr>
                         <a:t>Scenario</a:t>
                       </a:r>
                       <a:endParaRPr lang="en-US" sz="1250" dirty="0">
-                        <a:latin typeface="Open Sans" charset="0"/>
-                        <a:ea typeface="Open Sans" charset="0"/>
-                        <a:cs typeface="Open Sans" charset="0"/>
+                        <a:latin typeface="Open Sans Light" charset="0"/>
+                        <a:ea typeface="Open Sans Light" charset="0"/>
+                        <a:cs typeface="Open Sans Light" charset="0"/>
                       </a:endParaRPr>
                     </a:p>
                   </a:txBody>
@@ -11404,7 +11419,7 @@
                     <a:bodyPr/>
                     <a:lstStyle/>
                     <a:p>
-                      <a:pPr algn="r" indent="0" marL="0">
+                      <a:pPr marL="0" indent="0" algn="r">
                         <a:buNone/>
                       </a:pPr>
                       <a:r>
@@ -11412,16 +11427,16 @@
                           <a:solidFill>
                             <a:srgbClr val="FFFFFF"/>
                           </a:solidFill>
-                          <a:latin typeface="Open Sans" pitchFamily="34" charset="0"/>
-                          <a:ea typeface="Open Sans" pitchFamily="34" charset="-122"/>
-                          <a:cs typeface="Open Sans" pitchFamily="34" charset="-120"/>
+                          <a:latin typeface="Open Sans ExtraBold" pitchFamily="34" charset="0"/>
+                          <a:ea typeface="Open Sans ExtraBold" pitchFamily="34" charset="-122"/>
+                          <a:cs typeface="Open Sans ExtraBold" pitchFamily="34" charset="-120"/>
                         </a:rPr>
                         <a:t>Gross ($B/yr)</a:t>
                       </a:r>
                       <a:endParaRPr lang="en-US" sz="1250" dirty="0">
-                        <a:latin typeface="Open Sans" charset="0"/>
-                        <a:ea typeface="Open Sans" charset="0"/>
-                        <a:cs typeface="Open Sans" charset="0"/>
+                        <a:latin typeface="Open Sans Light" charset="0"/>
+                        <a:ea typeface="Open Sans Light" charset="0"/>
+                        <a:cs typeface="Open Sans Light" charset="0"/>
                       </a:endParaRPr>
                     </a:p>
                   </a:txBody>
@@ -11454,7 +11469,7 @@
                     <a:bodyPr/>
                     <a:lstStyle/>
                     <a:p>
-                      <a:pPr algn="r" indent="0" marL="0">
+                      <a:pPr marL="0" indent="0" algn="r">
                         <a:buNone/>
                       </a:pPr>
                       <a:r>
@@ -11462,16 +11477,16 @@
                           <a:solidFill>
                             <a:srgbClr val="FFFFFF"/>
                           </a:solidFill>
-                          <a:latin typeface="Open Sans" pitchFamily="34" charset="0"/>
-                          <a:ea typeface="Open Sans" pitchFamily="34" charset="-122"/>
-                          <a:cs typeface="Open Sans" pitchFamily="34" charset="-120"/>
+                          <a:latin typeface="Open Sans ExtraBold" pitchFamily="34" charset="0"/>
+                          <a:ea typeface="Open Sans ExtraBold" pitchFamily="34" charset="-122"/>
+                          <a:cs typeface="Open Sans ExtraBold" pitchFamily="34" charset="-120"/>
                         </a:rPr>
                         <a:t>Net ($B/yr)</a:t>
                       </a:r>
                       <a:endParaRPr lang="en-US" sz="1250" dirty="0">
-                        <a:latin typeface="Open Sans" charset="0"/>
-                        <a:ea typeface="Open Sans" charset="0"/>
-                        <a:cs typeface="Open Sans" charset="0"/>
+                        <a:latin typeface="Open Sans Light" charset="0"/>
+                        <a:ea typeface="Open Sans Light" charset="0"/>
+                        <a:cs typeface="Open Sans Light" charset="0"/>
                       </a:endParaRPr>
                     </a:p>
                   </a:txBody>
@@ -11499,6 +11514,11 @@
                     </a:solidFill>
                   </a:tcPr>
                 </a:tc>
+                <a:extLst>
+                  <a:ext uri="{0D108BD9-81ED-4DB2-BD59-A6C34878D82A}">
+                    <a16:rowId xmlns:a16="http://schemas.microsoft.com/office/drawing/2014/main" val="10000"/>
+                  </a:ext>
+                </a:extLst>
               </a:tr>
               <a:tr h="329184">
                 <a:tc>
@@ -11506,7 +11526,7 @@
                     <a:bodyPr/>
                     <a:lstStyle/>
                     <a:p>
-                      <a:pPr algn="l" indent="0" marL="0">
+                      <a:pPr marL="0" indent="0" algn="l">
                         <a:buNone/>
                       </a:pPr>
                       <a:r>
@@ -11514,16 +11534,16 @@
                           <a:solidFill>
                             <a:srgbClr val="3A3A3A"/>
                           </a:solidFill>
-                          <a:latin typeface="Open Sans" pitchFamily="34" charset="0"/>
-                          <a:ea typeface="Open Sans" pitchFamily="34" charset="-122"/>
-                          <a:cs typeface="Open Sans" pitchFamily="34" charset="-120"/>
+                          <a:latin typeface="Open Sans Light" pitchFamily="34" charset="0"/>
+                          <a:ea typeface="Open Sans Light" pitchFamily="34" charset="-122"/>
+                          <a:cs typeface="Open Sans Light" pitchFamily="34" charset="-120"/>
                         </a:rPr>
                         <a:t>Static (no behavioral response)</a:t>
                       </a:r>
                       <a:endParaRPr lang="en-US" sz="1250" dirty="0">
-                        <a:latin typeface="Open Sans" charset="0"/>
-                        <a:ea typeface="Open Sans" charset="0"/>
-                        <a:cs typeface="Open Sans" charset="0"/>
+                        <a:latin typeface="Open Sans Light" charset="0"/>
+                        <a:ea typeface="Open Sans Light" charset="0"/>
+                        <a:cs typeface="Open Sans Light" charset="0"/>
                       </a:endParaRPr>
                     </a:p>
                   </a:txBody>
@@ -11535,7 +11555,13 @@
                       <a:noFill/>
                     </a:lnR>
                     <a:lnT w="0" cap="flat" cmpd="sng" algn="ctr">
-                      <a:noFill/>
+                      <a:solidFill>
+                        <a:srgbClr val="D9D9D9"/>
+                      </a:solidFill>
+                      <a:prstDash val="solid"/>
+                      <a:round/>
+                      <a:headEnd type="none" w="med" len="med"/>
+                      <a:tailEnd type="none" w="med" len="med"/>
                     </a:lnT>
                     <a:lnB w="9525" cap="flat" cmpd="sng" algn="ctr">
                       <a:solidFill>
@@ -11556,7 +11582,7 @@
                     <a:bodyPr/>
                     <a:lstStyle/>
                     <a:p>
-                      <a:pPr algn="r" indent="0" marL="0">
+                      <a:pPr marL="0" indent="0" algn="r">
                         <a:buNone/>
                       </a:pPr>
                       <a:r>
@@ -11564,16 +11590,16 @@
                           <a:solidFill>
                             <a:srgbClr val="3A3A3A"/>
                           </a:solidFill>
-                          <a:latin typeface="Open Sans" pitchFamily="34" charset="0"/>
-                          <a:ea typeface="Open Sans" pitchFamily="34" charset="-122"/>
-                          <a:cs typeface="Open Sans" pitchFamily="34" charset="-120"/>
+                          <a:latin typeface="Open Sans Light" pitchFamily="34" charset="0"/>
+                          <a:ea typeface="Open Sans Light" pitchFamily="34" charset="-122"/>
+                          <a:cs typeface="Open Sans Light" pitchFamily="34" charset="-120"/>
                         </a:rPr>
                         <a:t>55.9</a:t>
                       </a:r>
                       <a:endParaRPr lang="en-US" sz="1250" dirty="0">
-                        <a:latin typeface="Open Sans" charset="0"/>
-                        <a:ea typeface="Open Sans" charset="0"/>
-                        <a:cs typeface="Open Sans" charset="0"/>
+                        <a:latin typeface="Open Sans Light" charset="0"/>
+                        <a:ea typeface="Open Sans Light" charset="0"/>
+                        <a:cs typeface="Open Sans Light" charset="0"/>
                       </a:endParaRPr>
                     </a:p>
                   </a:txBody>
@@ -11585,7 +11611,13 @@
                       <a:noFill/>
                     </a:lnR>
                     <a:lnT w="0" cap="flat" cmpd="sng" algn="ctr">
-                      <a:noFill/>
+                      <a:solidFill>
+                        <a:srgbClr val="D9D9D9"/>
+                      </a:solidFill>
+                      <a:prstDash val="solid"/>
+                      <a:round/>
+                      <a:headEnd type="none" w="med" len="med"/>
+                      <a:tailEnd type="none" w="med" len="med"/>
                     </a:lnT>
                     <a:lnB w="9525" cap="flat" cmpd="sng" algn="ctr">
                       <a:solidFill>
@@ -11606,7 +11638,7 @@
                     <a:bodyPr/>
                     <a:lstStyle/>
                     <a:p>
-                      <a:pPr algn="r" indent="0" marL="0">
+                      <a:pPr marL="0" indent="0" algn="r">
                         <a:buNone/>
                       </a:pPr>
                       <a:r>
@@ -11614,16 +11646,16 @@
                           <a:solidFill>
                             <a:srgbClr val="3A3A3A"/>
                           </a:solidFill>
-                          <a:latin typeface="Open Sans" pitchFamily="34" charset="0"/>
-                          <a:ea typeface="Open Sans" pitchFamily="34" charset="-122"/>
-                          <a:cs typeface="Open Sans" pitchFamily="34" charset="-120"/>
+                          <a:latin typeface="Open Sans Light" pitchFamily="34" charset="0"/>
+                          <a:ea typeface="Open Sans Light" pitchFamily="34" charset="-122"/>
+                          <a:cs typeface="Open Sans Light" pitchFamily="34" charset="-120"/>
                         </a:rPr>
                         <a:t>45.1</a:t>
                       </a:r>
                       <a:endParaRPr lang="en-US" sz="1250" dirty="0">
-                        <a:latin typeface="Open Sans" charset="0"/>
-                        <a:ea typeface="Open Sans" charset="0"/>
-                        <a:cs typeface="Open Sans" charset="0"/>
+                        <a:latin typeface="Open Sans Light" charset="0"/>
+                        <a:ea typeface="Open Sans Light" charset="0"/>
+                        <a:cs typeface="Open Sans Light" charset="0"/>
                       </a:endParaRPr>
                     </a:p>
                   </a:txBody>
@@ -11635,7 +11667,13 @@
                       <a:noFill/>
                     </a:lnR>
                     <a:lnT w="0" cap="flat" cmpd="sng" algn="ctr">
-                      <a:noFill/>
+                      <a:solidFill>
+                        <a:srgbClr val="D9D9D9"/>
+                      </a:solidFill>
+                      <a:prstDash val="solid"/>
+                      <a:round/>
+                      <a:headEnd type="none" w="med" len="med"/>
+                      <a:tailEnd type="none" w="med" len="med"/>
                     </a:lnT>
                     <a:lnB w="9525" cap="flat" cmpd="sng" algn="ctr">
                       <a:solidFill>
@@ -11651,6 +11689,11 @@
                     </a:solidFill>
                   </a:tcPr>
                 </a:tc>
+                <a:extLst>
+                  <a:ext uri="{0D108BD9-81ED-4DB2-BD59-A6C34878D82A}">
+                    <a16:rowId xmlns:a16="http://schemas.microsoft.com/office/drawing/2014/main" val="10001"/>
+                  </a:ext>
+                </a:extLst>
               </a:tr>
               <a:tr h="329184">
                 <a:tc>
@@ -11658,7 +11701,7 @@
                     <a:bodyPr/>
                     <a:lstStyle/>
                     <a:p>
-                      <a:pPr algn="l" indent="0" marL="0">
+                      <a:pPr marL="0" indent="0" algn="l">
                         <a:buNone/>
                       </a:pPr>
                       <a:r>
@@ -11666,16 +11709,16 @@
                           <a:solidFill>
                             <a:srgbClr val="3A3A3A"/>
                           </a:solidFill>
-                          <a:latin typeface="Open Sans" pitchFamily="34" charset="0"/>
-                          <a:ea typeface="Open Sans" pitchFamily="34" charset="-122"/>
-                          <a:cs typeface="Open Sans" pitchFamily="34" charset="-120"/>
+                          <a:latin typeface="Open Sans Light" pitchFamily="34" charset="0"/>
+                          <a:ea typeface="Open Sans Light" pitchFamily="34" charset="-122"/>
+                          <a:cs typeface="Open Sans Light" pitchFamily="34" charset="-120"/>
                         </a:rPr>
                         <a:t>Reduced-form, lower</a:t>
                       </a:r>
                       <a:endParaRPr lang="en-US" sz="1250" dirty="0">
-                        <a:latin typeface="Open Sans" charset="0"/>
-                        <a:ea typeface="Open Sans" charset="0"/>
-                        <a:cs typeface="Open Sans" charset="0"/>
+                        <a:latin typeface="Open Sans Light" charset="0"/>
+                        <a:ea typeface="Open Sans Light" charset="0"/>
+                        <a:cs typeface="Open Sans Light" charset="0"/>
                       </a:endParaRPr>
                     </a:p>
                   </a:txBody>
@@ -11686,8 +11729,14 @@
                     <a:lnR w="0" cap="flat" cmpd="sng" algn="ctr">
                       <a:noFill/>
                     </a:lnR>
-                    <a:lnT w="0" cap="flat" cmpd="sng" algn="ctr">
-                      <a:noFill/>
+                    <a:lnT w="9525" cap="flat" cmpd="sng" algn="ctr">
+                      <a:solidFill>
+                        <a:srgbClr val="D9D9D9"/>
+                      </a:solidFill>
+                      <a:prstDash val="solid"/>
+                      <a:round/>
+                      <a:headEnd type="none" w="med" len="med"/>
+                      <a:tailEnd type="none" w="med" len="med"/>
                     </a:lnT>
                     <a:lnB w="9525" cap="flat" cmpd="sng" algn="ctr">
                       <a:solidFill>
@@ -11708,7 +11757,7 @@
                     <a:bodyPr/>
                     <a:lstStyle/>
                     <a:p>
-                      <a:pPr algn="r" indent="0" marL="0">
+                      <a:pPr marL="0" indent="0" algn="r">
                         <a:buNone/>
                       </a:pPr>
                       <a:r>
@@ -11716,16 +11765,16 @@
                           <a:solidFill>
                             <a:srgbClr val="3A3A3A"/>
                           </a:solidFill>
-                          <a:latin typeface="Open Sans" pitchFamily="34" charset="0"/>
-                          <a:ea typeface="Open Sans" pitchFamily="34" charset="-122"/>
-                          <a:cs typeface="Open Sans" pitchFamily="34" charset="-120"/>
+                          <a:latin typeface="Open Sans Light" pitchFamily="34" charset="0"/>
+                          <a:ea typeface="Open Sans Light" pitchFamily="34" charset="-122"/>
+                          <a:cs typeface="Open Sans Light" pitchFamily="34" charset="-120"/>
                         </a:rPr>
                         <a:t>57.3</a:t>
                       </a:r>
                       <a:endParaRPr lang="en-US" sz="1250" dirty="0">
-                        <a:latin typeface="Open Sans" charset="0"/>
-                        <a:ea typeface="Open Sans" charset="0"/>
-                        <a:cs typeface="Open Sans" charset="0"/>
+                        <a:latin typeface="Open Sans Light" charset="0"/>
+                        <a:ea typeface="Open Sans Light" charset="0"/>
+                        <a:cs typeface="Open Sans Light" charset="0"/>
                       </a:endParaRPr>
                     </a:p>
                   </a:txBody>
@@ -11736,8 +11785,14 @@
                     <a:lnR w="0" cap="flat" cmpd="sng" algn="ctr">
                       <a:noFill/>
                     </a:lnR>
-                    <a:lnT w="0" cap="flat" cmpd="sng" algn="ctr">
-                      <a:noFill/>
+                    <a:lnT w="9525" cap="flat" cmpd="sng" algn="ctr">
+                      <a:solidFill>
+                        <a:srgbClr val="D9D9D9"/>
+                      </a:solidFill>
+                      <a:prstDash val="solid"/>
+                      <a:round/>
+                      <a:headEnd type="none" w="med" len="med"/>
+                      <a:tailEnd type="none" w="med" len="med"/>
                     </a:lnT>
                     <a:lnB w="9525" cap="flat" cmpd="sng" algn="ctr">
                       <a:solidFill>
@@ -11758,7 +11813,7 @@
                     <a:bodyPr/>
                     <a:lstStyle/>
                     <a:p>
-                      <a:pPr algn="r" indent="0" marL="0">
+                      <a:pPr marL="0" indent="0" algn="r">
                         <a:buNone/>
                       </a:pPr>
                       <a:r>
@@ -11766,16 +11821,16 @@
                           <a:solidFill>
                             <a:srgbClr val="3A3A3A"/>
                           </a:solidFill>
-                          <a:latin typeface="Open Sans" pitchFamily="34" charset="0"/>
-                          <a:ea typeface="Open Sans" pitchFamily="34" charset="-122"/>
-                          <a:cs typeface="Open Sans" pitchFamily="34" charset="-120"/>
+                          <a:latin typeface="Open Sans Light" pitchFamily="34" charset="0"/>
+                          <a:ea typeface="Open Sans Light" pitchFamily="34" charset="-122"/>
+                          <a:cs typeface="Open Sans Light" pitchFamily="34" charset="-120"/>
                         </a:rPr>
                         <a:t>45.9</a:t>
                       </a:r>
                       <a:endParaRPr lang="en-US" sz="1250" dirty="0">
-                        <a:latin typeface="Open Sans" charset="0"/>
-                        <a:ea typeface="Open Sans" charset="0"/>
-                        <a:cs typeface="Open Sans" charset="0"/>
+                        <a:latin typeface="Open Sans Light" charset="0"/>
+                        <a:ea typeface="Open Sans Light" charset="0"/>
+                        <a:cs typeface="Open Sans Light" charset="0"/>
                       </a:endParaRPr>
                     </a:p>
                   </a:txBody>
@@ -11786,8 +11841,14 @@
                     <a:lnR w="0" cap="flat" cmpd="sng" algn="ctr">
                       <a:noFill/>
                     </a:lnR>
-                    <a:lnT w="0" cap="flat" cmpd="sng" algn="ctr">
-                      <a:noFill/>
+                    <a:lnT w="9525" cap="flat" cmpd="sng" algn="ctr">
+                      <a:solidFill>
+                        <a:srgbClr val="D9D9D9"/>
+                      </a:solidFill>
+                      <a:prstDash val="solid"/>
+                      <a:round/>
+                      <a:headEnd type="none" w="med" len="med"/>
+                      <a:tailEnd type="none" w="med" len="med"/>
                     </a:lnT>
                     <a:lnB w="9525" cap="flat" cmpd="sng" algn="ctr">
                       <a:solidFill>
@@ -11803,6 +11864,11 @@
                     </a:solidFill>
                   </a:tcPr>
                 </a:tc>
+                <a:extLst>
+                  <a:ext uri="{0D108BD9-81ED-4DB2-BD59-A6C34878D82A}">
+                    <a16:rowId xmlns:a16="http://schemas.microsoft.com/office/drawing/2014/main" val="10002"/>
+                  </a:ext>
+                </a:extLst>
               </a:tr>
               <a:tr h="329184">
                 <a:tc>
@@ -11810,7 +11876,7 @@
                     <a:bodyPr/>
                     <a:lstStyle/>
                     <a:p>
-                      <a:pPr algn="l" indent="0" marL="0">
+                      <a:pPr marL="0" indent="0" algn="l">
                         <a:buNone/>
                       </a:pPr>
                       <a:r>
@@ -11818,16 +11884,16 @@
                           <a:solidFill>
                             <a:srgbClr val="3A3A3A"/>
                           </a:solidFill>
-                          <a:latin typeface="Open Sans" pitchFamily="34" charset="0"/>
-                          <a:ea typeface="Open Sans" pitchFamily="34" charset="-122"/>
-                          <a:cs typeface="Open Sans" pitchFamily="34" charset="-120"/>
+                          <a:latin typeface="Open Sans Light" pitchFamily="34" charset="0"/>
+                          <a:ea typeface="Open Sans Light" pitchFamily="34" charset="-122"/>
+                          <a:cs typeface="Open Sans Light" pitchFamily="34" charset="-120"/>
                         </a:rPr>
                         <a:t>Reduced-form, central</a:t>
                       </a:r>
                       <a:endParaRPr lang="en-US" sz="1250" dirty="0">
-                        <a:latin typeface="Open Sans" charset="0"/>
-                        <a:ea typeface="Open Sans" charset="0"/>
-                        <a:cs typeface="Open Sans" charset="0"/>
+                        <a:latin typeface="Open Sans Light" charset="0"/>
+                        <a:ea typeface="Open Sans Light" charset="0"/>
+                        <a:cs typeface="Open Sans Light" charset="0"/>
                       </a:endParaRPr>
                     </a:p>
                   </a:txBody>
@@ -11838,8 +11904,14 @@
                     <a:lnR w="0" cap="flat" cmpd="sng" algn="ctr">
                       <a:noFill/>
                     </a:lnR>
-                    <a:lnT w="0" cap="flat" cmpd="sng" algn="ctr">
-                      <a:noFill/>
+                    <a:lnT w="9525" cap="flat" cmpd="sng" algn="ctr">
+                      <a:solidFill>
+                        <a:srgbClr val="D9D9D9"/>
+                      </a:solidFill>
+                      <a:prstDash val="solid"/>
+                      <a:round/>
+                      <a:headEnd type="none" w="med" len="med"/>
+                      <a:tailEnd type="none" w="med" len="med"/>
                     </a:lnT>
                     <a:lnB w="9525" cap="flat" cmpd="sng" algn="ctr">
                       <a:solidFill>
@@ -11860,7 +11932,7 @@
                     <a:bodyPr/>
                     <a:lstStyle/>
                     <a:p>
-                      <a:pPr algn="r" indent="0" marL="0">
+                      <a:pPr marL="0" indent="0" algn="r">
                         <a:buNone/>
                       </a:pPr>
                       <a:r>
@@ -11868,16 +11940,16 @@
                           <a:solidFill>
                             <a:srgbClr val="3A3A3A"/>
                           </a:solidFill>
-                          <a:latin typeface="Open Sans" pitchFamily="34" charset="0"/>
-                          <a:ea typeface="Open Sans" pitchFamily="34" charset="-122"/>
-                          <a:cs typeface="Open Sans" pitchFamily="34" charset="-120"/>
+                          <a:latin typeface="Open Sans Light" pitchFamily="34" charset="0"/>
+                          <a:ea typeface="Open Sans Light" pitchFamily="34" charset="-122"/>
+                          <a:cs typeface="Open Sans Light" pitchFamily="34" charset="-120"/>
                         </a:rPr>
                         <a:t>59.8</a:t>
                       </a:r>
                       <a:endParaRPr lang="en-US" sz="1250" dirty="0">
-                        <a:latin typeface="Open Sans" charset="0"/>
-                        <a:ea typeface="Open Sans" charset="0"/>
-                        <a:cs typeface="Open Sans" charset="0"/>
+                        <a:latin typeface="Open Sans Light" charset="0"/>
+                        <a:ea typeface="Open Sans Light" charset="0"/>
+                        <a:cs typeface="Open Sans Light" charset="0"/>
                       </a:endParaRPr>
                     </a:p>
                   </a:txBody>
@@ -11888,8 +11960,14 @@
                     <a:lnR w="0" cap="flat" cmpd="sng" algn="ctr">
                       <a:noFill/>
                     </a:lnR>
-                    <a:lnT w="0" cap="flat" cmpd="sng" algn="ctr">
-                      <a:noFill/>
+                    <a:lnT w="9525" cap="flat" cmpd="sng" algn="ctr">
+                      <a:solidFill>
+                        <a:srgbClr val="D9D9D9"/>
+                      </a:solidFill>
+                      <a:prstDash val="solid"/>
+                      <a:round/>
+                      <a:headEnd type="none" w="med" len="med"/>
+                      <a:tailEnd type="none" w="med" len="med"/>
                     </a:lnT>
                     <a:lnB w="9525" cap="flat" cmpd="sng" algn="ctr">
                       <a:solidFill>
@@ -11910,7 +11988,7 @@
                     <a:bodyPr/>
                     <a:lstStyle/>
                     <a:p>
-                      <a:pPr algn="r" indent="0" marL="0">
+                      <a:pPr marL="0" indent="0" algn="r">
                         <a:buNone/>
                       </a:pPr>
                       <a:r>
@@ -11918,16 +11996,16 @@
                           <a:solidFill>
                             <a:srgbClr val="3A3A3A"/>
                           </a:solidFill>
-                          <a:latin typeface="Open Sans" pitchFamily="34" charset="0"/>
-                          <a:ea typeface="Open Sans" pitchFamily="34" charset="-122"/>
-                          <a:cs typeface="Open Sans" pitchFamily="34" charset="-120"/>
+                          <a:latin typeface="Open Sans Light" pitchFamily="34" charset="0"/>
+                          <a:ea typeface="Open Sans Light" pitchFamily="34" charset="-122"/>
+                          <a:cs typeface="Open Sans Light" pitchFamily="34" charset="-120"/>
                         </a:rPr>
                         <a:t>46.7</a:t>
                       </a:r>
                       <a:endParaRPr lang="en-US" sz="1250" dirty="0">
-                        <a:latin typeface="Open Sans" charset="0"/>
-                        <a:ea typeface="Open Sans" charset="0"/>
-                        <a:cs typeface="Open Sans" charset="0"/>
+                        <a:latin typeface="Open Sans Light" charset="0"/>
+                        <a:ea typeface="Open Sans Light" charset="0"/>
+                        <a:cs typeface="Open Sans Light" charset="0"/>
                       </a:endParaRPr>
                     </a:p>
                   </a:txBody>
@@ -11938,8 +12016,14 @@
                     <a:lnR w="0" cap="flat" cmpd="sng" algn="ctr">
                       <a:noFill/>
                     </a:lnR>
-                    <a:lnT w="0" cap="flat" cmpd="sng" algn="ctr">
-                      <a:noFill/>
+                    <a:lnT w="9525" cap="flat" cmpd="sng" algn="ctr">
+                      <a:solidFill>
+                        <a:srgbClr val="D9D9D9"/>
+                      </a:solidFill>
+                      <a:prstDash val="solid"/>
+                      <a:round/>
+                      <a:headEnd type="none" w="med" len="med"/>
+                      <a:tailEnd type="none" w="med" len="med"/>
                     </a:lnT>
                     <a:lnB w="9525" cap="flat" cmpd="sng" algn="ctr">
                       <a:solidFill>
@@ -11955,6 +12039,11 @@
                     </a:solidFill>
                   </a:tcPr>
                 </a:tc>
+                <a:extLst>
+                  <a:ext uri="{0D108BD9-81ED-4DB2-BD59-A6C34878D82A}">
+                    <a16:rowId xmlns:a16="http://schemas.microsoft.com/office/drawing/2014/main" val="10003"/>
+                  </a:ext>
+                </a:extLst>
               </a:tr>
               <a:tr h="329184">
                 <a:tc>
@@ -11962,7 +12051,7 @@
                     <a:bodyPr/>
                     <a:lstStyle/>
                     <a:p>
-                      <a:pPr algn="l" indent="0" marL="0">
+                      <a:pPr marL="0" indent="0" algn="l">
                         <a:buNone/>
                       </a:pPr>
                       <a:r>
@@ -11970,16 +12059,16 @@
                           <a:solidFill>
                             <a:srgbClr val="3A3A3A"/>
                           </a:solidFill>
-                          <a:latin typeface="Open Sans" pitchFamily="34" charset="0"/>
-                          <a:ea typeface="Open Sans" pitchFamily="34" charset="-122"/>
-                          <a:cs typeface="Open Sans" pitchFamily="34" charset="-120"/>
+                          <a:latin typeface="Open Sans Light" pitchFamily="34" charset="0"/>
+                          <a:ea typeface="Open Sans Light" pitchFamily="34" charset="-122"/>
+                          <a:cs typeface="Open Sans Light" pitchFamily="34" charset="-120"/>
                         </a:rPr>
                         <a:t>Reduced-form, upper</a:t>
                       </a:r>
                       <a:endParaRPr lang="en-US" sz="1250" dirty="0">
-                        <a:latin typeface="Open Sans" charset="0"/>
-                        <a:ea typeface="Open Sans" charset="0"/>
-                        <a:cs typeface="Open Sans" charset="0"/>
+                        <a:latin typeface="Open Sans Light" charset="0"/>
+                        <a:ea typeface="Open Sans Light" charset="0"/>
+                        <a:cs typeface="Open Sans Light" charset="0"/>
                       </a:endParaRPr>
                     </a:p>
                   </a:txBody>
@@ -11990,8 +12079,14 @@
                     <a:lnR w="0" cap="flat" cmpd="sng" algn="ctr">
                       <a:noFill/>
                     </a:lnR>
-                    <a:lnT w="0" cap="flat" cmpd="sng" algn="ctr">
-                      <a:noFill/>
+                    <a:lnT w="9525" cap="flat" cmpd="sng" algn="ctr">
+                      <a:solidFill>
+                        <a:srgbClr val="D9D9D9"/>
+                      </a:solidFill>
+                      <a:prstDash val="solid"/>
+                      <a:round/>
+                      <a:headEnd type="none" w="med" len="med"/>
+                      <a:tailEnd type="none" w="med" len="med"/>
                     </a:lnT>
                     <a:lnB w="9525" cap="flat" cmpd="sng" algn="ctr">
                       <a:solidFill>
@@ -12012,7 +12107,7 @@
                     <a:bodyPr/>
                     <a:lstStyle/>
                     <a:p>
-                      <a:pPr algn="r" indent="0" marL="0">
+                      <a:pPr marL="0" indent="0" algn="r">
                         <a:buNone/>
                       </a:pPr>
                       <a:r>
@@ -12020,16 +12115,16 @@
                           <a:solidFill>
                             <a:srgbClr val="3A3A3A"/>
                           </a:solidFill>
-                          <a:latin typeface="Open Sans" pitchFamily="34" charset="0"/>
-                          <a:ea typeface="Open Sans" pitchFamily="34" charset="-122"/>
-                          <a:cs typeface="Open Sans" pitchFamily="34" charset="-120"/>
+                          <a:latin typeface="Open Sans Light" pitchFamily="34" charset="0"/>
+                          <a:ea typeface="Open Sans Light" pitchFamily="34" charset="-122"/>
+                          <a:cs typeface="Open Sans Light" pitchFamily="34" charset="-120"/>
                         </a:rPr>
                         <a:t>63.6</a:t>
                       </a:r>
                       <a:endParaRPr lang="en-US" sz="1250" dirty="0">
-                        <a:latin typeface="Open Sans" charset="0"/>
-                        <a:ea typeface="Open Sans" charset="0"/>
-                        <a:cs typeface="Open Sans" charset="0"/>
+                        <a:latin typeface="Open Sans Light" charset="0"/>
+                        <a:ea typeface="Open Sans Light" charset="0"/>
+                        <a:cs typeface="Open Sans Light" charset="0"/>
                       </a:endParaRPr>
                     </a:p>
                   </a:txBody>
@@ -12040,8 +12135,14 @@
                     <a:lnR w="0" cap="flat" cmpd="sng" algn="ctr">
                       <a:noFill/>
                     </a:lnR>
-                    <a:lnT w="0" cap="flat" cmpd="sng" algn="ctr">
-                      <a:noFill/>
+                    <a:lnT w="9525" cap="flat" cmpd="sng" algn="ctr">
+                      <a:solidFill>
+                        <a:srgbClr val="D9D9D9"/>
+                      </a:solidFill>
+                      <a:prstDash val="solid"/>
+                      <a:round/>
+                      <a:headEnd type="none" w="med" len="med"/>
+                      <a:tailEnd type="none" w="med" len="med"/>
                     </a:lnT>
                     <a:lnB w="9525" cap="flat" cmpd="sng" algn="ctr">
                       <a:solidFill>
@@ -12062,7 +12163,7 @@
                     <a:bodyPr/>
                     <a:lstStyle/>
                     <a:p>
-                      <a:pPr algn="r" indent="0" marL="0">
+                      <a:pPr marL="0" indent="0" algn="r">
                         <a:buNone/>
                       </a:pPr>
                       <a:r>
@@ -12070,16 +12171,16 @@
                           <a:solidFill>
                             <a:srgbClr val="3A3A3A"/>
                           </a:solidFill>
-                          <a:latin typeface="Open Sans" pitchFamily="34" charset="0"/>
-                          <a:ea typeface="Open Sans" pitchFamily="34" charset="-122"/>
-                          <a:cs typeface="Open Sans" pitchFamily="34" charset="-120"/>
+                          <a:latin typeface="Open Sans Light" pitchFamily="34" charset="0"/>
+                          <a:ea typeface="Open Sans Light" pitchFamily="34" charset="-122"/>
+                          <a:cs typeface="Open Sans Light" pitchFamily="34" charset="-120"/>
                         </a:rPr>
                         <a:t>47.6</a:t>
                       </a:r>
                       <a:endParaRPr lang="en-US" sz="1250" dirty="0">
-                        <a:latin typeface="Open Sans" charset="0"/>
-                        <a:ea typeface="Open Sans" charset="0"/>
-                        <a:cs typeface="Open Sans" charset="0"/>
+                        <a:latin typeface="Open Sans Light" charset="0"/>
+                        <a:ea typeface="Open Sans Light" charset="0"/>
+                        <a:cs typeface="Open Sans Light" charset="0"/>
                       </a:endParaRPr>
                     </a:p>
                   </a:txBody>
@@ -12090,8 +12191,14 @@
                     <a:lnR w="0" cap="flat" cmpd="sng" algn="ctr">
                       <a:noFill/>
                     </a:lnR>
-                    <a:lnT w="0" cap="flat" cmpd="sng" algn="ctr">
-                      <a:noFill/>
+                    <a:lnT w="9525" cap="flat" cmpd="sng" algn="ctr">
+                      <a:solidFill>
+                        <a:srgbClr val="D9D9D9"/>
+                      </a:solidFill>
+                      <a:prstDash val="solid"/>
+                      <a:round/>
+                      <a:headEnd type="none" w="med" len="med"/>
+                      <a:tailEnd type="none" w="med" len="med"/>
                     </a:lnT>
                     <a:lnB w="9525" cap="flat" cmpd="sng" algn="ctr">
                       <a:solidFill>
@@ -12107,6 +12214,11 @@
                     </a:solidFill>
                   </a:tcPr>
                 </a:tc>
+                <a:extLst>
+                  <a:ext uri="{0D108BD9-81ED-4DB2-BD59-A6C34878D82A}">
+                    <a16:rowId xmlns:a16="http://schemas.microsoft.com/office/drawing/2014/main" val="10004"/>
+                  </a:ext>
+                </a:extLst>
               </a:tr>
               <a:tr h="329184">
                 <a:tc>
@@ -12114,7 +12226,7 @@
                     <a:bodyPr/>
                     <a:lstStyle/>
                     <a:p>
-                      <a:pPr algn="l" indent="0" marL="0">
+                      <a:pPr marL="0" indent="0" algn="l">
                         <a:buNone/>
                       </a:pPr>
                       <a:r>
@@ -12122,16 +12234,16 @@
                           <a:solidFill>
                             <a:srgbClr val="3A3A3A"/>
                           </a:solidFill>
-                          <a:latin typeface="Open Sans" pitchFamily="34" charset="0"/>
-                          <a:ea typeface="Open Sans" pitchFamily="34" charset="-122"/>
-                          <a:cs typeface="Open Sans" pitchFamily="34" charset="-120"/>
+                          <a:latin typeface="Open Sans Light" pitchFamily="34" charset="0"/>
+                          <a:ea typeface="Open Sans Light" pitchFamily="34" charset="-122"/>
+                          <a:cs typeface="Open Sans Light" pitchFamily="34" charset="-120"/>
                         </a:rPr>
                         <a:t>Structural, sticky incumbent wages</a:t>
                       </a:r>
                       <a:endParaRPr lang="en-US" sz="1250" dirty="0">
-                        <a:latin typeface="Open Sans" charset="0"/>
-                        <a:ea typeface="Open Sans" charset="0"/>
-                        <a:cs typeface="Open Sans" charset="0"/>
+                        <a:latin typeface="Open Sans Light" charset="0"/>
+                        <a:ea typeface="Open Sans Light" charset="0"/>
+                        <a:cs typeface="Open Sans Light" charset="0"/>
                       </a:endParaRPr>
                     </a:p>
                   </a:txBody>
@@ -12142,8 +12254,14 @@
                     <a:lnR w="0" cap="flat" cmpd="sng" algn="ctr">
                       <a:noFill/>
                     </a:lnR>
-                    <a:lnT w="0" cap="flat" cmpd="sng" algn="ctr">
-                      <a:noFill/>
+                    <a:lnT w="9525" cap="flat" cmpd="sng" algn="ctr">
+                      <a:solidFill>
+                        <a:srgbClr val="D9D9D9"/>
+                      </a:solidFill>
+                      <a:prstDash val="solid"/>
+                      <a:round/>
+                      <a:headEnd type="none" w="med" len="med"/>
+                      <a:tailEnd type="none" w="med" len="med"/>
                     </a:lnT>
                     <a:lnB w="9525" cap="flat" cmpd="sng" algn="ctr">
                       <a:solidFill>
@@ -12164,7 +12282,7 @@
                     <a:bodyPr/>
                     <a:lstStyle/>
                     <a:p>
-                      <a:pPr algn="r" indent="0" marL="0">
+                      <a:pPr marL="0" indent="0" algn="r">
                         <a:buNone/>
                       </a:pPr>
                       <a:r>
@@ -12172,16 +12290,16 @@
                           <a:solidFill>
                             <a:srgbClr val="3A3A3A"/>
                           </a:solidFill>
-                          <a:latin typeface="Open Sans" pitchFamily="34" charset="0"/>
-                          <a:ea typeface="Open Sans" pitchFamily="34" charset="-122"/>
-                          <a:cs typeface="Open Sans" pitchFamily="34" charset="-120"/>
+                          <a:latin typeface="Open Sans Light" pitchFamily="34" charset="0"/>
+                          <a:ea typeface="Open Sans Light" pitchFamily="34" charset="-122"/>
+                          <a:cs typeface="Open Sans Light" pitchFamily="34" charset="-120"/>
                         </a:rPr>
                         <a:t>59.6–60.7</a:t>
                       </a:r>
                       <a:endParaRPr lang="en-US" sz="1250" dirty="0">
-                        <a:latin typeface="Open Sans" charset="0"/>
-                        <a:ea typeface="Open Sans" charset="0"/>
-                        <a:cs typeface="Open Sans" charset="0"/>
+                        <a:latin typeface="Open Sans Light" charset="0"/>
+                        <a:ea typeface="Open Sans Light" charset="0"/>
+                        <a:cs typeface="Open Sans Light" charset="0"/>
                       </a:endParaRPr>
                     </a:p>
                   </a:txBody>
@@ -12192,8 +12310,14 @@
                     <a:lnR w="0" cap="flat" cmpd="sng" algn="ctr">
                       <a:noFill/>
                     </a:lnR>
-                    <a:lnT w="0" cap="flat" cmpd="sng" algn="ctr">
-                      <a:noFill/>
+                    <a:lnT w="9525" cap="flat" cmpd="sng" algn="ctr">
+                      <a:solidFill>
+                        <a:srgbClr val="D9D9D9"/>
+                      </a:solidFill>
+                      <a:prstDash val="solid"/>
+                      <a:round/>
+                      <a:headEnd type="none" w="med" len="med"/>
+                      <a:tailEnd type="none" w="med" len="med"/>
                     </a:lnT>
                     <a:lnB w="9525" cap="flat" cmpd="sng" algn="ctr">
                       <a:solidFill>
@@ -12214,7 +12338,7 @@
                     <a:bodyPr/>
                     <a:lstStyle/>
                     <a:p>
-                      <a:pPr algn="r" indent="0" marL="0">
+                      <a:pPr marL="0" indent="0" algn="r">
                         <a:buNone/>
                       </a:pPr>
                       <a:r>
@@ -12222,16 +12346,16 @@
                           <a:solidFill>
                             <a:srgbClr val="3A3A3A"/>
                           </a:solidFill>
-                          <a:latin typeface="Open Sans" pitchFamily="34" charset="0"/>
-                          <a:ea typeface="Open Sans" pitchFamily="34" charset="-122"/>
-                          <a:cs typeface="Open Sans" pitchFamily="34" charset="-120"/>
+                          <a:latin typeface="Open Sans Light" pitchFamily="34" charset="0"/>
+                          <a:ea typeface="Open Sans Light" pitchFamily="34" charset="-122"/>
+                          <a:cs typeface="Open Sans Light" pitchFamily="34" charset="-120"/>
                         </a:rPr>
                         <a:t>47.4–48.4</a:t>
                       </a:r>
                       <a:endParaRPr lang="en-US" sz="1250" dirty="0">
-                        <a:latin typeface="Open Sans" charset="0"/>
-                        <a:ea typeface="Open Sans" charset="0"/>
-                        <a:cs typeface="Open Sans" charset="0"/>
+                        <a:latin typeface="Open Sans Light" charset="0"/>
+                        <a:ea typeface="Open Sans Light" charset="0"/>
+                        <a:cs typeface="Open Sans Light" charset="0"/>
                       </a:endParaRPr>
                     </a:p>
                   </a:txBody>
@@ -12242,8 +12366,14 @@
                     <a:lnR w="0" cap="flat" cmpd="sng" algn="ctr">
                       <a:noFill/>
                     </a:lnR>
-                    <a:lnT w="0" cap="flat" cmpd="sng" algn="ctr">
-                      <a:noFill/>
+                    <a:lnT w="9525" cap="flat" cmpd="sng" algn="ctr">
+                      <a:solidFill>
+                        <a:srgbClr val="D9D9D9"/>
+                      </a:solidFill>
+                      <a:prstDash val="solid"/>
+                      <a:round/>
+                      <a:headEnd type="none" w="med" len="med"/>
+                      <a:tailEnd type="none" w="med" len="med"/>
                     </a:lnT>
                     <a:lnB w="9525" cap="flat" cmpd="sng" algn="ctr">
                       <a:solidFill>
@@ -12259,6 +12389,11 @@
                     </a:solidFill>
                   </a:tcPr>
                 </a:tc>
+                <a:extLst>
+                  <a:ext uri="{0D108BD9-81ED-4DB2-BD59-A6C34878D82A}">
+                    <a16:rowId xmlns:a16="http://schemas.microsoft.com/office/drawing/2014/main" val="10005"/>
+                  </a:ext>
+                </a:extLst>
               </a:tr>
               <a:tr h="329184">
                 <a:tc>
@@ -12266,7 +12401,7 @@
                     <a:bodyPr/>
                     <a:lstStyle/>
                     <a:p>
-                      <a:pPr algn="l" indent="0" marL="0">
+                      <a:pPr marL="0" indent="0" algn="l">
                         <a:buNone/>
                       </a:pPr>
                       <a:r>
@@ -12274,16 +12409,16 @@
                           <a:solidFill>
                             <a:srgbClr val="3A3A3A"/>
                           </a:solidFill>
-                          <a:latin typeface="Open Sans" pitchFamily="34" charset="0"/>
-                          <a:ea typeface="Open Sans" pitchFamily="34" charset="-122"/>
-                          <a:cs typeface="Open Sans" pitchFamily="34" charset="-120"/>
+                          <a:latin typeface="Open Sans Light" pitchFamily="34" charset="0"/>
+                          <a:ea typeface="Open Sans Light" pitchFamily="34" charset="-122"/>
+                          <a:cs typeface="Open Sans Light" pitchFamily="34" charset="-120"/>
                         </a:rPr>
                         <a:t>Incumbent hours response (adds to any row)</a:t>
                       </a:r>
                       <a:endParaRPr lang="en-US" sz="1250" dirty="0">
-                        <a:latin typeface="Open Sans" charset="0"/>
-                        <a:ea typeface="Open Sans" charset="0"/>
-                        <a:cs typeface="Open Sans" charset="0"/>
+                        <a:latin typeface="Open Sans Light" charset="0"/>
+                        <a:ea typeface="Open Sans Light" charset="0"/>
+                        <a:cs typeface="Open Sans Light" charset="0"/>
                       </a:endParaRPr>
                     </a:p>
                   </a:txBody>
@@ -12294,8 +12429,14 @@
                     <a:lnR w="0" cap="flat" cmpd="sng" algn="ctr">
                       <a:noFill/>
                     </a:lnR>
-                    <a:lnT w="0" cap="flat" cmpd="sng" algn="ctr">
-                      <a:noFill/>
+                    <a:lnT w="9525" cap="flat" cmpd="sng" algn="ctr">
+                      <a:solidFill>
+                        <a:srgbClr val="D9D9D9"/>
+                      </a:solidFill>
+                      <a:prstDash val="solid"/>
+                      <a:round/>
+                      <a:headEnd type="none" w="med" len="med"/>
+                      <a:tailEnd type="none" w="med" len="med"/>
                     </a:lnT>
                     <a:lnB w="9525" cap="flat" cmpd="sng" algn="ctr">
                       <a:solidFill>
@@ -12316,7 +12457,7 @@
                     <a:bodyPr/>
                     <a:lstStyle/>
                     <a:p>
-                      <a:pPr algn="r" indent="0" marL="0">
+                      <a:pPr marL="0" indent="0" algn="r">
                         <a:buNone/>
                       </a:pPr>
                       <a:r>
@@ -12324,16 +12465,16 @@
                           <a:solidFill>
                             <a:srgbClr val="3A3A3A"/>
                           </a:solidFill>
-                          <a:latin typeface="Open Sans" pitchFamily="34" charset="0"/>
-                          <a:ea typeface="Open Sans" pitchFamily="34" charset="-122"/>
-                          <a:cs typeface="Open Sans" pitchFamily="34" charset="-120"/>
+                          <a:latin typeface="Open Sans Light" pitchFamily="34" charset="0"/>
+                          <a:ea typeface="Open Sans Light" pitchFamily="34" charset="-122"/>
+                          <a:cs typeface="Open Sans Light" pitchFamily="34" charset="-120"/>
                         </a:rPr>
                         <a:t>+0.5 to +2.4</a:t>
                       </a:r>
                       <a:endParaRPr lang="en-US" sz="1250" dirty="0">
-                        <a:latin typeface="Open Sans" charset="0"/>
-                        <a:ea typeface="Open Sans" charset="0"/>
-                        <a:cs typeface="Open Sans" charset="0"/>
+                        <a:latin typeface="Open Sans Light" charset="0"/>
+                        <a:ea typeface="Open Sans Light" charset="0"/>
+                        <a:cs typeface="Open Sans Light" charset="0"/>
                       </a:endParaRPr>
                     </a:p>
                   </a:txBody>
@@ -12344,8 +12485,14 @@
                     <a:lnR w="0" cap="flat" cmpd="sng" algn="ctr">
                       <a:noFill/>
                     </a:lnR>
-                    <a:lnT w="0" cap="flat" cmpd="sng" algn="ctr">
-                      <a:noFill/>
+                    <a:lnT w="9525" cap="flat" cmpd="sng" algn="ctr">
+                      <a:solidFill>
+                        <a:srgbClr val="D9D9D9"/>
+                      </a:solidFill>
+                      <a:prstDash val="solid"/>
+                      <a:round/>
+                      <a:headEnd type="none" w="med" len="med"/>
+                      <a:tailEnd type="none" w="med" len="med"/>
                     </a:lnT>
                     <a:lnB w="9525" cap="flat" cmpd="sng" algn="ctr">
                       <a:solidFill>
@@ -12366,7 +12513,7 @@
                     <a:bodyPr/>
                     <a:lstStyle/>
                     <a:p>
-                      <a:pPr algn="r" indent="0" marL="0">
+                      <a:pPr marL="0" indent="0" algn="r">
                         <a:buNone/>
                       </a:pPr>
                       <a:r>
@@ -12374,16 +12521,16 @@
                           <a:solidFill>
                             <a:srgbClr val="3A3A3A"/>
                           </a:solidFill>
-                          <a:latin typeface="Open Sans" pitchFamily="34" charset="0"/>
-                          <a:ea typeface="Open Sans" pitchFamily="34" charset="-122"/>
-                          <a:cs typeface="Open Sans" pitchFamily="34" charset="-120"/>
+                          <a:latin typeface="Open Sans Light" pitchFamily="34" charset="0"/>
+                          <a:ea typeface="Open Sans Light" pitchFamily="34" charset="-122"/>
+                          <a:cs typeface="Open Sans Light" pitchFamily="34" charset="-120"/>
                         </a:rPr>
                         <a:t>+0.2 to +1.3</a:t>
                       </a:r>
                       <a:endParaRPr lang="en-US" sz="1250" dirty="0">
-                        <a:latin typeface="Open Sans" charset="0"/>
-                        <a:ea typeface="Open Sans" charset="0"/>
-                        <a:cs typeface="Open Sans" charset="0"/>
+                        <a:latin typeface="Open Sans Light" charset="0"/>
+                        <a:ea typeface="Open Sans Light" charset="0"/>
+                        <a:cs typeface="Open Sans Light" charset="0"/>
                       </a:endParaRPr>
                     </a:p>
                   </a:txBody>
@@ -12394,8 +12541,14 @@
                     <a:lnR w="0" cap="flat" cmpd="sng" algn="ctr">
                       <a:noFill/>
                     </a:lnR>
-                    <a:lnT w="0" cap="flat" cmpd="sng" algn="ctr">
-                      <a:noFill/>
+                    <a:lnT w="9525" cap="flat" cmpd="sng" algn="ctr">
+                      <a:solidFill>
+                        <a:srgbClr val="D9D9D9"/>
+                      </a:solidFill>
+                      <a:prstDash val="solid"/>
+                      <a:round/>
+                      <a:headEnd type="none" w="med" len="med"/>
+                      <a:tailEnd type="none" w="med" len="med"/>
                     </a:lnT>
                     <a:lnB w="9525" cap="flat" cmpd="sng" algn="ctr">
                       <a:solidFill>
@@ -12411,6 +12564,11 @@
                     </a:solidFill>
                   </a:tcPr>
                 </a:tc>
+                <a:extLst>
+                  <a:ext uri="{0D108BD9-81ED-4DB2-BD59-A6C34878D82A}">
+                    <a16:rowId xmlns:a16="http://schemas.microsoft.com/office/drawing/2014/main" val="10006"/>
+                  </a:ext>
+                </a:extLst>
               </a:tr>
               <a:tr h="329184">
                 <a:tc>
@@ -12418,7 +12576,7 @@
                     <a:bodyPr/>
                     <a:lstStyle/>
                     <a:p>
-                      <a:pPr algn="l" indent="0" marL="0">
+                      <a:pPr marL="0" indent="0" algn="l">
                         <a:buNone/>
                       </a:pPr>
                       <a:r>
@@ -12426,16 +12584,16 @@
                           <a:solidFill>
                             <a:srgbClr val="3A3A3A"/>
                           </a:solidFill>
-                          <a:latin typeface="Open Sans" pitchFamily="34" charset="0"/>
-                          <a:ea typeface="Open Sans" pitchFamily="34" charset="-122"/>
-                          <a:cs typeface="Open Sans" pitchFamily="34" charset="-120"/>
+                          <a:latin typeface="Open Sans Light" pitchFamily="34" charset="0"/>
+                          <a:ea typeface="Open Sans Light" pitchFamily="34" charset="-122"/>
+                          <a:cs typeface="Open Sans Light" pitchFamily="34" charset="-120"/>
                         </a:rPr>
                         <a:t>Incidence upper bound (all wages renegotiate)</a:t>
                       </a:r>
                       <a:endParaRPr lang="en-US" sz="1250" dirty="0">
-                        <a:latin typeface="Open Sans" charset="0"/>
-                        <a:ea typeface="Open Sans" charset="0"/>
-                        <a:cs typeface="Open Sans" charset="0"/>
+                        <a:latin typeface="Open Sans Light" charset="0"/>
+                        <a:ea typeface="Open Sans Light" charset="0"/>
+                        <a:cs typeface="Open Sans Light" charset="0"/>
                       </a:endParaRPr>
                     </a:p>
                   </a:txBody>
@@ -12446,8 +12604,14 @@
                     <a:lnR w="0" cap="flat" cmpd="sng" algn="ctr">
                       <a:noFill/>
                     </a:lnR>
-                    <a:lnT w="0" cap="flat" cmpd="sng" algn="ctr">
-                      <a:noFill/>
+                    <a:lnT w="9525" cap="flat" cmpd="sng" algn="ctr">
+                      <a:solidFill>
+                        <a:srgbClr val="D9D9D9"/>
+                      </a:solidFill>
+                      <a:prstDash val="solid"/>
+                      <a:round/>
+                      <a:headEnd type="none" w="med" len="med"/>
+                      <a:tailEnd type="none" w="med" len="med"/>
                     </a:lnT>
                     <a:lnB w="9525" cap="flat" cmpd="sng" algn="ctr">
                       <a:solidFill>
@@ -12468,7 +12632,7 @@
                     <a:bodyPr/>
                     <a:lstStyle/>
                     <a:p>
-                      <a:pPr algn="r" indent="0" marL="0">
+                      <a:pPr marL="0" indent="0" algn="r">
                         <a:buNone/>
                       </a:pPr>
                       <a:r>
@@ -12476,16 +12640,16 @@
                           <a:solidFill>
                             <a:srgbClr val="3A3A3A"/>
                           </a:solidFill>
-                          <a:latin typeface="Open Sans" pitchFamily="34" charset="0"/>
-                          <a:ea typeface="Open Sans" pitchFamily="34" charset="-122"/>
-                          <a:cs typeface="Open Sans" pitchFamily="34" charset="-120"/>
+                          <a:latin typeface="Open Sans Light" pitchFamily="34" charset="0"/>
+                          <a:ea typeface="Open Sans Light" pitchFamily="34" charset="-122"/>
+                          <a:cs typeface="Open Sans Light" pitchFamily="34" charset="-120"/>
                         </a:rPr>
                         <a:t>up to 109.1</a:t>
                       </a:r>
                       <a:endParaRPr lang="en-US" sz="1250" dirty="0">
-                        <a:latin typeface="Open Sans" charset="0"/>
-                        <a:ea typeface="Open Sans" charset="0"/>
-                        <a:cs typeface="Open Sans" charset="0"/>
+                        <a:latin typeface="Open Sans Light" charset="0"/>
+                        <a:ea typeface="Open Sans Light" charset="0"/>
+                        <a:cs typeface="Open Sans Light" charset="0"/>
                       </a:endParaRPr>
                     </a:p>
                   </a:txBody>
@@ -12496,8 +12660,14 @@
                     <a:lnR w="0" cap="flat" cmpd="sng" algn="ctr">
                       <a:noFill/>
                     </a:lnR>
-                    <a:lnT w="0" cap="flat" cmpd="sng" algn="ctr">
-                      <a:noFill/>
+                    <a:lnT w="9525" cap="flat" cmpd="sng" algn="ctr">
+                      <a:solidFill>
+                        <a:srgbClr val="D9D9D9"/>
+                      </a:solidFill>
+                      <a:prstDash val="solid"/>
+                      <a:round/>
+                      <a:headEnd type="none" w="med" len="med"/>
+                      <a:tailEnd type="none" w="med" len="med"/>
                     </a:lnT>
                     <a:lnB w="9525" cap="flat" cmpd="sng" algn="ctr">
                       <a:solidFill>
@@ -12518,7 +12688,7 @@
                     <a:bodyPr/>
                     <a:lstStyle/>
                     <a:p>
-                      <a:pPr algn="r" indent="0" marL="0">
+                      <a:pPr marL="0" indent="0" algn="r">
                         <a:buNone/>
                       </a:pPr>
                       <a:r>
@@ -12526,16 +12696,16 @@
                           <a:solidFill>
                             <a:srgbClr val="3A3A3A"/>
                           </a:solidFill>
-                          <a:latin typeface="Open Sans" pitchFamily="34" charset="0"/>
-                          <a:ea typeface="Open Sans" pitchFamily="34" charset="-122"/>
-                          <a:cs typeface="Open Sans" pitchFamily="34" charset="-120"/>
+                          <a:latin typeface="Open Sans Light" pitchFamily="34" charset="0"/>
+                          <a:ea typeface="Open Sans Light" pitchFamily="34" charset="-122"/>
+                          <a:cs typeface="Open Sans Light" pitchFamily="34" charset="-120"/>
                         </a:rPr>
                         <a:t>—</a:t>
                       </a:r>
                       <a:endParaRPr lang="en-US" sz="1250" dirty="0">
-                        <a:latin typeface="Open Sans" charset="0"/>
-                        <a:ea typeface="Open Sans" charset="0"/>
-                        <a:cs typeface="Open Sans" charset="0"/>
+                        <a:latin typeface="Open Sans Light" charset="0"/>
+                        <a:ea typeface="Open Sans Light" charset="0"/>
+                        <a:cs typeface="Open Sans Light" charset="0"/>
                       </a:endParaRPr>
                     </a:p>
                   </a:txBody>
@@ -12546,8 +12716,14 @@
                     <a:lnR w="0" cap="flat" cmpd="sng" algn="ctr">
                       <a:noFill/>
                     </a:lnR>
-                    <a:lnT w="0" cap="flat" cmpd="sng" algn="ctr">
-                      <a:noFill/>
+                    <a:lnT w="9525" cap="flat" cmpd="sng" algn="ctr">
+                      <a:solidFill>
+                        <a:srgbClr val="D9D9D9"/>
+                      </a:solidFill>
+                      <a:prstDash val="solid"/>
+                      <a:round/>
+                      <a:headEnd type="none" w="med" len="med"/>
+                      <a:tailEnd type="none" w="med" len="med"/>
                     </a:lnT>
                     <a:lnB w="9525" cap="flat" cmpd="sng" algn="ctr">
                       <a:solidFill>
@@ -12563,6 +12739,11 @@
                     </a:solidFill>
                   </a:tcPr>
                 </a:tc>
+                <a:extLst>
+                  <a:ext uri="{0D108BD9-81ED-4DB2-BD59-A6C34878D82A}">
+                    <a16:rowId xmlns:a16="http://schemas.microsoft.com/office/drawing/2014/main" val="10007"/>
+                  </a:ext>
+                </a:extLst>
               </a:tr>
             </a:tbl>
           </a:graphicData>
@@ -12589,7 +12770,7 @@
           <a:bodyPr wrap="square" lIns="0" tIns="0" rIns="0" bIns="0" rtlCol="0" anchor="ctr"/>
           <a:lstStyle/>
           <a:p>
-            <a:pPr indent="0" marL="0">
+            <a:pPr marL="0" indent="0">
               <a:lnSpc>
                 <a:spcPct val="100000"/>
               </a:lnSpc>
@@ -12600,9 +12781,9 @@
                 <a:solidFill>
                   <a:srgbClr val="8A8A8A"/>
                 </a:solidFill>
-                <a:latin typeface="Open Sans" pitchFamily="34" charset="0"/>
-                <a:ea typeface="Open Sans" pitchFamily="34" charset="-122"/>
-                <a:cs typeface="Open Sans" pitchFamily="34" charset="-120"/>
+                <a:latin typeface="Open Sans Light" pitchFamily="34" charset="0"/>
+                <a:ea typeface="Open Sans Light" pitchFamily="34" charset="-122"/>
+                <a:cs typeface="Open Sans Light" pitchFamily="34" charset="-120"/>
               </a:rPr>
               <a:t>Net = gross minus federal tax recapture and safety-net offsets. Final row is a disclosed bound, not a forecast. Source: EIG 80-80 wage subsidy simulation, 2026.</a:t>
             </a:r>
@@ -12626,6 +12807,7 @@
         <a:solidFill>
           <a:srgbClr val="FFFFFF"/>
         </a:solidFill>
+        <a:effectLst/>
       </p:bgPr>
     </p:bg>
     <p:spTree>
@@ -12663,17 +12845,17 @@
           <a:bodyPr wrap="square" lIns="0" tIns="0" rIns="0" bIns="0" rtlCol="0" anchor="ctr"/>
           <a:lstStyle/>
           <a:p>
-            <a:pPr algn="l" indent="0" marL="0">
+            <a:pPr marL="0" indent="0" algn="l">
               <a:buNone/>
             </a:pPr>
             <a:r>
-              <a:rPr lang="en-US" sz="1100" b="1" spc="200" kern="0" dirty="0">
+              <a:rPr lang="en-US" sz="1100" b="1" kern="0" spc="200" dirty="0">
                 <a:solidFill>
                   <a:srgbClr val="19644D"/>
                 </a:solidFill>
-                <a:latin typeface="Open Sans" pitchFamily="34" charset="0"/>
-                <a:ea typeface="Open Sans" pitchFamily="34" charset="-122"/>
-                <a:cs typeface="Open Sans" pitchFamily="34" charset="-120"/>
+                <a:latin typeface="Open Sans ExtraBold" pitchFamily="34" charset="0"/>
+                <a:ea typeface="Open Sans ExtraBold" pitchFamily="34" charset="-122"/>
+                <a:cs typeface="Open Sans ExtraBold" pitchFamily="34" charset="-120"/>
               </a:rPr>
               <a:t>WHAT DOES IT COST?</a:t>
             </a:r>
@@ -12702,7 +12884,7 @@
           <a:bodyPr wrap="square" lIns="0" tIns="0" rIns="0" bIns="0" rtlCol="0" anchor="t"/>
           <a:lstStyle/>
           <a:p>
-            <a:pPr algn="l" indent="0" marL="0">
+            <a:pPr marL="0" indent="0" algn="l">
               <a:lnSpc>
                 <a:spcPct val="98000"/>
               </a:lnSpc>
@@ -12744,7 +12926,7 @@
           <a:bodyPr wrap="square" lIns="0" tIns="0" rIns="0" bIns="0" rtlCol="0" anchor="t"/>
           <a:lstStyle/>
           <a:p>
-            <a:pPr indent="0" marL="0">
+            <a:pPr marL="0" indent="0">
               <a:lnSpc>
                 <a:spcPct val="100000"/>
               </a:lnSpc>
@@ -12755,9 +12937,9 @@
                 <a:solidFill>
                   <a:srgbClr val="3A3A3A"/>
                 </a:solidFill>
-                <a:latin typeface="Open Sans" pitchFamily="34" charset="0"/>
-                <a:ea typeface="Open Sans" pitchFamily="34" charset="-122"/>
-                <a:cs typeface="Open Sans" pitchFamily="34" charset="-120"/>
+                <a:latin typeface="Open Sans ExtraBold" pitchFamily="34" charset="0"/>
+                <a:ea typeface="Open Sans ExtraBold" pitchFamily="34" charset="-122"/>
+                <a:cs typeface="Open Sans ExtraBold" pitchFamily="34" charset="-120"/>
               </a:rPr>
               <a:t>Static, reduced-form, and structural models all cluster in the $45–48B net range.</a:t>
             </a:r>
@@ -12767,14 +12949,14 @@
       </p:sp>
       <p:pic>
         <p:nvPicPr>
-          <p:cNvPr id="5" name="Image 0" descr="/Users/benjamin/Documents/GitHub/eig-wagesubsidy-policy-sim/output/figures/slides/fig13_cost_band.png">    </p:cNvPr>
+          <p:cNvPr id="5" name="Image 0" descr="/Users/benjamin/Documents/GitHub/eig-wagesubsidy-policy-sim/output/figures/slides/fig13_cost_band.png"/>
           <p:cNvPicPr>
             <a:picLocks noChangeAspect="1"/>
           </p:cNvPicPr>
           <p:nvPr/>
         </p:nvPicPr>
         <p:blipFill>
-          <a:blip r:embed="rId1"/>
+          <a:blip r:embed="rId3"/>
           <a:stretch>
             <a:fillRect/>
           </a:stretch>
@@ -12810,7 +12992,7 @@
           <a:bodyPr wrap="square" lIns="0" tIns="0" rIns="0" bIns="0" rtlCol="0" anchor="ctr"/>
           <a:lstStyle/>
           <a:p>
-            <a:pPr indent="0" marL="0">
+            <a:pPr marL="0" indent="0">
               <a:buNone/>
             </a:pPr>
             <a:r>
@@ -12818,9 +13000,9 @@
                 <a:solidFill>
                   <a:srgbClr val="8A8A8A"/>
                 </a:solidFill>
-                <a:latin typeface="Open Sans" pitchFamily="34" charset="0"/>
-                <a:ea typeface="Open Sans" pitchFamily="34" charset="-122"/>
-                <a:cs typeface="Open Sans" pitchFamily="34" charset="-120"/>
+                <a:latin typeface="Open Sans Light" pitchFamily="34" charset="0"/>
+                <a:ea typeface="Open Sans Light" pitchFamily="34" charset="-122"/>
+                <a:cs typeface="Open Sans Light" pitchFamily="34" charset="-120"/>
               </a:rPr>
               <a:t>Source: Economic Innovation Group 80-80 wage subsidy simulation, 2026.</a:t>
             </a:r>
@@ -12844,6 +13026,7 @@
         <a:solidFill>
           <a:srgbClr val="024140"/>
         </a:solidFill>
+        <a:effectLst/>
       </p:bgPr>
     </p:bg>
     <p:spTree>
@@ -12881,7 +13064,7 @@
           <a:bodyPr wrap="square" lIns="0" tIns="0" rIns="0" bIns="0" rtlCol="0" anchor="t"/>
           <a:lstStyle/>
           <a:p>
-            <a:pPr algn="l" indent="0" marL="0">
+            <a:pPr marL="0" indent="0" algn="l">
               <a:buNone/>
             </a:pPr>
             <a:r>
@@ -12920,7 +13103,7 @@
           <a:bodyPr wrap="square" lIns="0" tIns="0" rIns="0" bIns="0" rtlCol="0" anchor="t"/>
           <a:lstStyle/>
           <a:p>
-            <a:pPr algn="l" indent="0" marL="0">
+            <a:pPr marL="0" indent="0" algn="l">
               <a:lnSpc>
                 <a:spcPct val="100000"/>
               </a:lnSpc>
@@ -12962,7 +13145,7 @@
           <a:bodyPr wrap="square" lIns="0" tIns="0" rIns="0" bIns="0" rtlCol="0" anchor="t"/>
           <a:lstStyle/>
           <a:p>
-            <a:pPr algn="l" indent="0" marL="0">
+            <a:pPr marL="0" indent="0" algn="l">
               <a:buNone/>
             </a:pPr>
             <a:r>
@@ -12970,9 +13153,9 @@
                 <a:solidFill>
                   <a:srgbClr val="B3D6DD"/>
                 </a:solidFill>
-                <a:latin typeface="Open Sans" pitchFamily="34" charset="0"/>
-                <a:ea typeface="Open Sans" pitchFamily="34" charset="-122"/>
-                <a:cs typeface="Open Sans" pitchFamily="34" charset="-120"/>
+                <a:latin typeface="Open Sans Light" pitchFamily="34" charset="0"/>
+                <a:ea typeface="Open Sans Light" pitchFamily="34" charset="-122"/>
+                <a:cs typeface="Open Sans Light" pitchFamily="34" charset="-120"/>
               </a:rPr>
               <a:t>The eligible population looks like the low-wage workforce, because it is the low-wage workforce.</a:t>
             </a:r>
@@ -12996,6 +13179,7 @@
         <a:solidFill>
           <a:srgbClr val="FFFFFF"/>
         </a:solidFill>
+        <a:effectLst/>
       </p:bgPr>
     </p:bg>
     <p:spTree>
@@ -13033,17 +13217,17 @@
           <a:bodyPr wrap="square" lIns="0" tIns="0" rIns="0" bIns="0" rtlCol="0" anchor="ctr"/>
           <a:lstStyle/>
           <a:p>
-            <a:pPr algn="l" indent="0" marL="0">
+            <a:pPr marL="0" indent="0" algn="l">
               <a:buNone/>
             </a:pPr>
             <a:r>
-              <a:rPr lang="en-US" sz="1100" b="1" spc="200" kern="0" dirty="0">
+              <a:rPr lang="en-US" sz="1100" b="1" kern="0" spc="200" dirty="0">
                 <a:solidFill>
                   <a:srgbClr val="19644D"/>
                 </a:solidFill>
-                <a:latin typeface="Open Sans" pitchFamily="34" charset="0"/>
-                <a:ea typeface="Open Sans" pitchFamily="34" charset="-122"/>
-                <a:cs typeface="Open Sans" pitchFamily="34" charset="-120"/>
+                <a:latin typeface="Open Sans ExtraBold" pitchFamily="34" charset="0"/>
+                <a:ea typeface="Open Sans ExtraBold" pitchFamily="34" charset="-122"/>
+                <a:cs typeface="Open Sans ExtraBold" pitchFamily="34" charset="-120"/>
               </a:rPr>
               <a:t>WHO GETS THE MONEY?</a:t>
             </a:r>
@@ -13072,7 +13256,7 @@
           <a:bodyPr wrap="square" lIns="0" tIns="0" rIns="0" bIns="0" rtlCol="0" anchor="t"/>
           <a:lstStyle/>
           <a:p>
-            <a:pPr algn="l" indent="0" marL="0">
+            <a:pPr marL="0" indent="0" algn="l">
               <a:lnSpc>
                 <a:spcPct val="98000"/>
               </a:lnSpc>
@@ -13114,7 +13298,7 @@
           <a:bodyPr wrap="square" lIns="0" tIns="0" rIns="0" bIns="0" rtlCol="0" anchor="t"/>
           <a:lstStyle/>
           <a:p>
-            <a:pPr indent="0" marL="0">
+            <a:pPr marL="0" indent="0">
               <a:lnSpc>
                 <a:spcPct val="100000"/>
               </a:lnSpc>
@@ -13125,9 +13309,9 @@
                 <a:solidFill>
                   <a:srgbClr val="3A3A3A"/>
                 </a:solidFill>
-                <a:latin typeface="Open Sans" pitchFamily="34" charset="0"/>
-                <a:ea typeface="Open Sans" pitchFamily="34" charset="-122"/>
-                <a:cs typeface="Open Sans" pitchFamily="34" charset="-120"/>
+                <a:latin typeface="Open Sans ExtraBold" pitchFamily="34" charset="0"/>
+                <a:ea typeface="Open Sans ExtraBold" pitchFamily="34" charset="-122"/>
+                <a:cs typeface="Open Sans ExtraBold" pitchFamily="34" charset="-120"/>
               </a:rPr>
               <a:t>Dashed line: overall take-up, 21.7% of the paid-hourly workforce.</a:t>
             </a:r>
@@ -13137,14 +13321,14 @@
       </p:sp>
       <p:pic>
         <p:nvPicPr>
-          <p:cNvPr id="5" name="Image 0" descr="/Users/benjamin/Documents/GitHub/eig-wagesubsidy-policy-sim/output/figures/slides/fig03_takeup_by_group.png">    </p:cNvPr>
+          <p:cNvPr id="5" name="Image 0" descr="/Users/benjamin/Documents/GitHub/eig-wagesubsidy-policy-sim/output/figures/slides/fig03_takeup_by_group.png"/>
           <p:cNvPicPr>
             <a:picLocks noChangeAspect="1"/>
           </p:cNvPicPr>
           <p:nvPr/>
         </p:nvPicPr>
         <p:blipFill>
-          <a:blip r:embed="rId1"/>
+          <a:blip r:embed="rId3"/>
           <a:stretch>
             <a:fillRect/>
           </a:stretch>
@@ -13192,9 +13376,9 @@
                 <a:solidFill>
                   <a:srgbClr val="3A3A3A"/>
                 </a:solidFill>
-                <a:latin typeface="Open Sans" pitchFamily="34" charset="0"/>
-                <a:ea typeface="Open Sans" pitchFamily="34" charset="-122"/>
-                <a:cs typeface="Open Sans" pitchFamily="34" charset="-120"/>
+                <a:latin typeface="Open Sans Light" pitchFamily="34" charset="0"/>
+                <a:ea typeface="Open Sans Light" pitchFamily="34" charset="-122"/>
+                <a:cs typeface="Open Sans Light" pitchFamily="34" charset="-120"/>
               </a:rPr>
               <a:t>Women: 26.2% take-up vs. 17.2% for men; women are 60.5% of recipients.</a:t>
             </a:r>
@@ -13213,9 +13397,9 @@
                 <a:solidFill>
                   <a:srgbClr val="3A3A3A"/>
                 </a:solidFill>
-                <a:latin typeface="Open Sans" pitchFamily="34" charset="0"/>
-                <a:ea typeface="Open Sans" pitchFamily="34" charset="-122"/>
-                <a:cs typeface="Open Sans" pitchFamily="34" charset="-120"/>
+                <a:latin typeface="Open Sans Light" pitchFamily="34" charset="0"/>
+                <a:ea typeface="Open Sans Light" pitchFamily="34" charset="-122"/>
+                <a:cs typeface="Open Sans Light" pitchFamily="34" charset="-120"/>
               </a:rPr>
               <a:t>Ages 16–24: 43.0% qualify — the highest take-up of any group.</a:t>
             </a:r>
@@ -13234,9 +13418,9 @@
                 <a:solidFill>
                   <a:srgbClr val="3A3A3A"/>
                 </a:solidFill>
-                <a:latin typeface="Open Sans" pitchFamily="34" charset="0"/>
-                <a:ea typeface="Open Sans" pitchFamily="34" charset="-122"/>
-                <a:cs typeface="Open Sans" pitchFamily="34" charset="-120"/>
+                <a:latin typeface="Open Sans Light" pitchFamily="34" charset="0"/>
+                <a:ea typeface="Open Sans Light" pitchFamily="34" charset="-122"/>
+                <a:cs typeface="Open Sans Light" pitchFamily="34" charset="-120"/>
               </a:rPr>
               <a:t>Less than high school: 37.4% qualify, vs. 6.8% with a graduate degree.</a:t>
             </a:r>
@@ -13255,9 +13439,9 @@
                 <a:solidFill>
                   <a:srgbClr val="3A3A3A"/>
                 </a:solidFill>
-                <a:latin typeface="Open Sans" pitchFamily="34" charset="0"/>
-                <a:ea typeface="Open Sans" pitchFamily="34" charset="-122"/>
-                <a:cs typeface="Open Sans" pitchFamily="34" charset="-120"/>
+                <a:latin typeface="Open Sans Light" pitchFamily="34" charset="0"/>
+                <a:ea typeface="Open Sans Light" pitchFamily="34" charset="-122"/>
+                <a:cs typeface="Open Sans Light" pitchFamily="34" charset="-120"/>
               </a:rPr>
               <a:t>Single parents: 23.5% qualify, well above married parents (13.5%).</a:t>
             </a:r>
@@ -13286,7 +13470,7 @@
           <a:bodyPr wrap="square" lIns="0" tIns="0" rIns="0" bIns="0" rtlCol="0" anchor="ctr"/>
           <a:lstStyle/>
           <a:p>
-            <a:pPr indent="0" marL="0">
+            <a:pPr marL="0" indent="0">
               <a:buNone/>
             </a:pPr>
             <a:r>
@@ -13294,9 +13478,9 @@
                 <a:solidFill>
                   <a:srgbClr val="8A8A8A"/>
                 </a:solidFill>
-                <a:latin typeface="Open Sans" pitchFamily="34" charset="0"/>
-                <a:ea typeface="Open Sans" pitchFamily="34" charset="-122"/>
-                <a:cs typeface="Open Sans" pitchFamily="34" charset="-120"/>
+                <a:latin typeface="Open Sans Light" pitchFamily="34" charset="0"/>
+                <a:ea typeface="Open Sans Light" pitchFamily="34" charset="-122"/>
+                <a:cs typeface="Open Sans Light" pitchFamily="34" charset="-120"/>
               </a:rPr>
               <a:t>Source: Economic Innovation Group 80-80 wage subsidy simulation, 2026.</a:t>
             </a:r>
@@ -13605,4 +13789,319 @@
     </a:ext>
   </a:extLst>
 </a:theme>
+</file>
+
+<file path=ppt/theme/theme2.xml><?xml version="1.0" encoding="utf-8"?>
+<a:theme xmlns:a="http://schemas.openxmlformats.org/drawingml/2006/main" name="Office Theme">
+  <a:themeElements>
+    <a:clrScheme name="Office">
+      <a:dk1>
+        <a:sysClr val="windowText" lastClr="000000"/>
+      </a:dk1>
+      <a:lt1>
+        <a:sysClr val="window" lastClr="FFFFFF"/>
+      </a:lt1>
+      <a:dk2>
+        <a:srgbClr val="0E2841"/>
+      </a:dk2>
+      <a:lt2>
+        <a:srgbClr val="E8E8E8"/>
+      </a:lt2>
+      <a:accent1>
+        <a:srgbClr val="156082"/>
+      </a:accent1>
+      <a:accent2>
+        <a:srgbClr val="E97132"/>
+      </a:accent2>
+      <a:accent3>
+        <a:srgbClr val="196B24"/>
+      </a:accent3>
+      <a:accent4>
+        <a:srgbClr val="0F9ED5"/>
+      </a:accent4>
+      <a:accent5>
+        <a:srgbClr val="A02B93"/>
+      </a:accent5>
+      <a:accent6>
+        <a:srgbClr val="4EA72E"/>
+      </a:accent6>
+      <a:hlink>
+        <a:srgbClr val="467886"/>
+      </a:hlink>
+      <a:folHlink>
+        <a:srgbClr val="96607D"/>
+      </a:folHlink>
+    </a:clrScheme>
+    <a:fontScheme name="Office">
+      <a:majorFont>
+        <a:latin typeface="Aptos Display" panose="02110004020202020204"/>
+        <a:ea typeface=""/>
+        <a:cs typeface=""/>
+        <a:font script="Jpan" typeface="游ゴシック Light"/>
+        <a:font script="Hang" typeface="맑은 고딕"/>
+        <a:font script="Hans" typeface="等线 Light"/>
+        <a:font script="Hant" typeface="新細明體"/>
+        <a:font script="Arab" typeface="Times New Roman"/>
+        <a:font script="Hebr" typeface="Times New Roman"/>
+        <a:font script="Thai" typeface="Angsana New"/>
+        <a:font script="Ethi" typeface="Nyala"/>
+        <a:font script="Beng" typeface="Vrinda"/>
+        <a:font script="Gujr" typeface="Shruti"/>
+        <a:font script="Khmr" typeface="MoolBoran"/>
+        <a:font script="Knda" typeface="Tunga"/>
+        <a:font script="Guru" typeface="Raavi"/>
+        <a:font script="Cans" typeface="Euphemia"/>
+        <a:font script="Cher" typeface="Plantagenet Cherokee"/>
+        <a:font script="Yiii" typeface="Microsoft Yi Baiti"/>
+        <a:font script="Tibt" typeface="Microsoft Himalaya"/>
+        <a:font script="Thaa" typeface="MV Boli"/>
+        <a:font script="Deva" typeface="Mangal"/>
+        <a:font script="Telu" typeface="Gautami"/>
+        <a:font script="Taml" typeface="Latha"/>
+        <a:font script="Syrc" typeface="Estrangelo Edessa"/>
+        <a:font script="Orya" typeface="Kalinga"/>
+        <a:font script="Mlym" typeface="Kartika"/>
+        <a:font script="Laoo" typeface="DokChampa"/>
+        <a:font script="Sinh" typeface="Iskoola Pota"/>
+        <a:font script="Mong" typeface="Mongolian Baiti"/>
+        <a:font script="Viet" typeface="Times New Roman"/>
+        <a:font script="Uigh" typeface="Microsoft Uighur"/>
+        <a:font script="Geor" typeface="Sylfaen"/>
+        <a:font script="Armn" typeface="Arial"/>
+        <a:font script="Bugi" typeface="Leelawadee UI"/>
+        <a:font script="Bopo" typeface="Microsoft JhengHei"/>
+        <a:font script="Java" typeface="Javanese Text"/>
+        <a:font script="Lisu" typeface="Segoe UI"/>
+        <a:font script="Mymr" typeface="Myanmar Text"/>
+        <a:font script="Nkoo" typeface="Ebrima"/>
+        <a:font script="Olck" typeface="Nirmala UI"/>
+        <a:font script="Osma" typeface="Ebrima"/>
+        <a:font script="Phag" typeface="Phagspa"/>
+        <a:font script="Syrn" typeface="Estrangelo Edessa"/>
+        <a:font script="Syrj" typeface="Estrangelo Edessa"/>
+        <a:font script="Syre" typeface="Estrangelo Edessa"/>
+        <a:font script="Sora" typeface="Nirmala UI"/>
+        <a:font script="Tale" typeface="Microsoft Tai Le"/>
+        <a:font script="Talu" typeface="Microsoft New Tai Lue"/>
+        <a:font script="Tfng" typeface="Ebrima"/>
+      </a:majorFont>
+      <a:minorFont>
+        <a:latin typeface="Aptos" panose="02110004020202020204"/>
+        <a:ea typeface=""/>
+        <a:cs typeface=""/>
+        <a:font script="Jpan" typeface="游ゴシック"/>
+        <a:font script="Hang" typeface="맑은 고딕"/>
+        <a:font script="Hans" typeface="等线"/>
+        <a:font script="Hant" typeface="新細明體"/>
+        <a:font script="Arab" typeface="Arial"/>
+        <a:font script="Hebr" typeface="Arial"/>
+        <a:font script="Thai" typeface="Cordia New"/>
+        <a:font script="Ethi" typeface="Nyala"/>
+        <a:font script="Beng" typeface="Vrinda"/>
+        <a:font script="Gujr" typeface="Shruti"/>
+        <a:font script="Khmr" typeface="DaunPenh"/>
+        <a:font script="Knda" typeface="Tunga"/>
+        <a:font script="Guru" typeface="Raavi"/>
+        <a:font script="Cans" typeface="Euphemia"/>
+        <a:font script="Cher" typeface="Plantagenet Cherokee"/>
+        <a:font script="Yiii" typeface="Microsoft Yi Baiti"/>
+        <a:font script="Tibt" typeface="Microsoft Himalaya"/>
+        <a:font script="Thaa" typeface="MV Boli"/>
+        <a:font script="Deva" typeface="Mangal"/>
+        <a:font script="Telu" typeface="Gautami"/>
+        <a:font script="Taml" typeface="Latha"/>
+        <a:font script="Syrc" typeface="Estrangelo Edessa"/>
+        <a:font script="Orya" typeface="Kalinga"/>
+        <a:font script="Mlym" typeface="Kartika"/>
+        <a:font script="Laoo" typeface="DokChampa"/>
+        <a:font script="Sinh" typeface="Iskoola Pota"/>
+        <a:font script="Mong" typeface="Mongolian Baiti"/>
+        <a:font script="Viet" typeface="Arial"/>
+        <a:font script="Uigh" typeface="Microsoft Uighur"/>
+        <a:font script="Geor" typeface="Sylfaen"/>
+        <a:font script="Armn" typeface="Arial"/>
+        <a:font script="Bugi" typeface="Leelawadee UI"/>
+        <a:font script="Bopo" typeface="Microsoft JhengHei"/>
+        <a:font script="Java" typeface="Javanese Text"/>
+        <a:font script="Lisu" typeface="Segoe UI"/>
+        <a:font script="Mymr" typeface="Myanmar Text"/>
+        <a:font script="Nkoo" typeface="Ebrima"/>
+        <a:font script="Olck" typeface="Nirmala UI"/>
+        <a:font script="Osma" typeface="Ebrima"/>
+        <a:font script="Phag" typeface="Phagspa"/>
+        <a:font script="Syrn" typeface="Estrangelo Edessa"/>
+        <a:font script="Syrj" typeface="Estrangelo Edessa"/>
+        <a:font script="Syre" typeface="Estrangelo Edessa"/>
+        <a:font script="Sora" typeface="Nirmala UI"/>
+        <a:font script="Tale" typeface="Microsoft Tai Le"/>
+        <a:font script="Talu" typeface="Microsoft New Tai Lue"/>
+        <a:font script="Tfng" typeface="Ebrima"/>
+      </a:minorFont>
+    </a:fontScheme>
+    <a:fmtScheme name="Office">
+      <a:fillStyleLst>
+        <a:solidFill>
+          <a:schemeClr val="phClr"/>
+        </a:solidFill>
+        <a:gradFill rotWithShape="1">
+          <a:gsLst>
+            <a:gs pos="0">
+              <a:schemeClr val="phClr">
+                <a:lumMod val="110000"/>
+                <a:satMod val="105000"/>
+                <a:tint val="67000"/>
+              </a:schemeClr>
+            </a:gs>
+            <a:gs pos="50000">
+              <a:schemeClr val="phClr">
+                <a:lumMod val="105000"/>
+                <a:satMod val="103000"/>
+                <a:tint val="73000"/>
+              </a:schemeClr>
+            </a:gs>
+            <a:gs pos="100000">
+              <a:schemeClr val="phClr">
+                <a:lumMod val="105000"/>
+                <a:satMod val="109000"/>
+                <a:tint val="81000"/>
+              </a:schemeClr>
+            </a:gs>
+          </a:gsLst>
+          <a:lin ang="5400000" scaled="0"/>
+        </a:gradFill>
+        <a:gradFill rotWithShape="1">
+          <a:gsLst>
+            <a:gs pos="0">
+              <a:schemeClr val="phClr">
+                <a:satMod val="103000"/>
+                <a:lumMod val="102000"/>
+                <a:tint val="94000"/>
+              </a:schemeClr>
+            </a:gs>
+            <a:gs pos="50000">
+              <a:schemeClr val="phClr">
+                <a:satMod val="110000"/>
+                <a:lumMod val="100000"/>
+                <a:shade val="100000"/>
+              </a:schemeClr>
+            </a:gs>
+            <a:gs pos="100000">
+              <a:schemeClr val="phClr">
+                <a:lumMod val="99000"/>
+                <a:satMod val="120000"/>
+                <a:shade val="78000"/>
+              </a:schemeClr>
+            </a:gs>
+          </a:gsLst>
+          <a:lin ang="5400000" scaled="0"/>
+        </a:gradFill>
+      </a:fillStyleLst>
+      <a:lnStyleLst>
+        <a:ln w="12700" cap="flat" cmpd="sng" algn="ctr">
+          <a:solidFill>
+            <a:schemeClr val="phClr"/>
+          </a:solidFill>
+          <a:prstDash val="solid"/>
+          <a:miter lim="800000"/>
+        </a:ln>
+        <a:ln w="19050" cap="flat" cmpd="sng" algn="ctr">
+          <a:solidFill>
+            <a:schemeClr val="phClr"/>
+          </a:solidFill>
+          <a:prstDash val="solid"/>
+          <a:miter lim="800000"/>
+        </a:ln>
+        <a:ln w="25400" cap="flat" cmpd="sng" algn="ctr">
+          <a:solidFill>
+            <a:schemeClr val="phClr"/>
+          </a:solidFill>
+          <a:prstDash val="solid"/>
+          <a:miter lim="800000"/>
+        </a:ln>
+      </a:lnStyleLst>
+      <a:effectStyleLst>
+        <a:effectStyle>
+          <a:effectLst/>
+        </a:effectStyle>
+        <a:effectStyle>
+          <a:effectLst/>
+        </a:effectStyle>
+        <a:effectStyle>
+          <a:effectLst>
+            <a:outerShdw blurRad="57150" dist="19050" dir="5400000" algn="ctr" rotWithShape="0">
+              <a:srgbClr val="000000">
+                <a:alpha val="63000"/>
+              </a:srgbClr>
+            </a:outerShdw>
+          </a:effectLst>
+        </a:effectStyle>
+      </a:effectStyleLst>
+      <a:bgFillStyleLst>
+        <a:solidFill>
+          <a:schemeClr val="phClr"/>
+        </a:solidFill>
+        <a:solidFill>
+          <a:schemeClr val="phClr">
+            <a:tint val="95000"/>
+            <a:satMod val="170000"/>
+          </a:schemeClr>
+        </a:solidFill>
+        <a:gradFill rotWithShape="1">
+          <a:gsLst>
+            <a:gs pos="0">
+              <a:schemeClr val="phClr">
+                <a:tint val="93000"/>
+                <a:satMod val="150000"/>
+                <a:shade val="98000"/>
+                <a:lumMod val="102000"/>
+              </a:schemeClr>
+            </a:gs>
+            <a:gs pos="50000">
+              <a:schemeClr val="phClr">
+                <a:tint val="98000"/>
+                <a:satMod val="130000"/>
+                <a:shade val="90000"/>
+                <a:lumMod val="103000"/>
+              </a:schemeClr>
+            </a:gs>
+            <a:gs pos="100000">
+              <a:schemeClr val="phClr">
+                <a:shade val="63000"/>
+                <a:satMod val="120000"/>
+              </a:schemeClr>
+            </a:gs>
+          </a:gsLst>
+          <a:lin ang="5400000" scaled="0"/>
+        </a:gradFill>
+      </a:bgFillStyleLst>
+    </a:fmtScheme>
+  </a:themeElements>
+  <a:objectDefaults>
+    <a:lnDef>
+      <a:spPr/>
+      <a:bodyPr/>
+      <a:lstStyle/>
+      <a:style>
+        <a:lnRef idx="2">
+          <a:schemeClr val="accent1"/>
+        </a:lnRef>
+        <a:fillRef idx="0">
+          <a:schemeClr val="accent1"/>
+        </a:fillRef>
+        <a:effectRef idx="1">
+          <a:schemeClr val="accent1"/>
+        </a:effectRef>
+        <a:fontRef idx="minor">
+          <a:schemeClr val="tx1"/>
+        </a:fontRef>
+      </a:style>
+    </a:lnDef>
+  </a:objectDefaults>
+  <a:extraClrSchemeLst/>
+  <a:extLst>
+    <a:ext uri="{05A4C25C-085E-4340-85A3-A5531E510DB2}">
+      <thm15:themeFamily xmlns:thm15="http://schemas.microsoft.com/office/thememl/2012/main" name="Office Theme" id="{2E142A2C-CD16-42D6-873A-C26D2A0506FA}" vid="{1BDDFF52-6CD6-40A5-AB3C-68EB2F1E4D0A}"/>
+    </a:ext>
+  </a:extLst>
+</a:theme>
 </file>